--- a/01_C_Programming/01_Getting_Started/02_Constants_Variables_and_Data_Types/resources/1-02 Constants Variables and Data Types in C.pptx
+++ b/01_C_Programming/01_Getting_Started/02_Constants_Variables_and_Data_Types/resources/1-02 Constants Variables and Data Types in C.pptx
@@ -2,38 +2,39 @@
 <file path=ppt/presentation.xml><?xml version="1.0" encoding="utf-8"?>
 <p:presentation xmlns:p="http://schemas.openxmlformats.org/presentationml/2006/main">
   <p:sldMasterIdLst>
-    <p:sldMasterId xmlns:r="http://schemas.openxmlformats.org/officeDocument/2006/relationships" id="2147483648" r:id="Rec85f55383904189"/>
+    <p:sldMasterId xmlns:r="http://schemas.openxmlformats.org/officeDocument/2006/relationships" id="2147483648" r:id="R4486f78461474cdb"/>
   </p:sldMasterIdLst>
   <p:notesMasterIdLst>
-    <p:notesMasterId xmlns:r="http://schemas.openxmlformats.org/officeDocument/2006/relationships" r:id="Rc5bda479611c4b2d"/>
+    <p:notesMasterId xmlns:r="http://schemas.openxmlformats.org/officeDocument/2006/relationships" r:id="Re6cec79335de4e64"/>
   </p:notesMasterIdLst>
   <p:sldIdLst>
-    <p:sldId xmlns:r="http://schemas.openxmlformats.org/officeDocument/2006/relationships" id="256" r:id="R2a6d698933dc469a"/>
-    <p:sldId xmlns:r="http://schemas.openxmlformats.org/officeDocument/2006/relationships" id="257" r:id="R47951c578ba344ee"/>
-    <p:sldId xmlns:r="http://schemas.openxmlformats.org/officeDocument/2006/relationships" id="258" r:id="Rfa335a0e09d648fe"/>
-    <p:sldId xmlns:r="http://schemas.openxmlformats.org/officeDocument/2006/relationships" id="259" r:id="Rde0d4580c8104cdd"/>
-    <p:sldId xmlns:r="http://schemas.openxmlformats.org/officeDocument/2006/relationships" id="260" r:id="R167b9f99179449e5"/>
-    <p:sldId xmlns:r="http://schemas.openxmlformats.org/officeDocument/2006/relationships" id="261" r:id="R7e3c0e9a899e4630"/>
-    <p:sldId xmlns:r="http://schemas.openxmlformats.org/officeDocument/2006/relationships" id="262" r:id="Ra61ff495522c4d55"/>
-    <p:sldId xmlns:r="http://schemas.openxmlformats.org/officeDocument/2006/relationships" id="263" r:id="R5cecab94891e46c9"/>
-    <p:sldId xmlns:r="http://schemas.openxmlformats.org/officeDocument/2006/relationships" id="264" r:id="Rc4810dff7a9f4d6c"/>
-    <p:sldId xmlns:r="http://schemas.openxmlformats.org/officeDocument/2006/relationships" id="265" r:id="R82741d551c7e46c7"/>
-    <p:sldId xmlns:r="http://schemas.openxmlformats.org/officeDocument/2006/relationships" id="266" r:id="R5055c6fbc1a14f03"/>
-    <p:sldId xmlns:r="http://schemas.openxmlformats.org/officeDocument/2006/relationships" id="267" r:id="R2545216fc0f0426b"/>
-    <p:sldId xmlns:r="http://schemas.openxmlformats.org/officeDocument/2006/relationships" id="268" r:id="Rad6bf2d01bfc47e8"/>
-    <p:sldId xmlns:r="http://schemas.openxmlformats.org/officeDocument/2006/relationships" id="269" r:id="R459ce3239c534aa1"/>
-    <p:sldId xmlns:r="http://schemas.openxmlformats.org/officeDocument/2006/relationships" id="270" r:id="R03729b8f53eb4443"/>
-    <p:sldId xmlns:r="http://schemas.openxmlformats.org/officeDocument/2006/relationships" id="271" r:id="Rb38d9bb8d0dd4b0b"/>
-    <p:sldId xmlns:r="http://schemas.openxmlformats.org/officeDocument/2006/relationships" id="272" r:id="R992b6e3330b74cec"/>
-    <p:sldId xmlns:r="http://schemas.openxmlformats.org/officeDocument/2006/relationships" id="273" r:id="R2a47f369f9224634"/>
-    <p:sldId xmlns:r="http://schemas.openxmlformats.org/officeDocument/2006/relationships" id="274" r:id="Rc1ac9c2c7822499b"/>
-    <p:sldId xmlns:r="http://schemas.openxmlformats.org/officeDocument/2006/relationships" id="275" r:id="Rc53ee9f38eb84700"/>
-    <p:sldId xmlns:r="http://schemas.openxmlformats.org/officeDocument/2006/relationships" id="276" r:id="R4ae0fb08ac724e6b"/>
-    <p:sldId xmlns:r="http://schemas.openxmlformats.org/officeDocument/2006/relationships" id="277" r:id="R2c534b32451e4d9d"/>
-    <p:sldId xmlns:r="http://schemas.openxmlformats.org/officeDocument/2006/relationships" id="278" r:id="Rc37fec9c4b00441f"/>
-    <p:sldId xmlns:r="http://schemas.openxmlformats.org/officeDocument/2006/relationships" id="279" r:id="Rf1cc3c24282e40d8"/>
-    <p:sldId xmlns:r="http://schemas.openxmlformats.org/officeDocument/2006/relationships" id="280" r:id="R757906a57d8c4141"/>
-    <p:sldId xmlns:r="http://schemas.openxmlformats.org/officeDocument/2006/relationships" id="281" r:id="R149d80b348be45c7"/>
+    <p:sldId xmlns:r="http://schemas.openxmlformats.org/officeDocument/2006/relationships" id="256" r:id="R54e6e9112eaa43a8"/>
+    <p:sldId xmlns:r="http://schemas.openxmlformats.org/officeDocument/2006/relationships" id="257" r:id="Rf2dc24f63596472c"/>
+    <p:sldId xmlns:r="http://schemas.openxmlformats.org/officeDocument/2006/relationships" id="258" r:id="Ra0dd109b9d0e4f9c"/>
+    <p:sldId xmlns:r="http://schemas.openxmlformats.org/officeDocument/2006/relationships" id="259" r:id="Rd3d7c39b020442f8"/>
+    <p:sldId xmlns:r="http://schemas.openxmlformats.org/officeDocument/2006/relationships" id="260" r:id="R68db0154fd704ac6"/>
+    <p:sldId xmlns:r="http://schemas.openxmlformats.org/officeDocument/2006/relationships" id="261" r:id="Rb35338cf913d41bc"/>
+    <p:sldId xmlns:r="http://schemas.openxmlformats.org/officeDocument/2006/relationships" id="262" r:id="R82e7fcefa28644ab"/>
+    <p:sldId xmlns:r="http://schemas.openxmlformats.org/officeDocument/2006/relationships" id="263" r:id="R5457562c06fd4ea4"/>
+    <p:sldId xmlns:r="http://schemas.openxmlformats.org/officeDocument/2006/relationships" id="264" r:id="R8223a0ba2e324f5e"/>
+    <p:sldId xmlns:r="http://schemas.openxmlformats.org/officeDocument/2006/relationships" id="265" r:id="R06251d0276304a30"/>
+    <p:sldId xmlns:r="http://schemas.openxmlformats.org/officeDocument/2006/relationships" id="266" r:id="Rc9087647503343cc"/>
+    <p:sldId xmlns:r="http://schemas.openxmlformats.org/officeDocument/2006/relationships" id="267" r:id="R15dcbf9ab7a8487d"/>
+    <p:sldId xmlns:r="http://schemas.openxmlformats.org/officeDocument/2006/relationships" id="268" r:id="Rb343142ea25248b4"/>
+    <p:sldId xmlns:r="http://schemas.openxmlformats.org/officeDocument/2006/relationships" id="269" r:id="Rb5987eb85ae64ddd"/>
+    <p:sldId xmlns:r="http://schemas.openxmlformats.org/officeDocument/2006/relationships" id="270" r:id="R7e61c4695510408d"/>
+    <p:sldId xmlns:r="http://schemas.openxmlformats.org/officeDocument/2006/relationships" id="271" r:id="Ra44105181dc6431a"/>
+    <p:sldId xmlns:r="http://schemas.openxmlformats.org/officeDocument/2006/relationships" id="272" r:id="Rb977e1c144e441db"/>
+    <p:sldId xmlns:r="http://schemas.openxmlformats.org/officeDocument/2006/relationships" id="273" r:id="Rd1b1844ede56457e"/>
+    <p:sldId xmlns:r="http://schemas.openxmlformats.org/officeDocument/2006/relationships" id="274" r:id="Rda7813c945fe4df7"/>
+    <p:sldId xmlns:r="http://schemas.openxmlformats.org/officeDocument/2006/relationships" id="275" r:id="R024877e2f1df4aa8"/>
+    <p:sldId xmlns:r="http://schemas.openxmlformats.org/officeDocument/2006/relationships" id="276" r:id="Rd488653e4af040a7"/>
+    <p:sldId xmlns:r="http://schemas.openxmlformats.org/officeDocument/2006/relationships" id="277" r:id="Rc39b37b2037c4530"/>
+    <p:sldId xmlns:r="http://schemas.openxmlformats.org/officeDocument/2006/relationships" id="278" r:id="R1125a5d6c993488f"/>
+    <p:sldId xmlns:r="http://schemas.openxmlformats.org/officeDocument/2006/relationships" id="279" r:id="Re71a94cc9ee54766"/>
+    <p:sldId xmlns:r="http://schemas.openxmlformats.org/officeDocument/2006/relationships" id="280" r:id="R64a1c69c4d284dcb"/>
+    <p:sldId xmlns:r="http://schemas.openxmlformats.org/officeDocument/2006/relationships" id="281" r:id="R23542f83c0a34e5e"/>
+    <p:sldId xmlns:r="http://schemas.openxmlformats.org/officeDocument/2006/relationships" id="282" r:id="R004eaf85f5604cac"/>
   </p:sldIdLst>
   <p:sldSz cx="12192000" cy="6858000"/>
   <p:notesSz cx="6858000" cy="9144000"/>
@@ -1170,6 +1171,16 @@
               <a:t/>
             </a:r>
           </a:p>
+          <a:p xmlns:a="http://schemas.openxmlformats.org/drawingml/2006/main">
+            <a:r>
+              <a:t/>
+            </a:r>
+          </a:p>
+          <a:p xmlns:a="http://schemas.openxmlformats.org/drawingml/2006/main">
+            <a:r>
+              <a:t/>
+            </a:r>
+          </a:p>
         </p:txBody>
       </p:sp>
       <p:sp>
@@ -1757,6 +1768,76 @@
 </p:notes>
 </file>
 
+<file path=ppt/notesSlides/notesSlide27.xml><?xml version="1.0" encoding="utf-8"?>
+<p:notes xmlns:p="http://schemas.openxmlformats.org/presentationml/2006/main">
+  <p:cSld>
+    <p:spTree>
+      <p:nvGrpSpPr>
+        <p:cNvPr id="1" name=""/>
+        <p:cNvGrpSpPr/>
+        <p:nvPr/>
+      </p:nvGrpSpPr>
+      <p:grpSpPr>
+        <a:xfrm xmlns:a="http://schemas.openxmlformats.org/drawingml/2006/main"/>
+      </p:grpSpPr>
+      <p:sp>
+        <p:nvSpPr>
+          <p:cNvPr id="2" name="Slide Image Placeholder 1"/>
+          <p:cNvSpPr>
+            <a:spLocks xmlns:a="http://schemas.openxmlformats.org/drawingml/2006/main" noGrp="1"/>
+          </p:cNvSpPr>
+          <p:nvPr>
+            <p:ph type="sldImg" idx="0"/>
+          </p:nvPr>
+        </p:nvSpPr>
+        <p:spPr/>
+      </p:sp>
+      <p:sp>
+        <p:nvSpPr>
+          <p:cNvPr id="3" name="Notes Placeholder 2"/>
+          <p:cNvSpPr>
+            <a:spLocks xmlns:a="http://schemas.openxmlformats.org/drawingml/2006/main" noGrp="1"/>
+          </p:cNvSpPr>
+          <p:nvPr>
+            <p:ph type="body" idx="1"/>
+          </p:nvPr>
+        </p:nvSpPr>
+        <p:spPr/>
+        <p:txBody>
+          <a:bodyPr xmlns:a="http://schemas.openxmlformats.org/drawingml/2006/main"/>
+          <a:lstStyle xmlns:a="http://schemas.openxmlformats.org/drawingml/2006/main"/>
+          <a:p xmlns:a="http://schemas.openxmlformats.org/drawingml/2006/main">
+            <a:r>
+              <a:t/>
+            </a:r>
+          </a:p>
+        </p:txBody>
+      </p:sp>
+      <p:sp>
+        <p:nvSpPr>
+          <p:cNvPr id="4" name="Slide Number Placeholder 3"/>
+          <p:cNvSpPr>
+            <a:spLocks xmlns:a="http://schemas.openxmlformats.org/drawingml/2006/main" noGrp="1"/>
+          </p:cNvSpPr>
+          <p:nvPr>
+            <p:ph type="sldNum" idx="5"/>
+          </p:nvPr>
+        </p:nvSpPr>
+        <p:spPr/>
+        <p:txBody>
+          <a:bodyPr xmlns:a="http://schemas.openxmlformats.org/drawingml/2006/main"/>
+          <a:lstStyle xmlns:a="http://schemas.openxmlformats.org/drawingml/2006/main"/>
+          <a:p xmlns:a="http://schemas.openxmlformats.org/drawingml/2006/main"/>
+        </p:txBody>
+      </p:sp>
+    </p:spTree>
+  </p:cSld>
+  <p:clrMapOvr>
+    <a:masterClrMapping xmlns:a="http://schemas.openxmlformats.org/drawingml/2006/main"/>
+  </p:clrMapOvr>
+</p:notes>
+</file>
+
 <file path=ppt/notesSlides/notesSlide3.xml><?xml version="1.0" encoding="utf-8"?>
 <p:notes xmlns:p="http://schemas.openxmlformats.org/presentationml/2006/main">
   <p:cSld>
@@ -2315,6 +2396,7 @@
                 <a:spcPts val="0"/>
               </a:spcAft>
               <a:buNone/>
+              <a:defRPr/>
             </a:lvl1pPr>
             <a:lvl2pPr marL="0" indent="0">
               <a:lnSpc>
@@ -2327,6 +2409,7 @@
                 <a:spcPts val="0"/>
               </a:spcAft>
               <a:buNone/>
+              <a:defRPr/>
             </a:lvl2pPr>
             <a:lvl3pPr marL="0" indent="0">
               <a:lnSpc>
@@ -2339,6 +2422,7 @@
                 <a:spcPts val="0"/>
               </a:spcAft>
               <a:buNone/>
+              <a:defRPr/>
             </a:lvl3pPr>
             <a:lvl4pPr marL="0" indent="0">
               <a:lnSpc>
@@ -2351,6 +2435,7 @@
                 <a:spcPts val="0"/>
               </a:spcAft>
               <a:buNone/>
+              <a:defRPr/>
             </a:lvl4pPr>
             <a:lvl5pPr marL="0" indent="0">
               <a:lnSpc>
@@ -2363,6 +2448,7 @@
                 <a:spcPts val="0"/>
               </a:spcAft>
               <a:buNone/>
+              <a:defRPr/>
             </a:lvl5pPr>
             <a:lvl6pPr marL="0" indent="0">
               <a:lnSpc>
@@ -2375,6 +2461,7 @@
                 <a:spcPts val="0"/>
               </a:spcAft>
               <a:buNone/>
+              <a:defRPr/>
             </a:lvl6pPr>
             <a:lvl7pPr marL="0" indent="0">
               <a:lnSpc>
@@ -2387,6 +2474,7 @@
                 <a:spcPts val="0"/>
               </a:spcAft>
               <a:buNone/>
+              <a:defRPr/>
             </a:lvl7pPr>
             <a:lvl8pPr marL="0" indent="0">
               <a:lnSpc>
@@ -2399,6 +2487,7 @@
                 <a:spcPts val="0"/>
               </a:spcAft>
               <a:buNone/>
+              <a:defRPr/>
             </a:lvl8pPr>
             <a:lvl9pPr marL="0" indent="0">
               <a:lnSpc>
@@ -2411,6 +2500,7 @@
                 <a:spcPts val="0"/>
               </a:spcAft>
               <a:buNone/>
+              <a:defRPr/>
             </a:lvl9pPr>
           </a:lstStyle>
           <a:p xmlns:a="http://schemas.openxmlformats.org/drawingml/2006/main"/>
@@ -2472,6 +2562,7 @@
                 <a:spcPts val="0"/>
               </a:spcAft>
               <a:buNone/>
+              <a:defRPr/>
             </a:lvl1pPr>
             <a:lvl2pPr marL="0" indent="0">
               <a:lnSpc>
@@ -2484,6 +2575,7 @@
                 <a:spcPts val="0"/>
               </a:spcAft>
               <a:buNone/>
+              <a:defRPr/>
             </a:lvl2pPr>
             <a:lvl3pPr marL="0" indent="0">
               <a:lnSpc>
@@ -2496,6 +2588,7 @@
                 <a:spcPts val="0"/>
               </a:spcAft>
               <a:buNone/>
+              <a:defRPr/>
             </a:lvl3pPr>
             <a:lvl4pPr marL="0" indent="0">
               <a:lnSpc>
@@ -2508,6 +2601,7 @@
                 <a:spcPts val="0"/>
               </a:spcAft>
               <a:buNone/>
+              <a:defRPr/>
             </a:lvl4pPr>
             <a:lvl5pPr marL="0" indent="0">
               <a:lnSpc>
@@ -2520,6 +2614,7 @@
                 <a:spcPts val="0"/>
               </a:spcAft>
               <a:buNone/>
+              <a:defRPr/>
             </a:lvl5pPr>
             <a:lvl6pPr marL="0" indent="0">
               <a:lnSpc>
@@ -2532,6 +2627,7 @@
                 <a:spcPts val="0"/>
               </a:spcAft>
               <a:buNone/>
+              <a:defRPr/>
             </a:lvl6pPr>
             <a:lvl7pPr marL="0" indent="0">
               <a:lnSpc>
@@ -2544,6 +2640,7 @@
                 <a:spcPts val="0"/>
               </a:spcAft>
               <a:buNone/>
+              <a:defRPr/>
             </a:lvl7pPr>
             <a:lvl8pPr marL="0" indent="0">
               <a:lnSpc>
@@ -2556,6 +2653,7 @@
                 <a:spcPts val="0"/>
               </a:spcAft>
               <a:buNone/>
+              <a:defRPr/>
             </a:lvl8pPr>
             <a:lvl9pPr marL="0" indent="0">
               <a:lnSpc>
@@ -2568,6 +2666,7 @@
                 <a:spcPts val="0"/>
               </a:spcAft>
               <a:buNone/>
+              <a:defRPr/>
             </a:lvl9pPr>
           </a:lstStyle>
           <a:p xmlns:a="http://schemas.openxmlformats.org/drawingml/2006/main"/>
@@ -2646,6 +2745,7 @@
                 <a:spcPts val="0"/>
               </a:spcAft>
               <a:buNone/>
+              <a:defRPr/>
             </a:lvl1pPr>
             <a:lvl2pPr marL="0" indent="0">
               <a:lnSpc>
@@ -2658,6 +2758,7 @@
                 <a:spcPts val="0"/>
               </a:spcAft>
               <a:buNone/>
+              <a:defRPr/>
             </a:lvl2pPr>
             <a:lvl3pPr marL="0" indent="0">
               <a:lnSpc>
@@ -2670,6 +2771,7 @@
                 <a:spcPts val="0"/>
               </a:spcAft>
               <a:buNone/>
+              <a:defRPr/>
             </a:lvl3pPr>
             <a:lvl4pPr marL="0" indent="0">
               <a:lnSpc>
@@ -2682,6 +2784,7 @@
                 <a:spcPts val="0"/>
               </a:spcAft>
               <a:buNone/>
+              <a:defRPr/>
             </a:lvl4pPr>
             <a:lvl5pPr marL="0" indent="0">
               <a:lnSpc>
@@ -2694,6 +2797,7 @@
                 <a:spcPts val="0"/>
               </a:spcAft>
               <a:buNone/>
+              <a:defRPr/>
             </a:lvl5pPr>
             <a:lvl6pPr marL="0" indent="0">
               <a:lnSpc>
@@ -2706,6 +2810,7 @@
                 <a:spcPts val="0"/>
               </a:spcAft>
               <a:buNone/>
+              <a:defRPr/>
             </a:lvl6pPr>
             <a:lvl7pPr marL="0" indent="0">
               <a:lnSpc>
@@ -2718,6 +2823,7 @@
                 <a:spcPts val="0"/>
               </a:spcAft>
               <a:buNone/>
+              <a:defRPr/>
             </a:lvl7pPr>
             <a:lvl8pPr marL="0" indent="0">
               <a:lnSpc>
@@ -2730,6 +2836,7 @@
                 <a:spcPts val="0"/>
               </a:spcAft>
               <a:buNone/>
+              <a:defRPr/>
             </a:lvl8pPr>
             <a:lvl9pPr marL="0" indent="0">
               <a:lnSpc>
@@ -2742,6 +2849,7 @@
                 <a:spcPts val="0"/>
               </a:spcAft>
               <a:buNone/>
+              <a:defRPr/>
             </a:lvl9pPr>
           </a:lstStyle>
           <a:p xmlns:a="http://schemas.openxmlformats.org/drawingml/2006/main"/>
@@ -2820,6 +2928,7 @@
                 <a:spcPts val="0"/>
               </a:spcAft>
               <a:buNone/>
+              <a:defRPr/>
             </a:lvl1pPr>
             <a:lvl2pPr marL="0" indent="0">
               <a:lnSpc>
@@ -2832,6 +2941,7 @@
                 <a:spcPts val="0"/>
               </a:spcAft>
               <a:buNone/>
+              <a:defRPr/>
             </a:lvl2pPr>
             <a:lvl3pPr marL="0" indent="0">
               <a:lnSpc>
@@ -2844,6 +2954,7 @@
                 <a:spcPts val="0"/>
               </a:spcAft>
               <a:buNone/>
+              <a:defRPr/>
             </a:lvl3pPr>
             <a:lvl4pPr marL="0" indent="0">
               <a:lnSpc>
@@ -2856,6 +2967,7 @@
                 <a:spcPts val="0"/>
               </a:spcAft>
               <a:buNone/>
+              <a:defRPr/>
             </a:lvl4pPr>
             <a:lvl5pPr marL="0" indent="0">
               <a:lnSpc>
@@ -2868,6 +2980,7 @@
                 <a:spcPts val="0"/>
               </a:spcAft>
               <a:buNone/>
+              <a:defRPr/>
             </a:lvl5pPr>
             <a:lvl6pPr marL="0" indent="0">
               <a:lnSpc>
@@ -2880,6 +2993,7 @@
                 <a:spcPts val="0"/>
               </a:spcAft>
               <a:buNone/>
+              <a:defRPr/>
             </a:lvl6pPr>
             <a:lvl7pPr marL="0" indent="0">
               <a:lnSpc>
@@ -2892,6 +3006,7 @@
                 <a:spcPts val="0"/>
               </a:spcAft>
               <a:buNone/>
+              <a:defRPr/>
             </a:lvl7pPr>
             <a:lvl8pPr marL="0" indent="0">
               <a:lnSpc>
@@ -2904,6 +3019,7 @@
                 <a:spcPts val="0"/>
               </a:spcAft>
               <a:buNone/>
+              <a:defRPr/>
             </a:lvl8pPr>
             <a:lvl9pPr marL="0" indent="0">
               <a:lnSpc>
@@ -2916,6 +3032,7 @@
                 <a:spcPts val="0"/>
               </a:spcAft>
               <a:buNone/>
+              <a:defRPr/>
             </a:lvl9pPr>
           </a:lstStyle>
           <a:p xmlns:a="http://schemas.openxmlformats.org/drawingml/2006/main"/>
@@ -2977,6 +3094,7 @@
                 <a:spcPts val="1200"/>
               </a:spcAft>
               <a:buChar char="•"/>
+              <a:defRPr/>
             </a:lvl1pPr>
             <a:lvl2pPr marL="533400" indent="-228600">
               <a:lnSpc>
@@ -2989,6 +3107,7 @@
                 <a:spcPts val="1200"/>
               </a:spcAft>
               <a:buChar char="•"/>
+              <a:defRPr/>
             </a:lvl2pPr>
             <a:lvl3pPr marL="838200" indent="-228600">
               <a:lnSpc>
@@ -3001,6 +3120,7 @@
                 <a:spcPts val="1200"/>
               </a:spcAft>
               <a:buChar char="•"/>
+              <a:defRPr/>
             </a:lvl3pPr>
             <a:lvl4pPr marL="1143000" indent="-228600">
               <a:lnSpc>
@@ -3013,6 +3133,7 @@
                 <a:spcPts val="1200"/>
               </a:spcAft>
               <a:buChar char="•"/>
+              <a:defRPr/>
             </a:lvl4pPr>
             <a:lvl5pPr marL="1447800" indent="-228600">
               <a:lnSpc>
@@ -3025,6 +3146,7 @@
                 <a:spcPts val="1200"/>
               </a:spcAft>
               <a:buChar char="•"/>
+              <a:defRPr/>
             </a:lvl5pPr>
             <a:lvl6pPr marL="1752600" indent="-228600">
               <a:lnSpc>
@@ -3037,6 +3159,7 @@
                 <a:spcPts val="1200"/>
               </a:spcAft>
               <a:buChar char="•"/>
+              <a:defRPr/>
             </a:lvl6pPr>
             <a:lvl7pPr marL="2057400" indent="-228600">
               <a:lnSpc>
@@ -3049,6 +3172,7 @@
                 <a:spcPts val="1200"/>
               </a:spcAft>
               <a:buChar char="•"/>
+              <a:defRPr/>
             </a:lvl7pPr>
             <a:lvl8pPr marL="2362200" indent="-228600">
               <a:lnSpc>
@@ -3061,6 +3185,7 @@
                 <a:spcPts val="1200"/>
               </a:spcAft>
               <a:buChar char="•"/>
+              <a:defRPr/>
             </a:lvl8pPr>
             <a:lvl9pPr marL="2667000" indent="-228600">
               <a:lnSpc>
@@ -3073,6 +3198,7 @@
                 <a:spcPts val="1200"/>
               </a:spcAft>
               <a:buChar char="•"/>
+              <a:defRPr/>
             </a:lvl9pPr>
           </a:lstStyle>
           <a:p xmlns:a="http://schemas.openxmlformats.org/drawingml/2006/main"/>
@@ -3151,6 +3277,7 @@
                 <a:spcPts val="0"/>
               </a:spcAft>
               <a:buNone/>
+              <a:defRPr/>
             </a:lvl1pPr>
             <a:lvl2pPr marL="0" indent="0">
               <a:lnSpc>
@@ -3163,6 +3290,7 @@
                 <a:spcPts val="0"/>
               </a:spcAft>
               <a:buNone/>
+              <a:defRPr/>
             </a:lvl2pPr>
             <a:lvl3pPr marL="0" indent="0">
               <a:lnSpc>
@@ -3175,6 +3303,7 @@
                 <a:spcPts val="0"/>
               </a:spcAft>
               <a:buNone/>
+              <a:defRPr/>
             </a:lvl3pPr>
             <a:lvl4pPr marL="0" indent="0">
               <a:lnSpc>
@@ -3187,6 +3316,7 @@
                 <a:spcPts val="0"/>
               </a:spcAft>
               <a:buNone/>
+              <a:defRPr/>
             </a:lvl4pPr>
             <a:lvl5pPr marL="0" indent="0">
               <a:lnSpc>
@@ -3199,6 +3329,7 @@
                 <a:spcPts val="0"/>
               </a:spcAft>
               <a:buNone/>
+              <a:defRPr/>
             </a:lvl5pPr>
             <a:lvl6pPr marL="0" indent="0">
               <a:lnSpc>
@@ -3211,6 +3342,7 @@
                 <a:spcPts val="0"/>
               </a:spcAft>
               <a:buNone/>
+              <a:defRPr/>
             </a:lvl6pPr>
             <a:lvl7pPr marL="0" indent="0">
               <a:lnSpc>
@@ -3223,6 +3355,7 @@
                 <a:spcPts val="0"/>
               </a:spcAft>
               <a:buNone/>
+              <a:defRPr/>
             </a:lvl7pPr>
             <a:lvl8pPr marL="0" indent="0">
               <a:lnSpc>
@@ -3235,6 +3368,7 @@
                 <a:spcPts val="0"/>
               </a:spcAft>
               <a:buNone/>
+              <a:defRPr/>
             </a:lvl8pPr>
             <a:lvl9pPr marL="0" indent="0">
               <a:lnSpc>
@@ -3247,6 +3381,7 @@
                 <a:spcPts val="0"/>
               </a:spcAft>
               <a:buNone/>
+              <a:defRPr/>
             </a:lvl9pPr>
           </a:lstStyle>
           <a:p xmlns:a="http://schemas.openxmlformats.org/drawingml/2006/main"/>
@@ -3308,6 +3443,7 @@
                 <a:spcPts val="1200"/>
               </a:spcAft>
               <a:buChar char="•"/>
+              <a:defRPr/>
             </a:lvl1pPr>
             <a:lvl2pPr marL="533400" indent="-228600">
               <a:lnSpc>
@@ -3320,6 +3456,7 @@
                 <a:spcPts val="1200"/>
               </a:spcAft>
               <a:buChar char="•"/>
+              <a:defRPr/>
             </a:lvl2pPr>
             <a:lvl3pPr marL="838200" indent="-228600">
               <a:lnSpc>
@@ -3332,6 +3469,7 @@
                 <a:spcPts val="1200"/>
               </a:spcAft>
               <a:buChar char="•"/>
+              <a:defRPr/>
             </a:lvl3pPr>
             <a:lvl4pPr marL="1143000" indent="-228600">
               <a:lnSpc>
@@ -3344,6 +3482,7 @@
                 <a:spcPts val="1200"/>
               </a:spcAft>
               <a:buChar char="•"/>
+              <a:defRPr/>
             </a:lvl4pPr>
             <a:lvl5pPr marL="1447800" indent="-228600">
               <a:lnSpc>
@@ -3356,6 +3495,7 @@
                 <a:spcPts val="1200"/>
               </a:spcAft>
               <a:buChar char="•"/>
+              <a:defRPr/>
             </a:lvl5pPr>
             <a:lvl6pPr marL="1752600" indent="-228600">
               <a:lnSpc>
@@ -3368,6 +3508,7 @@
                 <a:spcPts val="1200"/>
               </a:spcAft>
               <a:buChar char="•"/>
+              <a:defRPr/>
             </a:lvl6pPr>
             <a:lvl7pPr marL="2057400" indent="-228600">
               <a:lnSpc>
@@ -3380,6 +3521,7 @@
                 <a:spcPts val="1200"/>
               </a:spcAft>
               <a:buChar char="•"/>
+              <a:defRPr/>
             </a:lvl7pPr>
             <a:lvl8pPr marL="2362200" indent="-228600">
               <a:lnSpc>
@@ -3392,6 +3534,7 @@
                 <a:spcPts val="1200"/>
               </a:spcAft>
               <a:buChar char="•"/>
+              <a:defRPr/>
             </a:lvl8pPr>
             <a:lvl9pPr marL="2667000" indent="-228600">
               <a:lnSpc>
@@ -3404,6 +3547,7 @@
                 <a:spcPts val="1200"/>
               </a:spcAft>
               <a:buChar char="•"/>
+              <a:defRPr/>
             </a:lvl9pPr>
           </a:lstStyle>
           <a:p xmlns:a="http://schemas.openxmlformats.org/drawingml/2006/main"/>
@@ -3465,6 +3609,7 @@
                 <a:spcPts val="1200"/>
               </a:spcAft>
               <a:buChar char="•"/>
+              <a:defRPr/>
             </a:lvl1pPr>
             <a:lvl2pPr marL="533400" indent="-228600">
               <a:lnSpc>
@@ -3477,6 +3622,7 @@
                 <a:spcPts val="1200"/>
               </a:spcAft>
               <a:buChar char="•"/>
+              <a:defRPr/>
             </a:lvl2pPr>
             <a:lvl3pPr marL="838200" indent="-228600">
               <a:lnSpc>
@@ -3489,6 +3635,7 @@
                 <a:spcPts val="1200"/>
               </a:spcAft>
               <a:buChar char="•"/>
+              <a:defRPr/>
             </a:lvl3pPr>
             <a:lvl4pPr marL="1143000" indent="-228600">
               <a:lnSpc>
@@ -3501,6 +3648,7 @@
                 <a:spcPts val="1200"/>
               </a:spcAft>
               <a:buChar char="•"/>
+              <a:defRPr/>
             </a:lvl4pPr>
             <a:lvl5pPr marL="1447800" indent="-228600">
               <a:lnSpc>
@@ -3513,6 +3661,7 @@
                 <a:spcPts val="1200"/>
               </a:spcAft>
               <a:buChar char="•"/>
+              <a:defRPr/>
             </a:lvl5pPr>
             <a:lvl6pPr marL="1752600" indent="-228600">
               <a:lnSpc>
@@ -3525,6 +3674,7 @@
                 <a:spcPts val="1200"/>
               </a:spcAft>
               <a:buChar char="•"/>
+              <a:defRPr/>
             </a:lvl6pPr>
             <a:lvl7pPr marL="2057400" indent="-228600">
               <a:lnSpc>
@@ -3537,6 +3687,7 @@
                 <a:spcPts val="1200"/>
               </a:spcAft>
               <a:buChar char="•"/>
+              <a:defRPr/>
             </a:lvl7pPr>
             <a:lvl8pPr marL="2362200" indent="-228600">
               <a:lnSpc>
@@ -3549,6 +3700,7 @@
                 <a:spcPts val="1200"/>
               </a:spcAft>
               <a:buChar char="•"/>
+              <a:defRPr/>
             </a:lvl8pPr>
             <a:lvl9pPr marL="2667000" indent="-228600">
               <a:lnSpc>
@@ -3561,6 +3713,7 @@
                 <a:spcPts val="1200"/>
               </a:spcAft>
               <a:buChar char="•"/>
+              <a:defRPr/>
             </a:lvl9pPr>
           </a:lstStyle>
           <a:p xmlns:a="http://schemas.openxmlformats.org/drawingml/2006/main"/>
@@ -3639,6 +3792,7 @@
                 <a:spcPts val="0"/>
               </a:spcAft>
               <a:buNone/>
+              <a:defRPr/>
             </a:lvl1pPr>
             <a:lvl2pPr marL="0" indent="0">
               <a:lnSpc>
@@ -3651,6 +3805,7 @@
                 <a:spcPts val="0"/>
               </a:spcAft>
               <a:buNone/>
+              <a:defRPr/>
             </a:lvl2pPr>
             <a:lvl3pPr marL="0" indent="0">
               <a:lnSpc>
@@ -3663,6 +3818,7 @@
                 <a:spcPts val="0"/>
               </a:spcAft>
               <a:buNone/>
+              <a:defRPr/>
             </a:lvl3pPr>
             <a:lvl4pPr marL="0" indent="0">
               <a:lnSpc>
@@ -3675,6 +3831,7 @@
                 <a:spcPts val="0"/>
               </a:spcAft>
               <a:buNone/>
+              <a:defRPr/>
             </a:lvl4pPr>
             <a:lvl5pPr marL="0" indent="0">
               <a:lnSpc>
@@ -3687,6 +3844,7 @@
                 <a:spcPts val="0"/>
               </a:spcAft>
               <a:buNone/>
+              <a:defRPr/>
             </a:lvl5pPr>
             <a:lvl6pPr marL="0" indent="0">
               <a:lnSpc>
@@ -3699,6 +3857,7 @@
                 <a:spcPts val="0"/>
               </a:spcAft>
               <a:buNone/>
+              <a:defRPr/>
             </a:lvl6pPr>
             <a:lvl7pPr marL="0" indent="0">
               <a:lnSpc>
@@ -3711,6 +3870,7 @@
                 <a:spcPts val="0"/>
               </a:spcAft>
               <a:buNone/>
+              <a:defRPr/>
             </a:lvl7pPr>
             <a:lvl8pPr marL="0" indent="0">
               <a:lnSpc>
@@ -3723,6 +3883,7 @@
                 <a:spcPts val="0"/>
               </a:spcAft>
               <a:buNone/>
+              <a:defRPr/>
             </a:lvl8pPr>
             <a:lvl9pPr marL="0" indent="0">
               <a:lnSpc>
@@ -3735,6 +3896,7 @@
                 <a:spcPts val="0"/>
               </a:spcAft>
               <a:buNone/>
+              <a:defRPr/>
             </a:lvl9pPr>
           </a:lstStyle>
           <a:p xmlns:a="http://schemas.openxmlformats.org/drawingml/2006/main"/>
@@ -3796,6 +3958,7 @@
                 <a:spcPts val="1200"/>
               </a:spcAft>
               <a:buChar char="•"/>
+              <a:defRPr/>
             </a:lvl1pPr>
             <a:lvl2pPr marL="533400" indent="-228600">
               <a:lnSpc>
@@ -3808,6 +3971,7 @@
                 <a:spcPts val="1200"/>
               </a:spcAft>
               <a:buChar char="•"/>
+              <a:defRPr/>
             </a:lvl2pPr>
             <a:lvl3pPr marL="838200" indent="-228600">
               <a:lnSpc>
@@ -3820,6 +3984,7 @@
                 <a:spcPts val="1200"/>
               </a:spcAft>
               <a:buChar char="•"/>
+              <a:defRPr/>
             </a:lvl3pPr>
             <a:lvl4pPr marL="1143000" indent="-228600">
               <a:lnSpc>
@@ -3832,6 +3997,7 @@
                 <a:spcPts val="1200"/>
               </a:spcAft>
               <a:buChar char="•"/>
+              <a:defRPr/>
             </a:lvl4pPr>
             <a:lvl5pPr marL="1447800" indent="-228600">
               <a:lnSpc>
@@ -3844,6 +4010,7 @@
                 <a:spcPts val="1200"/>
               </a:spcAft>
               <a:buChar char="•"/>
+              <a:defRPr/>
             </a:lvl5pPr>
             <a:lvl6pPr marL="1752600" indent="-228600">
               <a:lnSpc>
@@ -3856,6 +4023,7 @@
                 <a:spcPts val="1200"/>
               </a:spcAft>
               <a:buChar char="•"/>
+              <a:defRPr/>
             </a:lvl6pPr>
             <a:lvl7pPr marL="2057400" indent="-228600">
               <a:lnSpc>
@@ -3868,6 +4036,7 @@
                 <a:spcPts val="1200"/>
               </a:spcAft>
               <a:buChar char="•"/>
+              <a:defRPr/>
             </a:lvl7pPr>
             <a:lvl8pPr marL="2362200" indent="-228600">
               <a:lnSpc>
@@ -3880,6 +4049,7 @@
                 <a:spcPts val="1200"/>
               </a:spcAft>
               <a:buChar char="•"/>
+              <a:defRPr/>
             </a:lvl8pPr>
             <a:lvl9pPr marL="2667000" indent="-228600">
               <a:lnSpc>
@@ -3892,6 +4062,7 @@
                 <a:spcPts val="1200"/>
               </a:spcAft>
               <a:buChar char="•"/>
+              <a:defRPr/>
             </a:lvl9pPr>
           </a:lstStyle>
           <a:p xmlns:a="http://schemas.openxmlformats.org/drawingml/2006/main"/>
@@ -3940,12 +4111,12 @@
   </p:cSld>
   <p:clrMap bg1="lt1" tx1="dk1" bg2="lt2" tx2="dk2" accent1="accent1" accent2="accent2" accent3="accent3" accent4="accent4" accent5="accent5" accent6="accent6" hlink="hlink" folHlink="folHlink"/>
   <p:sldLayoutIdLst>
-    <p:sldLayoutId xmlns:r="http://schemas.openxmlformats.org/officeDocument/2006/relationships" id="2147483649" r:id="R26caa87ae45d4305"/>
-    <p:sldLayoutId xmlns:r="http://schemas.openxmlformats.org/officeDocument/2006/relationships" id="2147483650" r:id="R1105641876644440"/>
-    <p:sldLayoutId xmlns:r="http://schemas.openxmlformats.org/officeDocument/2006/relationships" id="2147483651" r:id="R5995aad7e2934c7a"/>
-    <p:sldLayoutId xmlns:r="http://schemas.openxmlformats.org/officeDocument/2006/relationships" id="2147483652" r:id="R504a46aa75b34914"/>
-    <p:sldLayoutId xmlns:r="http://schemas.openxmlformats.org/officeDocument/2006/relationships" id="2147483653" r:id="Re156e81ea6c14989"/>
-    <p:sldLayoutId xmlns:r="http://schemas.openxmlformats.org/officeDocument/2006/relationships" id="2147483654" r:id="R738965200ef34540"/>
+    <p:sldLayoutId xmlns:r="http://schemas.openxmlformats.org/officeDocument/2006/relationships" id="2147483649" r:id="R50ad85ac120d4794"/>
+    <p:sldLayoutId xmlns:r="http://schemas.openxmlformats.org/officeDocument/2006/relationships" id="2147483650" r:id="R0098084694b84750"/>
+    <p:sldLayoutId xmlns:r="http://schemas.openxmlformats.org/officeDocument/2006/relationships" id="2147483651" r:id="Rd3232b6cd6b04926"/>
+    <p:sldLayoutId xmlns:r="http://schemas.openxmlformats.org/officeDocument/2006/relationships" id="2147483652" r:id="R3bad94b88bde4b36"/>
+    <p:sldLayoutId xmlns:r="http://schemas.openxmlformats.org/officeDocument/2006/relationships" id="2147483653" r:id="Rc937d2c8450a4b07"/>
+    <p:sldLayoutId xmlns:r="http://schemas.openxmlformats.org/officeDocument/2006/relationships" id="2147483654" r:id="R9525a36824bc4748"/>
   </p:sldLayoutIdLst>
   <p:txStyles>
     <p:titleStyle>
@@ -4537,6 +4708,7 @@
           </a:lstStyle>
           <a:p xmlns:a="http://schemas.openxmlformats.org/drawingml/2006/main">
             <a:pPr>
+              <a:buNone/>
               <a:defRPr sz="1200" b="0">
                 <a:solidFill>
                   <a:srgbClr val="C8C8CC"/>
@@ -4606,6 +4778,7 @@
           </a:lstStyle>
           <a:p xmlns:a="http://schemas.openxmlformats.org/drawingml/2006/main">
             <a:pPr>
+              <a:buNone/>
               <a:defRPr sz="2625" b="0">
                 <a:solidFill>
                   <a:srgbClr val="C8C8CC"/>
@@ -4675,6 +4848,7 @@
           </a:lstStyle>
           <a:p xmlns:a="http://schemas.openxmlformats.org/drawingml/2006/main">
             <a:pPr>
+              <a:buNone/>
               <a:defRPr sz="4425" b="1">
                 <a:solidFill>
                   <a:srgbClr val="FFFFFF"/>
@@ -4698,6 +4872,7 @@
           </a:p>
           <a:p xmlns:a="http://schemas.openxmlformats.org/drawingml/2006/main">
             <a:pPr>
+              <a:buNone/>
               <a:defRPr sz="4425" b="1">
                 <a:solidFill>
                   <a:srgbClr val="FFFFFF"/>
@@ -4767,6 +4942,7 @@
           </a:lstStyle>
           <a:p xmlns:a="http://schemas.openxmlformats.org/drawingml/2006/main">
             <a:pPr>
+              <a:buNone/>
               <a:defRPr sz="2100" b="0">
                 <a:solidFill>
                   <a:srgbClr val="FFFFFF"/>
@@ -4836,6 +5012,7 @@
           </a:lstStyle>
           <a:p xmlns:a="http://schemas.openxmlformats.org/drawingml/2006/main">
             <a:pPr>
+              <a:buNone/>
               <a:defRPr sz="1800" b="0">
                 <a:solidFill>
                   <a:srgbClr val="C8C8CC"/>
@@ -4895,7 +5072,7 @@
           <p:cNvPr id="7" name="">
             <a:extLst xmlns:a="http://schemas.openxmlformats.org/drawingml/2006/main">
               <a:ext uri="{FF2B5EF4-FFF2-40B4-BE49-F238E27FC236}">
-                <a16:creationId xmlns:a16="http://schemas.microsoft.com/office/drawing/2014/main" id="{2B51D320-2DEB-4069-AAE7-F0CE84F16B7F}"/>
+                <a16:creationId xmlns:a16="http://schemas.microsoft.com/office/drawing/2014/main" id="{7312C17B-60CD-44B5-BE04-5A94069FDD0F}"/>
               </a:ext>
             </a:extLst>
           </p:cNvPr>
@@ -4905,7 +5082,7 @@
           <p:nvPr/>
         </p:nvPicPr>
         <p:blipFill>
-          <a:blip xmlns:r="http://schemas.openxmlformats.org/officeDocument/2006/relationships" xmlns:a="http://schemas.openxmlformats.org/drawingml/2006/main" r:embed="Rc986e53e665248c0"/>
+          <a:blip xmlns:r="http://schemas.openxmlformats.org/officeDocument/2006/relationships" xmlns:a="http://schemas.openxmlformats.org/drawingml/2006/main" r:embed="R7e1dbfe8956442e1"/>
           <a:stretch xmlns:a="http://schemas.openxmlformats.org/drawingml/2006/main"/>
         </p:blipFill>
         <p:spPr>
@@ -4993,6 +5170,7 @@
           </a:lstStyle>
           <a:p xmlns:a="http://schemas.openxmlformats.org/drawingml/2006/main">
             <a:pPr>
+              <a:buNone/>
               <a:defRPr sz="3675" b="1">
                 <a:solidFill>
                   <a:srgbClr val="FFFFFF"/>
@@ -5062,6 +5240,7 @@
           </a:lstStyle>
           <a:p xmlns:a="http://schemas.openxmlformats.org/drawingml/2006/main">
             <a:pPr>
+              <a:buNone/>
               <a:defRPr sz="1200" b="0">
                 <a:solidFill>
                   <a:srgbClr val="C8C8CC"/>
@@ -5162,6 +5341,7 @@
           </a:lstStyle>
           <a:p xmlns:a="http://schemas.openxmlformats.org/drawingml/2006/main">
             <a:pPr>
+              <a:buNone/>
               <a:defRPr sz="2175" b="0">
                 <a:solidFill>
                   <a:srgbClr val="FFFFFF"/>
@@ -5185,6 +5365,7 @@
           </a:p>
           <a:p xmlns:a="http://schemas.openxmlformats.org/drawingml/2006/main">
             <a:pPr>
+              <a:buNone/>
               <a:defRPr sz="2175" b="0">
                 <a:solidFill>
                   <a:srgbClr val="FFFFFF"/>
@@ -5208,6 +5389,7 @@
           </a:p>
           <a:p xmlns:a="http://schemas.openxmlformats.org/drawingml/2006/main">
             <a:pPr>
+              <a:buNone/>
               <a:defRPr sz="2175" b="0">
                 <a:solidFill>
                   <a:srgbClr val="FFFFFF"/>
@@ -5277,6 +5459,7 @@
           </a:lstStyle>
           <a:p xmlns:a="http://schemas.openxmlformats.org/drawingml/2006/main">
             <a:pPr>
+              <a:buNone/>
               <a:defRPr sz="2250" b="1">
                 <a:solidFill>
                   <a:srgbClr val="7DDC93"/>
@@ -5375,6 +5558,7 @@
           </a:lstStyle>
           <a:p xmlns:a="http://schemas.openxmlformats.org/drawingml/2006/main">
             <a:pPr>
+              <a:buNone/>
               <a:defRPr sz="3675" b="1">
                 <a:solidFill>
                   <a:srgbClr val="FFFFFF"/>
@@ -5444,6 +5628,7 @@
           </a:lstStyle>
           <a:p xmlns:a="http://schemas.openxmlformats.org/drawingml/2006/main">
             <a:pPr>
+              <a:buNone/>
               <a:defRPr sz="1200" b="0">
                 <a:solidFill>
                   <a:srgbClr val="C8C8CC"/>
@@ -5513,6 +5698,7 @@
           </a:lstStyle>
           <a:p xmlns:a="http://schemas.openxmlformats.org/drawingml/2006/main">
             <a:pPr>
+              <a:buNone/>
               <a:defRPr sz="2625" b="0">
                 <a:solidFill>
                   <a:srgbClr val="C8C8CC"/>
@@ -5582,6 +5768,7 @@
           </a:lstStyle>
           <a:p xmlns:a="http://schemas.openxmlformats.org/drawingml/2006/main">
             <a:pPr>
+              <a:buNone/>
               <a:defRPr sz="2625" b="0">
                 <a:solidFill>
                   <a:srgbClr val="FFFFFF"/>
@@ -5651,6 +5838,7 @@
           </a:lstStyle>
           <a:p xmlns:a="http://schemas.openxmlformats.org/drawingml/2006/main">
             <a:pPr>
+              <a:buNone/>
               <a:defRPr sz="2625" b="1">
                 <a:solidFill>
                   <a:srgbClr val="7DDC93"/>
@@ -5720,6 +5908,7 @@
           </a:lstStyle>
           <a:p xmlns:a="http://schemas.openxmlformats.org/drawingml/2006/main">
             <a:pPr>
+              <a:buNone/>
               <a:defRPr sz="2550" b="1">
                 <a:solidFill>
                   <a:srgbClr val="F55A47"/>
@@ -5818,6 +6007,7 @@
           </a:lstStyle>
           <a:p xmlns:a="http://schemas.openxmlformats.org/drawingml/2006/main">
             <a:pPr>
+              <a:buNone/>
               <a:defRPr sz="3675" b="1">
                 <a:solidFill>
                   <a:srgbClr val="FFFFFF"/>
@@ -5887,6 +6077,7 @@
           </a:lstStyle>
           <a:p xmlns:a="http://schemas.openxmlformats.org/drawingml/2006/main">
             <a:pPr>
+              <a:buNone/>
               <a:defRPr sz="1200" b="0">
                 <a:solidFill>
                   <a:srgbClr val="C8C8CC"/>
@@ -5987,6 +6178,7 @@
           </a:lstStyle>
           <a:p xmlns:a="http://schemas.openxmlformats.org/drawingml/2006/main">
             <a:pPr>
+              <a:buNone/>
               <a:defRPr sz="2100" b="0">
                 <a:solidFill>
                   <a:srgbClr val="FFFFFF"/>
@@ -6010,6 +6202,7 @@
           </a:p>
           <a:p xmlns:a="http://schemas.openxmlformats.org/drawingml/2006/main">
             <a:pPr>
+              <a:buNone/>
               <a:defRPr sz="2100" b="0">
                 <a:solidFill>
                   <a:srgbClr val="FFFFFF"/>
@@ -6038,6 +6231,7 @@
           </a:p>
           <a:p xmlns:a="http://schemas.openxmlformats.org/drawingml/2006/main">
             <a:pPr>
+              <a:buNone/>
               <a:defRPr sz="2100" b="0">
                 <a:solidFill>
                   <a:srgbClr val="FFFFFF"/>
@@ -6061,6 +6255,7 @@
           </a:p>
           <a:p xmlns:a="http://schemas.openxmlformats.org/drawingml/2006/main">
             <a:pPr>
+              <a:buNone/>
               <a:defRPr sz="2100" b="0">
                 <a:solidFill>
                   <a:srgbClr val="FFFFFF"/>
@@ -6130,6 +6325,7 @@
           </a:lstStyle>
           <a:p xmlns:a="http://schemas.openxmlformats.org/drawingml/2006/main">
             <a:pPr>
+              <a:buNone/>
               <a:defRPr sz="2175" b="1">
                 <a:solidFill>
                   <a:srgbClr val="7DDC93"/>
@@ -6228,6 +6424,7 @@
           </a:lstStyle>
           <a:p xmlns:a="http://schemas.openxmlformats.org/drawingml/2006/main">
             <a:pPr>
+              <a:buNone/>
               <a:defRPr sz="3675" b="1">
                 <a:solidFill>
                   <a:srgbClr val="FFFFFF"/>
@@ -6297,6 +6494,7 @@
           </a:lstStyle>
           <a:p xmlns:a="http://schemas.openxmlformats.org/drawingml/2006/main">
             <a:pPr>
+              <a:buNone/>
               <a:defRPr sz="1200" b="0">
                 <a:solidFill>
                   <a:srgbClr val="C8C8CC"/>
@@ -6366,6 +6564,7 @@
           </a:lstStyle>
           <a:p xmlns:a="http://schemas.openxmlformats.org/drawingml/2006/main">
             <a:pPr>
+              <a:buNone/>
               <a:defRPr sz="2250" b="0">
                 <a:solidFill>
                   <a:srgbClr val="FFFFFF"/>
@@ -6435,6 +6634,7 @@
           </a:lstStyle>
           <a:p xmlns:a="http://schemas.openxmlformats.org/drawingml/2006/main">
             <a:pPr>
+              <a:buNone/>
               <a:defRPr sz="2250" b="0">
                 <a:solidFill>
                   <a:srgbClr val="7DDC93"/>
@@ -6504,6 +6704,7 @@
           </a:lstStyle>
           <a:p xmlns:a="http://schemas.openxmlformats.org/drawingml/2006/main">
             <a:pPr>
+              <a:buNone/>
               <a:defRPr sz="2250" b="0">
                 <a:solidFill>
                   <a:srgbClr val="FFFFFF"/>
@@ -6573,6 +6774,7 @@
           </a:lstStyle>
           <a:p xmlns:a="http://schemas.openxmlformats.org/drawingml/2006/main">
             <a:pPr>
+              <a:buNone/>
               <a:defRPr sz="2250" b="0">
                 <a:solidFill>
                   <a:srgbClr val="7DDC93"/>
@@ -6642,6 +6844,7 @@
           </a:lstStyle>
           <a:p xmlns:a="http://schemas.openxmlformats.org/drawingml/2006/main">
             <a:pPr>
+              <a:buNone/>
               <a:defRPr sz="2250" b="0">
                 <a:solidFill>
                   <a:srgbClr val="FFFFFF"/>
@@ -6711,6 +6914,7 @@
           </a:lstStyle>
           <a:p xmlns:a="http://schemas.openxmlformats.org/drawingml/2006/main">
             <a:pPr>
+              <a:buNone/>
               <a:defRPr sz="2250" b="0">
                 <a:solidFill>
                   <a:srgbClr val="7DDC93"/>
@@ -6780,6 +6984,7 @@
           </a:lstStyle>
           <a:p xmlns:a="http://schemas.openxmlformats.org/drawingml/2006/main">
             <a:pPr>
+              <a:buNone/>
               <a:defRPr sz="2250" b="0">
                 <a:solidFill>
                   <a:srgbClr val="FFFFFF"/>
@@ -6849,6 +7054,7 @@
           </a:lstStyle>
           <a:p xmlns:a="http://schemas.openxmlformats.org/drawingml/2006/main">
             <a:pPr>
+              <a:buNone/>
               <a:defRPr sz="2250" b="0">
                 <a:solidFill>
                   <a:srgbClr val="7DDC93"/>
@@ -6918,6 +7124,7 @@
           </a:lstStyle>
           <a:p xmlns:a="http://schemas.openxmlformats.org/drawingml/2006/main">
             <a:pPr>
+              <a:buNone/>
               <a:defRPr sz="2250" b="0">
                 <a:solidFill>
                   <a:srgbClr val="FFFFFF"/>
@@ -6987,6 +7194,7 @@
           </a:lstStyle>
           <a:p xmlns:a="http://schemas.openxmlformats.org/drawingml/2006/main">
             <a:pPr>
+              <a:buNone/>
               <a:defRPr sz="2250" b="0">
                 <a:solidFill>
                   <a:srgbClr val="7DDC93"/>
@@ -7085,6 +7293,7 @@
           </a:lstStyle>
           <a:p xmlns:a="http://schemas.openxmlformats.org/drawingml/2006/main">
             <a:pPr>
+              <a:buNone/>
               <a:defRPr sz="3675" b="1">
                 <a:solidFill>
                   <a:srgbClr val="FFFFFF"/>
@@ -7154,6 +7363,7 @@
           </a:lstStyle>
           <a:p xmlns:a="http://schemas.openxmlformats.org/drawingml/2006/main">
             <a:pPr>
+              <a:buNone/>
               <a:defRPr sz="1200" b="0">
                 <a:solidFill>
                   <a:srgbClr val="C8C8CC"/>
@@ -7254,6 +7464,7 @@
           </a:lstStyle>
           <a:p xmlns:a="http://schemas.openxmlformats.org/drawingml/2006/main">
             <a:pPr>
+              <a:buNone/>
               <a:defRPr sz="2100" b="0">
                 <a:solidFill>
                   <a:srgbClr val="FFFFFF"/>
@@ -7277,6 +7488,7 @@
           </a:p>
           <a:p xmlns:a="http://schemas.openxmlformats.org/drawingml/2006/main">
             <a:pPr>
+              <a:buNone/>
               <a:defRPr sz="2100" b="0">
                 <a:solidFill>
                   <a:srgbClr val="FFFFFF"/>
@@ -7300,6 +7512,7 @@
           </a:p>
           <a:p xmlns:a="http://schemas.openxmlformats.org/drawingml/2006/main">
             <a:pPr>
+              <a:buNone/>
               <a:defRPr sz="2100" b="0">
                 <a:solidFill>
                   <a:srgbClr val="FFFFFF"/>
@@ -7369,6 +7582,7 @@
           </a:lstStyle>
           <a:p xmlns:a="http://schemas.openxmlformats.org/drawingml/2006/main">
             <a:pPr>
+              <a:buNone/>
               <a:defRPr sz="2175" b="0">
                 <a:solidFill>
                   <a:srgbClr val="7DDC93"/>
@@ -7467,6 +7681,7 @@
           </a:lstStyle>
           <a:p xmlns:a="http://schemas.openxmlformats.org/drawingml/2006/main">
             <a:pPr>
+              <a:buNone/>
               <a:defRPr sz="3675" b="1">
                 <a:solidFill>
                   <a:srgbClr val="FFFFFF"/>
@@ -7536,6 +7751,7 @@
           </a:lstStyle>
           <a:p xmlns:a="http://schemas.openxmlformats.org/drawingml/2006/main">
             <a:pPr>
+              <a:buNone/>
               <a:defRPr sz="1200" b="0">
                 <a:solidFill>
                   <a:srgbClr val="C8C8CC"/>
@@ -7636,6 +7852,7 @@
           </a:lstStyle>
           <a:p xmlns:a="http://schemas.openxmlformats.org/drawingml/2006/main">
             <a:pPr>
+              <a:buNone/>
               <a:defRPr sz="2250" b="0">
                 <a:solidFill>
                   <a:srgbClr val="FFFFFF"/>
@@ -7659,6 +7876,7 @@
           </a:p>
           <a:p xmlns:a="http://schemas.openxmlformats.org/drawingml/2006/main">
             <a:pPr>
+              <a:buNone/>
               <a:defRPr sz="2250" b="0">
                 <a:solidFill>
                   <a:srgbClr val="FFFFFF"/>
@@ -7728,6 +7946,7 @@
           </a:lstStyle>
           <a:p xmlns:a="http://schemas.openxmlformats.org/drawingml/2006/main">
             <a:pPr>
+              <a:buNone/>
               <a:defRPr sz="2175" b="0">
                 <a:solidFill>
                   <a:srgbClr val="7DDC93"/>
@@ -7826,6 +8045,7 @@
           </a:lstStyle>
           <a:p xmlns:a="http://schemas.openxmlformats.org/drawingml/2006/main">
             <a:pPr>
+              <a:buNone/>
               <a:defRPr sz="3675" b="1">
                 <a:solidFill>
                   <a:srgbClr val="FFFFFF"/>
@@ -7895,6 +8115,7 @@
           </a:lstStyle>
           <a:p xmlns:a="http://schemas.openxmlformats.org/drawingml/2006/main">
             <a:pPr>
+              <a:buNone/>
               <a:defRPr sz="1200" b="0">
                 <a:solidFill>
                   <a:srgbClr val="C8C8CC"/>
@@ -7995,6 +8216,7 @@
           </a:lstStyle>
           <a:p xmlns:a="http://schemas.openxmlformats.org/drawingml/2006/main">
             <a:pPr>
+              <a:buNone/>
               <a:defRPr sz="2250" b="0">
                 <a:solidFill>
                   <a:srgbClr val="FFFFFF"/>
@@ -8018,6 +8240,7 @@
           </a:p>
           <a:p xmlns:a="http://schemas.openxmlformats.org/drawingml/2006/main">
             <a:pPr>
+              <a:buNone/>
               <a:defRPr sz="2250" b="0">
                 <a:solidFill>
                   <a:srgbClr val="FFFFFF"/>
@@ -8087,6 +8310,7 @@
           </a:lstStyle>
           <a:p xmlns:a="http://schemas.openxmlformats.org/drawingml/2006/main">
             <a:pPr>
+              <a:buNone/>
               <a:defRPr sz="2175" b="0">
                 <a:solidFill>
                   <a:srgbClr val="7DDC93"/>
@@ -8185,6 +8409,7 @@
           </a:lstStyle>
           <a:p xmlns:a="http://schemas.openxmlformats.org/drawingml/2006/main">
             <a:pPr>
+              <a:buNone/>
               <a:defRPr sz="3675" b="1">
                 <a:solidFill>
                   <a:srgbClr val="FFFFFF"/>
@@ -8254,6 +8479,7 @@
           </a:lstStyle>
           <a:p xmlns:a="http://schemas.openxmlformats.org/drawingml/2006/main">
             <a:pPr>
+              <a:buNone/>
               <a:defRPr sz="1200" b="0">
                 <a:solidFill>
                   <a:srgbClr val="C8C8CC"/>
@@ -8354,6 +8580,7 @@
           </a:lstStyle>
           <a:p xmlns:a="http://schemas.openxmlformats.org/drawingml/2006/main">
             <a:pPr>
+              <a:buNone/>
               <a:defRPr sz="2100" b="0">
                 <a:solidFill>
                   <a:srgbClr val="FFFFFF"/>
@@ -8377,6 +8604,7 @@
           </a:p>
           <a:p xmlns:a="http://schemas.openxmlformats.org/drawingml/2006/main">
             <a:pPr>
+              <a:buNone/>
               <a:defRPr sz="2100" b="0">
                 <a:solidFill>
                   <a:srgbClr val="FFFFFF"/>
@@ -8446,6 +8674,7 @@
           </a:lstStyle>
           <a:p xmlns:a="http://schemas.openxmlformats.org/drawingml/2006/main">
             <a:pPr>
+              <a:buNone/>
               <a:defRPr sz="2325" b="1">
                 <a:solidFill>
                   <a:srgbClr val="7DDC93"/>
@@ -8544,6 +8773,7 @@
           </a:lstStyle>
           <a:p xmlns:a="http://schemas.openxmlformats.org/drawingml/2006/main">
             <a:pPr>
+              <a:buNone/>
               <a:defRPr sz="3675" b="1">
                 <a:solidFill>
                   <a:srgbClr val="FFFFFF"/>
@@ -8613,6 +8843,7 @@
           </a:lstStyle>
           <a:p xmlns:a="http://schemas.openxmlformats.org/drawingml/2006/main">
             <a:pPr>
+              <a:buNone/>
               <a:defRPr sz="1200" b="0">
                 <a:solidFill>
                   <a:srgbClr val="C8C8CC"/>
@@ -8713,6 +8944,7 @@
           </a:lstStyle>
           <a:p xmlns:a="http://schemas.openxmlformats.org/drawingml/2006/main">
             <a:pPr>
+              <a:buNone/>
               <a:defRPr sz="2100" b="0">
                 <a:solidFill>
                   <a:srgbClr val="FFFFFF"/>
@@ -8736,6 +8968,7 @@
           </a:p>
           <a:p xmlns:a="http://schemas.openxmlformats.org/drawingml/2006/main">
             <a:pPr>
+              <a:buNone/>
               <a:defRPr sz="2100" b="0">
                 <a:solidFill>
                   <a:srgbClr val="FFFFFF"/>
@@ -8759,6 +8992,7 @@
           </a:p>
           <a:p xmlns:a="http://schemas.openxmlformats.org/drawingml/2006/main">
             <a:pPr>
+              <a:buNone/>
               <a:defRPr sz="2100" b="0">
                 <a:solidFill>
                   <a:srgbClr val="FFFFFF"/>
@@ -8828,6 +9062,7 @@
           </a:lstStyle>
           <a:p xmlns:a="http://schemas.openxmlformats.org/drawingml/2006/main">
             <a:pPr>
+              <a:buNone/>
               <a:defRPr sz="2175" b="0">
                 <a:solidFill>
                   <a:srgbClr val="7DDC93"/>
@@ -8882,22 +9117,22 @@
       </p:grpSpPr>
       <p:sp>
         <p:nvSpPr>
-          <p:cNvPr id="6" name="">
-            <a:extLst xmlns:a="http://schemas.openxmlformats.org/drawingml/2006/main">
-              <a:ext uri="{FF2B5EF4-FFF2-40B4-BE49-F238E27FC236}">
-                <a16:creationId xmlns:a16="http://schemas.microsoft.com/office/drawing/2014/main" id="{96279E9E-B076-4661-BACE-1C8BAD9D2FDA}"/>
-              </a:ext>
-            </a:extLst>
-          </p:cNvPr>
-          <p:cNvSpPr>
-            <a:spLocks xmlns:a="http://schemas.openxmlformats.org/drawingml/2006/main" noGrp="1"/>
-          </p:cNvSpPr>
-          <p:nvPr/>
-        </p:nvSpPr>
-        <p:spPr>
-          <a:xfrm xmlns:a="http://schemas.openxmlformats.org/drawingml/2006/main">
-            <a:off x="590550" y="447675"/>
-            <a:ext cx="10953750" cy="781050"/>
+          <p:cNvPr id="39" name="">
+            <a:extLst xmlns:a="http://schemas.openxmlformats.org/drawingml/2006/main">
+              <a:ext uri="{FF2B5EF4-FFF2-40B4-BE49-F238E27FC236}">
+                <a16:creationId xmlns:a16="http://schemas.microsoft.com/office/drawing/2014/main" id="{EABAF1F0-013B-43C0-8EBB-1A9FE1B8033C}"/>
+              </a:ext>
+            </a:extLst>
+          </p:cNvPr>
+          <p:cNvSpPr>
+            <a:spLocks xmlns:a="http://schemas.openxmlformats.org/drawingml/2006/main" noGrp="1"/>
+          </p:cNvSpPr>
+          <p:nvPr/>
+        </p:nvSpPr>
+        <p:spPr>
+          <a:xfrm xmlns:a="http://schemas.openxmlformats.org/drawingml/2006/main">
+            <a:off x="590550" y="409575"/>
+            <a:ext cx="10953750" cy="685800"/>
           </a:xfrm>
           <a:prstGeom xmlns:a="http://schemas.openxmlformats.org/drawingml/2006/main" prst="rect">
             <a:avLst/>
@@ -8905,13 +9140,10 @@
           <a:noFill xmlns:a="http://schemas.openxmlformats.org/drawingml/2006/main"/>
           <a:ln xmlns:a="http://schemas.openxmlformats.org/drawingml/2006/main" w="0">
             <a:noFill/>
-            <a:prstDash val="solid"/>
-          </a:ln>
-        </p:spPr>
-        <p:txBody>
-          <a:bodyPr xmlns:a="http://schemas.openxmlformats.org/drawingml/2006/main" wrap="square" lIns="0" tIns="0" rIns="0" bIns="0" anchor="ctr">
-            <a:noAutofit/>
-          </a:bodyPr>
+          </a:ln>
+        </p:spPr>
+        <p:txBody>
+          <a:bodyPr xmlns:a="http://schemas.openxmlformats.org/drawingml/2006/main" lIns="0" tIns="0" rIns="0" bIns="0" anchor="ctr"/>
           <a:lstStyle xmlns:a="http://schemas.openxmlformats.org/drawingml/2006/main">
             <a:defPPr>
               <a:defRPr sz="3675" b="1">
@@ -8944,7 +9176,7 @@
                 <a:ea typeface="Georgia"/>
                 <a:cs typeface="Georgia"/>
               </a:rPr>
-              <a:t>Type checks and conversions</a:t>
+              <a:t>How printf reads % codes</a:t>
             </a:r>
           </a:p>
         </p:txBody>
@@ -8954,19 +9186,19 @@
           <p:cNvPr id="2" name="">
             <a:extLst xmlns:a="http://schemas.openxmlformats.org/drawingml/2006/main">
               <a:ext uri="{FF2B5EF4-FFF2-40B4-BE49-F238E27FC236}">
-                <a16:creationId xmlns:a16="http://schemas.microsoft.com/office/drawing/2014/main" id="{E74F7F48-8660-4402-998D-A5EAC876CD36}"/>
-              </a:ext>
-            </a:extLst>
-          </p:cNvPr>
-          <p:cNvSpPr>
-            <a:spLocks xmlns:a="http://schemas.openxmlformats.org/drawingml/2006/main" noGrp="1"/>
-          </p:cNvSpPr>
-          <p:nvPr/>
-        </p:nvSpPr>
-        <p:spPr>
-          <a:xfrm xmlns:a="http://schemas.openxmlformats.org/drawingml/2006/main">
-            <a:off x="590550" y="6410325"/>
-            <a:ext cx="6381750" cy="209550"/>
+                <a16:creationId xmlns:a16="http://schemas.microsoft.com/office/drawing/2014/main" id="{00C79E6C-FC7C-4E09-99E1-D244B6C43232}"/>
+              </a:ext>
+            </a:extLst>
+          </p:cNvPr>
+          <p:cNvSpPr>
+            <a:spLocks xmlns:a="http://schemas.openxmlformats.org/drawingml/2006/main" noGrp="1"/>
+          </p:cNvSpPr>
+          <p:nvPr/>
+        </p:nvSpPr>
+        <p:spPr>
+          <a:xfrm xmlns:a="http://schemas.openxmlformats.org/drawingml/2006/main">
+            <a:off x="590550" y="1200150"/>
+            <a:ext cx="10953750" cy="419100"/>
           </a:xfrm>
           <a:prstGeom xmlns:a="http://schemas.openxmlformats.org/drawingml/2006/main" prst="rect">
             <a:avLst/>
@@ -8974,46 +9206,43 @@
           <a:noFill xmlns:a="http://schemas.openxmlformats.org/drawingml/2006/main"/>
           <a:ln xmlns:a="http://schemas.openxmlformats.org/drawingml/2006/main" w="0">
             <a:noFill/>
-            <a:prstDash val="solid"/>
-          </a:ln>
-        </p:spPr>
-        <p:txBody>
-          <a:bodyPr xmlns:a="http://schemas.openxmlformats.org/drawingml/2006/main" wrap="square" lIns="0" tIns="0" rIns="0" bIns="0" anchor="ctr">
-            <a:noAutofit/>
-          </a:bodyPr>
+          </a:ln>
+        </p:spPr>
+        <p:txBody>
+          <a:bodyPr xmlns:a="http://schemas.openxmlformats.org/drawingml/2006/main" lIns="0" tIns="0" rIns="0" bIns="0" anchor="ctr"/>
           <a:lstStyle xmlns:a="http://schemas.openxmlformats.org/drawingml/2006/main">
             <a:defPPr>
-              <a:defRPr sz="1200" b="0">
-                <a:solidFill>
-                  <a:srgbClr val="C8C8CC"/>
-                </a:solidFill>
-                <a:latin typeface="Menlo"/>
-                <a:ea typeface="Menlo"/>
-                <a:cs typeface="Menlo"/>
+              <a:defRPr sz="1725" b="0">
+                <a:solidFill>
+                  <a:srgbClr val="D6D6D6"/>
+                </a:solidFill>
+                <a:latin typeface="Arial"/>
+                <a:ea typeface="Arial"/>
+                <a:cs typeface="Arial"/>
               </a:defRPr>
             </a:defPPr>
           </a:lstStyle>
           <a:p xmlns:a="http://schemas.openxmlformats.org/drawingml/2006/main">
             <a:pPr>
-              <a:defRPr sz="1200" b="0">
-                <a:solidFill>
-                  <a:srgbClr val="C8C8CC"/>
-                </a:solidFill>
-                <a:latin typeface="Menlo"/>
-                <a:ea typeface="Menlo"/>
-                <a:cs typeface="Menlo"/>
-              </a:defRPr>
-            </a:pPr>
-            <a:r>
-              <a:rPr sz="1200" b="0">
-                <a:solidFill>
-                  <a:srgbClr val="C8C8CC"/>
-                </a:solidFill>
-                <a:latin typeface="Menlo"/>
-                <a:ea typeface="Menlo"/>
-                <a:cs typeface="Menlo"/>
-              </a:rPr>
-              <a:t>C FUNDAMENTALS  •  19</a:t>
+              <a:defRPr sz="1725" b="0">
+                <a:solidFill>
+                  <a:srgbClr val="D6D6D6"/>
+                </a:solidFill>
+                <a:latin typeface="Arial"/>
+                <a:ea typeface="Arial"/>
+                <a:cs typeface="Arial"/>
+              </a:defRPr>
+            </a:pPr>
+            <a:r>
+              <a:rPr sz="1725" b="0">
+                <a:solidFill>
+                  <a:srgbClr val="D6D6D6"/>
+                </a:solidFill>
+                <a:latin typeface="Arial"/>
+                <a:ea typeface="Arial"/>
+                <a:cs typeface="Arial"/>
+              </a:rPr>
+              <a:t>The % starts a format instruction. The final letter tells printf what kind of value to display.</a:t>
             </a:r>
           </a:p>
         </p:txBody>
@@ -9023,50 +9252,19 @@
           <p:cNvPr id="3" name="">
             <a:extLst xmlns:a="http://schemas.openxmlformats.org/drawingml/2006/main">
               <a:ext uri="{FF2B5EF4-FFF2-40B4-BE49-F238E27FC236}">
-                <a16:creationId xmlns:a16="http://schemas.microsoft.com/office/drawing/2014/main" id="{74BBA953-D845-4822-9E82-40AB9C4D89B2}"/>
-              </a:ext>
-            </a:extLst>
-          </p:cNvPr>
-          <p:cNvSpPr>
-            <a:spLocks xmlns:a="http://schemas.openxmlformats.org/drawingml/2006/main" noGrp="1"/>
-          </p:cNvSpPr>
-          <p:nvPr/>
-        </p:nvSpPr>
-        <p:spPr>
-          <a:xfrm xmlns:a="http://schemas.openxmlformats.org/drawingml/2006/main">
-            <a:off x="590550" y="2286000"/>
-            <a:ext cx="10953750" cy="1619250"/>
-          </a:xfrm>
-          <a:prstGeom xmlns:a="http://schemas.openxmlformats.org/drawingml/2006/main" prst="rect">
-            <a:avLst/>
-          </a:prstGeom>
-          <a:solidFill xmlns:a="http://schemas.openxmlformats.org/drawingml/2006/main">
-            <a:srgbClr val="292A31"/>
-          </a:solidFill>
-          <a:ln xmlns:a="http://schemas.openxmlformats.org/drawingml/2006/main" w="0">
-            <a:noFill/>
-            <a:prstDash val="solid"/>
-          </a:ln>
-        </p:spPr>
-      </p:sp>
-      <p:sp>
-        <p:nvSpPr>
-          <p:cNvPr id="4" name="">
-            <a:extLst xmlns:a="http://schemas.openxmlformats.org/drawingml/2006/main">
-              <a:ext uri="{FF2B5EF4-FFF2-40B4-BE49-F238E27FC236}">
-                <a16:creationId xmlns:a16="http://schemas.microsoft.com/office/drawing/2014/main" id="{D66D0F95-53AC-4EF1-9E47-5635C026DCFC}"/>
-              </a:ext>
-            </a:extLst>
-          </p:cNvPr>
-          <p:cNvSpPr>
-            <a:spLocks xmlns:a="http://schemas.openxmlformats.org/drawingml/2006/main" noGrp="1"/>
-          </p:cNvSpPr>
-          <p:nvPr/>
-        </p:nvSpPr>
-        <p:spPr>
-          <a:xfrm xmlns:a="http://schemas.openxmlformats.org/drawingml/2006/main">
-            <a:off x="828675" y="2438400"/>
-            <a:ext cx="10477500" cy="1314450"/>
+                <a16:creationId xmlns:a16="http://schemas.microsoft.com/office/drawing/2014/main" id="{D0371DF1-E40B-48A6-A255-F307EEF8CF71}"/>
+              </a:ext>
+            </a:extLst>
+          </p:cNvPr>
+          <p:cNvSpPr>
+            <a:spLocks xmlns:a="http://schemas.openxmlformats.org/drawingml/2006/main" noGrp="1"/>
+          </p:cNvSpPr>
+          <p:nvPr/>
+        </p:nvSpPr>
+        <p:spPr>
+          <a:xfrm xmlns:a="http://schemas.openxmlformats.org/drawingml/2006/main">
+            <a:off x="714375" y="1828800"/>
+            <a:ext cx="1143000" cy="238125"/>
           </a:xfrm>
           <a:prstGeom xmlns:a="http://schemas.openxmlformats.org/drawingml/2006/main" prst="rect">
             <a:avLst/>
@@ -9074,91 +9272,65 @@
           <a:noFill xmlns:a="http://schemas.openxmlformats.org/drawingml/2006/main"/>
           <a:ln xmlns:a="http://schemas.openxmlformats.org/drawingml/2006/main" w="0">
             <a:noFill/>
-            <a:prstDash val="solid"/>
-          </a:ln>
-        </p:spPr>
-        <p:txBody>
-          <a:bodyPr xmlns:a="http://schemas.openxmlformats.org/drawingml/2006/main" wrap="square" lIns="0" tIns="0" rIns="0" bIns="0" anchor="ctr">
-            <a:noAutofit/>
-          </a:bodyPr>
+          </a:ln>
+        </p:spPr>
+        <p:txBody>
+          <a:bodyPr xmlns:a="http://schemas.openxmlformats.org/drawingml/2006/main" lIns="0" tIns="0" rIns="0" bIns="0" anchor="ctr"/>
           <a:lstStyle xmlns:a="http://schemas.openxmlformats.org/drawingml/2006/main">
             <a:defPPr>
-              <a:defRPr sz="2175" b="0">
-                <a:solidFill>
-                  <a:srgbClr val="FFFFFF"/>
-                </a:solidFill>
-                <a:latin typeface="Menlo"/>
-                <a:ea typeface="Menlo"/>
-                <a:cs typeface="Menlo"/>
+              <a:defRPr sz="1275" b="1">
+                <a:solidFill>
+                  <a:srgbClr val="77E694"/>
+                </a:solidFill>
+                <a:latin typeface="Arial"/>
+                <a:ea typeface="Arial"/>
+                <a:cs typeface="Arial"/>
               </a:defRPr>
             </a:defPPr>
           </a:lstStyle>
           <a:p xmlns:a="http://schemas.openxmlformats.org/drawingml/2006/main">
             <a:pPr>
-              <a:defRPr sz="2175" b="0">
-                <a:solidFill>
-                  <a:srgbClr val="FFFFFF"/>
-                </a:solidFill>
-                <a:latin typeface="Menlo"/>
-                <a:ea typeface="Menlo"/>
-                <a:cs typeface="Menlo"/>
-              </a:defRPr>
-            </a:pPr>
-            <a:r>
-              <a:rPr sz="2175" b="0">
-                <a:solidFill>
-                  <a:srgbClr val="FFFFFF"/>
-                </a:solidFill>
-                <a:latin typeface="Menlo"/>
-                <a:ea typeface="Menlo"/>
-                <a:cs typeface="Menlo"/>
-              </a:rPr>
-              <a:t>double exact_percent = 31.25;</a:t>
-            </a:r>
-          </a:p>
-          <a:p xmlns:a="http://schemas.openxmlformats.org/drawingml/2006/main">
-            <a:pPr>
-              <a:defRPr sz="2175" b="0">
-                <a:solidFill>
-                  <a:srgbClr val="FFFFFF"/>
-                </a:solidFill>
-                <a:latin typeface="Menlo"/>
-                <a:ea typeface="Menlo"/>
-                <a:cs typeface="Menlo"/>
-              </a:defRPr>
-            </a:pPr>
-            <a:r>
-              <a:rPr sz="2175" b="0">
-                <a:solidFill>
-                  <a:srgbClr val="FFFFFF"/>
-                </a:solidFill>
-                <a:latin typeface="Menlo"/>
-                <a:ea typeface="Menlo"/>
-                <a:cs typeface="Menlo"/>
-              </a:rPr>
-              <a:t>int percent_complete = exact_percent;  /* loses .25 */</a:t>
-            </a:r>
-          </a:p>
-        </p:txBody>
-      </p:sp>
-      <p:sp>
-        <p:nvSpPr>
-          <p:cNvPr id="5" name="">
-            <a:extLst xmlns:a="http://schemas.openxmlformats.org/drawingml/2006/main">
-              <a:ext uri="{FF2B5EF4-FFF2-40B4-BE49-F238E27FC236}">
-                <a16:creationId xmlns:a16="http://schemas.microsoft.com/office/drawing/2014/main" id="{03819087-EAE6-4D0F-9170-AB4009CB32B9}"/>
-              </a:ext>
-            </a:extLst>
-          </p:cNvPr>
-          <p:cNvSpPr>
-            <a:spLocks xmlns:a="http://schemas.openxmlformats.org/drawingml/2006/main" noGrp="1"/>
-          </p:cNvSpPr>
-          <p:nvPr/>
-        </p:nvSpPr>
-        <p:spPr>
-          <a:xfrm xmlns:a="http://schemas.openxmlformats.org/drawingml/2006/main">
-            <a:off x="590550" y="4667250"/>
-            <a:ext cx="10572750" cy="1000125"/>
+              <a:defRPr sz="1275" b="1">
+                <a:solidFill>
+                  <a:srgbClr val="77E694"/>
+                </a:solidFill>
+                <a:latin typeface="Arial"/>
+                <a:ea typeface="Arial"/>
+                <a:cs typeface="Arial"/>
+              </a:defRPr>
+            </a:pPr>
+            <a:r>
+              <a:rPr sz="1275" b="1">
+                <a:solidFill>
+                  <a:srgbClr val="77E694"/>
+                </a:solidFill>
+                <a:latin typeface="Arial"/>
+                <a:ea typeface="Arial"/>
+                <a:cs typeface="Arial"/>
+              </a:rPr>
+              <a:t>CODE</a:t>
+            </a:r>
+          </a:p>
+        </p:txBody>
+      </p:sp>
+      <p:sp>
+        <p:nvSpPr>
+          <p:cNvPr id="4" name="">
+            <a:extLst xmlns:a="http://schemas.openxmlformats.org/drawingml/2006/main">
+              <a:ext uri="{FF2B5EF4-FFF2-40B4-BE49-F238E27FC236}">
+                <a16:creationId xmlns:a16="http://schemas.microsoft.com/office/drawing/2014/main" id="{163FBAB9-036A-462B-9A76-AB1BF89CE45C}"/>
+              </a:ext>
+            </a:extLst>
+          </p:cNvPr>
+          <p:cNvSpPr>
+            <a:spLocks xmlns:a="http://schemas.openxmlformats.org/drawingml/2006/main" noGrp="1"/>
+          </p:cNvSpPr>
+          <p:nvPr/>
+        </p:nvSpPr>
+        <p:spPr>
+          <a:xfrm xmlns:a="http://schemas.openxmlformats.org/drawingml/2006/main">
+            <a:off x="2228850" y="1828800"/>
+            <a:ext cx="3667125" cy="238125"/>
           </a:xfrm>
           <a:prstGeom xmlns:a="http://schemas.openxmlformats.org/drawingml/2006/main" prst="rect">
             <a:avLst/>
@@ -9166,46 +9338,2037 @@
           <a:noFill xmlns:a="http://schemas.openxmlformats.org/drawingml/2006/main"/>
           <a:ln xmlns:a="http://schemas.openxmlformats.org/drawingml/2006/main" w="0">
             <a:noFill/>
-            <a:prstDash val="solid"/>
-          </a:ln>
-        </p:spPr>
-        <p:txBody>
-          <a:bodyPr xmlns:a="http://schemas.openxmlformats.org/drawingml/2006/main" wrap="square" lIns="0" tIns="0" rIns="0" bIns="0" anchor="ctr">
-            <a:noAutofit/>
-          </a:bodyPr>
+          </a:ln>
+        </p:spPr>
+        <p:txBody>
+          <a:bodyPr xmlns:a="http://schemas.openxmlformats.org/drawingml/2006/main" lIns="0" tIns="0" rIns="0" bIns="0" anchor="ctr"/>
           <a:lstStyle xmlns:a="http://schemas.openxmlformats.org/drawingml/2006/main">
             <a:defPPr>
-              <a:defRPr sz="2400" b="1">
-                <a:solidFill>
-                  <a:srgbClr val="F55A47"/>
-                </a:solidFill>
-                <a:latin typeface="Georgia"/>
-                <a:ea typeface="Georgia"/>
-                <a:cs typeface="Georgia"/>
+              <a:defRPr sz="1275" b="1">
+                <a:solidFill>
+                  <a:srgbClr val="77E694"/>
+                </a:solidFill>
+                <a:latin typeface="Arial"/>
+                <a:ea typeface="Arial"/>
+                <a:cs typeface="Arial"/>
               </a:defRPr>
             </a:defPPr>
           </a:lstStyle>
           <a:p xmlns:a="http://schemas.openxmlformats.org/drawingml/2006/main">
             <a:pPr>
-              <a:defRPr sz="2400" b="1">
-                <a:solidFill>
-                  <a:srgbClr val="F55A47"/>
-                </a:solidFill>
-                <a:latin typeface="Georgia"/>
-                <a:ea typeface="Georgia"/>
-                <a:cs typeface="Georgia"/>
-              </a:defRPr>
-            </a:pPr>
-            <a:r>
-              <a:rPr sz="2400" b="1">
-                <a:solidFill>
-                  <a:srgbClr val="F55A47"/>
-                </a:solidFill>
-                <a:latin typeface="Georgia"/>
-                <a:ea typeface="Georgia"/>
-                <a:cs typeface="Georgia"/>
-              </a:rPr>
-              <a:t>C may allow conversion; read warnings and check the result.</a:t>
+              <a:defRPr sz="1275" b="1">
+                <a:solidFill>
+                  <a:srgbClr val="77E694"/>
+                </a:solidFill>
+                <a:latin typeface="Arial"/>
+                <a:ea typeface="Arial"/>
+                <a:cs typeface="Arial"/>
+              </a:defRPr>
+            </a:pPr>
+            <a:r>
+              <a:rPr sz="1275" b="1">
+                <a:solidFill>
+                  <a:srgbClr val="77E694"/>
+                </a:solidFill>
+                <a:latin typeface="Arial"/>
+                <a:ea typeface="Arial"/>
+                <a:cs typeface="Arial"/>
+              </a:rPr>
+              <a:t>USE WITH</a:t>
+            </a:r>
+          </a:p>
+        </p:txBody>
+      </p:sp>
+      <p:sp>
+        <p:nvSpPr>
+          <p:cNvPr id="5" name="">
+            <a:extLst xmlns:a="http://schemas.openxmlformats.org/drawingml/2006/main">
+              <a:ext uri="{FF2B5EF4-FFF2-40B4-BE49-F238E27FC236}">
+                <a16:creationId xmlns:a16="http://schemas.microsoft.com/office/drawing/2014/main" id="{8AE6886A-6F56-4DC2-8BCF-6B45E9483874}"/>
+              </a:ext>
+            </a:extLst>
+          </p:cNvPr>
+          <p:cNvSpPr>
+            <a:spLocks xmlns:a="http://schemas.openxmlformats.org/drawingml/2006/main" noGrp="1"/>
+          </p:cNvSpPr>
+          <p:nvPr/>
+        </p:nvSpPr>
+        <p:spPr>
+          <a:xfrm xmlns:a="http://schemas.openxmlformats.org/drawingml/2006/main">
+            <a:off x="6115050" y="1828800"/>
+            <a:ext cx="2476500" cy="238125"/>
+          </a:xfrm>
+          <a:prstGeom xmlns:a="http://schemas.openxmlformats.org/drawingml/2006/main" prst="rect">
+            <a:avLst/>
+          </a:prstGeom>
+          <a:noFill xmlns:a="http://schemas.openxmlformats.org/drawingml/2006/main"/>
+          <a:ln xmlns:a="http://schemas.openxmlformats.org/drawingml/2006/main" w="0">
+            <a:noFill/>
+          </a:ln>
+        </p:spPr>
+        <p:txBody>
+          <a:bodyPr xmlns:a="http://schemas.openxmlformats.org/drawingml/2006/main" lIns="0" tIns="0" rIns="0" bIns="0" anchor="ctr"/>
+          <a:lstStyle xmlns:a="http://schemas.openxmlformats.org/drawingml/2006/main">
+            <a:defPPr>
+              <a:defRPr sz="1275" b="1">
+                <a:solidFill>
+                  <a:srgbClr val="77E694"/>
+                </a:solidFill>
+                <a:latin typeface="Arial"/>
+                <a:ea typeface="Arial"/>
+                <a:cs typeface="Arial"/>
+              </a:defRPr>
+            </a:defPPr>
+          </a:lstStyle>
+          <a:p xmlns:a="http://schemas.openxmlformats.org/drawingml/2006/main">
+            <a:pPr>
+              <a:defRPr sz="1275" b="1">
+                <a:solidFill>
+                  <a:srgbClr val="77E694"/>
+                </a:solidFill>
+                <a:latin typeface="Arial"/>
+                <a:ea typeface="Arial"/>
+                <a:cs typeface="Arial"/>
+              </a:defRPr>
+            </a:pPr>
+            <a:r>
+              <a:rPr sz="1275" b="1">
+                <a:solidFill>
+                  <a:srgbClr val="77E694"/>
+                </a:solidFill>
+                <a:latin typeface="Arial"/>
+                <a:ea typeface="Arial"/>
+                <a:cs typeface="Arial"/>
+              </a:rPr>
+              <a:t>DISPLAYS</a:t>
+            </a:r>
+          </a:p>
+        </p:txBody>
+      </p:sp>
+      <p:sp>
+        <p:nvSpPr>
+          <p:cNvPr id="6" name="">
+            <a:extLst xmlns:a="http://schemas.openxmlformats.org/drawingml/2006/main">
+              <a:ext uri="{FF2B5EF4-FFF2-40B4-BE49-F238E27FC236}">
+                <a16:creationId xmlns:a16="http://schemas.microsoft.com/office/drawing/2014/main" id="{EC27FDDF-B02A-4F14-B6B7-2BE8FD0F5239}"/>
+              </a:ext>
+            </a:extLst>
+          </p:cNvPr>
+          <p:cNvSpPr>
+            <a:spLocks xmlns:a="http://schemas.openxmlformats.org/drawingml/2006/main" noGrp="1"/>
+          </p:cNvSpPr>
+          <p:nvPr/>
+        </p:nvSpPr>
+        <p:spPr>
+          <a:xfrm xmlns:a="http://schemas.openxmlformats.org/drawingml/2006/main">
+            <a:off x="590550" y="2133600"/>
+            <a:ext cx="8096250" cy="409575"/>
+          </a:xfrm>
+          <a:prstGeom xmlns:a="http://schemas.openxmlformats.org/drawingml/2006/main" prst="rect">
+            <a:avLst/>
+          </a:prstGeom>
+          <a:solidFill xmlns:a="http://schemas.openxmlformats.org/drawingml/2006/main">
+            <a:srgbClr val="29292F"/>
+          </a:solidFill>
+          <a:ln xmlns:a="http://schemas.openxmlformats.org/drawingml/2006/main" w="0">
+            <a:noFill/>
+          </a:ln>
+        </p:spPr>
+      </p:sp>
+      <p:sp>
+        <p:nvSpPr>
+          <p:cNvPr id="7" name="">
+            <a:extLst xmlns:a="http://schemas.openxmlformats.org/drawingml/2006/main">
+              <a:ext uri="{FF2B5EF4-FFF2-40B4-BE49-F238E27FC236}">
+                <a16:creationId xmlns:a16="http://schemas.microsoft.com/office/drawing/2014/main" id="{3DCA464D-A0F9-498A-AB9D-E6547BE82925}"/>
+              </a:ext>
+            </a:extLst>
+          </p:cNvPr>
+          <p:cNvSpPr>
+            <a:spLocks xmlns:a="http://schemas.openxmlformats.org/drawingml/2006/main" noGrp="1"/>
+          </p:cNvSpPr>
+          <p:nvPr/>
+        </p:nvSpPr>
+        <p:spPr>
+          <a:xfrm xmlns:a="http://schemas.openxmlformats.org/drawingml/2006/main">
+            <a:off x="714375" y="2152650"/>
+            <a:ext cx="1238250" cy="361950"/>
+          </a:xfrm>
+          <a:prstGeom xmlns:a="http://schemas.openxmlformats.org/drawingml/2006/main" prst="rect">
+            <a:avLst/>
+          </a:prstGeom>
+          <a:noFill xmlns:a="http://schemas.openxmlformats.org/drawingml/2006/main"/>
+          <a:ln xmlns:a="http://schemas.openxmlformats.org/drawingml/2006/main" w="0">
+            <a:noFill/>
+          </a:ln>
+        </p:spPr>
+        <p:txBody>
+          <a:bodyPr xmlns:a="http://schemas.openxmlformats.org/drawingml/2006/main" lIns="0" tIns="0" rIns="0" bIns="0" anchor="ctr"/>
+          <a:lstStyle xmlns:a="http://schemas.openxmlformats.org/drawingml/2006/main">
+            <a:defPPr>
+              <a:defRPr sz="1800" b="1">
+                <a:solidFill>
+                  <a:srgbClr val="77E694"/>
+                </a:solidFill>
+                <a:latin typeface="Aptos Mono"/>
+                <a:ea typeface="Aptos Mono"/>
+                <a:cs typeface="Aptos Mono"/>
+              </a:defRPr>
+            </a:defPPr>
+          </a:lstStyle>
+          <a:p xmlns:a="http://schemas.openxmlformats.org/drawingml/2006/main">
+            <a:pPr>
+              <a:defRPr sz="1800" b="1">
+                <a:solidFill>
+                  <a:srgbClr val="77E694"/>
+                </a:solidFill>
+                <a:latin typeface="Aptos Mono"/>
+                <a:ea typeface="Aptos Mono"/>
+                <a:cs typeface="Aptos Mono"/>
+              </a:defRPr>
+            </a:pPr>
+            <a:r>
+              <a:rPr sz="1800" b="1">
+                <a:solidFill>
+                  <a:srgbClr val="77E694"/>
+                </a:solidFill>
+                <a:latin typeface="Aptos Mono"/>
+                <a:ea typeface="Aptos Mono"/>
+                <a:cs typeface="Aptos Mono"/>
+              </a:rPr>
+              <a:t>%d</a:t>
+            </a:r>
+          </a:p>
+        </p:txBody>
+      </p:sp>
+      <p:sp>
+        <p:nvSpPr>
+          <p:cNvPr id="8" name="">
+            <a:extLst xmlns:a="http://schemas.openxmlformats.org/drawingml/2006/main">
+              <a:ext uri="{FF2B5EF4-FFF2-40B4-BE49-F238E27FC236}">
+                <a16:creationId xmlns:a16="http://schemas.microsoft.com/office/drawing/2014/main" id="{3A716B56-9C8B-469D-953E-09ABACD486E4}"/>
+              </a:ext>
+            </a:extLst>
+          </p:cNvPr>
+          <p:cNvSpPr>
+            <a:spLocks xmlns:a="http://schemas.openxmlformats.org/drawingml/2006/main" noGrp="1"/>
+          </p:cNvSpPr>
+          <p:nvPr/>
+        </p:nvSpPr>
+        <p:spPr>
+          <a:xfrm xmlns:a="http://schemas.openxmlformats.org/drawingml/2006/main">
+            <a:off x="2228850" y="2152650"/>
+            <a:ext cx="3714750" cy="361950"/>
+          </a:xfrm>
+          <a:prstGeom xmlns:a="http://schemas.openxmlformats.org/drawingml/2006/main" prst="rect">
+            <a:avLst/>
+          </a:prstGeom>
+          <a:noFill xmlns:a="http://schemas.openxmlformats.org/drawingml/2006/main"/>
+          <a:ln xmlns:a="http://schemas.openxmlformats.org/drawingml/2006/main" w="0">
+            <a:noFill/>
+          </a:ln>
+        </p:spPr>
+        <p:txBody>
+          <a:bodyPr xmlns:a="http://schemas.openxmlformats.org/drawingml/2006/main" lIns="0" tIns="0" rIns="0" bIns="0" anchor="ctr"/>
+          <a:lstStyle xmlns:a="http://schemas.openxmlformats.org/drawingml/2006/main">
+            <a:defPPr>
+              <a:defRPr sz="1575" b="0">
+                <a:solidFill>
+                  <a:srgbClr val="FFFFFF"/>
+                </a:solidFill>
+                <a:latin typeface="Arial"/>
+                <a:ea typeface="Arial"/>
+                <a:cs typeface="Arial"/>
+              </a:defRPr>
+            </a:defPPr>
+          </a:lstStyle>
+          <a:p xmlns:a="http://schemas.openxmlformats.org/drawingml/2006/main">
+            <a:pPr>
+              <a:defRPr sz="1575" b="0">
+                <a:solidFill>
+                  <a:srgbClr val="FFFFFF"/>
+                </a:solidFill>
+                <a:latin typeface="Arial"/>
+                <a:ea typeface="Arial"/>
+                <a:cs typeface="Arial"/>
+              </a:defRPr>
+            </a:pPr>
+            <a:r>
+              <a:rPr sz="1575" b="0">
+                <a:solidFill>
+                  <a:srgbClr val="FFFFFF"/>
+                </a:solidFill>
+                <a:latin typeface="Arial"/>
+                <a:ea typeface="Arial"/>
+                <a:cs typeface="Arial"/>
+              </a:rPr>
+              <a:t>int</a:t>
+            </a:r>
+          </a:p>
+        </p:txBody>
+      </p:sp>
+      <p:sp>
+        <p:nvSpPr>
+          <p:cNvPr id="9" name="">
+            <a:extLst xmlns:a="http://schemas.openxmlformats.org/drawingml/2006/main">
+              <a:ext uri="{FF2B5EF4-FFF2-40B4-BE49-F238E27FC236}">
+                <a16:creationId xmlns:a16="http://schemas.microsoft.com/office/drawing/2014/main" id="{3F654E48-8E44-4954-B7B6-2AA92D71B1A0}"/>
+              </a:ext>
+            </a:extLst>
+          </p:cNvPr>
+          <p:cNvSpPr>
+            <a:spLocks xmlns:a="http://schemas.openxmlformats.org/drawingml/2006/main" noGrp="1"/>
+          </p:cNvSpPr>
+          <p:nvPr/>
+        </p:nvSpPr>
+        <p:spPr>
+          <a:xfrm xmlns:a="http://schemas.openxmlformats.org/drawingml/2006/main">
+            <a:off x="6115050" y="2152650"/>
+            <a:ext cx="2381250" cy="361950"/>
+          </a:xfrm>
+          <a:prstGeom xmlns:a="http://schemas.openxmlformats.org/drawingml/2006/main" prst="rect">
+            <a:avLst/>
+          </a:prstGeom>
+          <a:noFill xmlns:a="http://schemas.openxmlformats.org/drawingml/2006/main"/>
+          <a:ln xmlns:a="http://schemas.openxmlformats.org/drawingml/2006/main" w="0">
+            <a:noFill/>
+          </a:ln>
+        </p:spPr>
+        <p:txBody>
+          <a:bodyPr xmlns:a="http://schemas.openxmlformats.org/drawingml/2006/main" lIns="0" tIns="0" rIns="0" bIns="0" anchor="ctr"/>
+          <a:lstStyle xmlns:a="http://schemas.openxmlformats.org/drawingml/2006/main">
+            <a:defPPr>
+              <a:defRPr sz="1575" b="0">
+                <a:solidFill>
+                  <a:srgbClr val="FFFFFF"/>
+                </a:solidFill>
+                <a:latin typeface="Aptos Mono"/>
+                <a:ea typeface="Aptos Mono"/>
+                <a:cs typeface="Aptos Mono"/>
+              </a:defRPr>
+            </a:defPPr>
+          </a:lstStyle>
+          <a:p xmlns:a="http://schemas.openxmlformats.org/drawingml/2006/main">
+            <a:pPr>
+              <a:defRPr sz="1575" b="0">
+                <a:solidFill>
+                  <a:srgbClr val="FFFFFF"/>
+                </a:solidFill>
+                <a:latin typeface="Aptos Mono"/>
+                <a:ea typeface="Aptos Mono"/>
+                <a:cs typeface="Aptos Mono"/>
+              </a:defRPr>
+            </a:pPr>
+            <a:r>
+              <a:rPr sz="1575" b="0">
+                <a:solidFill>
+                  <a:srgbClr val="FFFFFF"/>
+                </a:solidFill>
+                <a:latin typeface="Aptos Mono"/>
+                <a:ea typeface="Aptos Mono"/>
+                <a:cs typeface="Aptos Mono"/>
+              </a:rPr>
+              <a:t>42</a:t>
+            </a:r>
+          </a:p>
+        </p:txBody>
+      </p:sp>
+      <p:sp>
+        <p:nvSpPr>
+          <p:cNvPr id="10" name="">
+            <a:extLst xmlns:a="http://schemas.openxmlformats.org/drawingml/2006/main">
+              <a:ext uri="{FF2B5EF4-FFF2-40B4-BE49-F238E27FC236}">
+                <a16:creationId xmlns:a16="http://schemas.microsoft.com/office/drawing/2014/main" id="{252E45F0-EFDB-428E-A110-8A13B6327309}"/>
+              </a:ext>
+            </a:extLst>
+          </p:cNvPr>
+          <p:cNvSpPr>
+            <a:spLocks xmlns:a="http://schemas.openxmlformats.org/drawingml/2006/main" noGrp="1"/>
+          </p:cNvSpPr>
+          <p:nvPr/>
+        </p:nvSpPr>
+        <p:spPr>
+          <a:xfrm xmlns:a="http://schemas.openxmlformats.org/drawingml/2006/main">
+            <a:off x="590550" y="2581275"/>
+            <a:ext cx="8096250" cy="409575"/>
+          </a:xfrm>
+          <a:prstGeom xmlns:a="http://schemas.openxmlformats.org/drawingml/2006/main" prst="rect">
+            <a:avLst/>
+          </a:prstGeom>
+          <a:solidFill xmlns:a="http://schemas.openxmlformats.org/drawingml/2006/main">
+            <a:srgbClr val="1E1E22"/>
+          </a:solidFill>
+          <a:ln xmlns:a="http://schemas.openxmlformats.org/drawingml/2006/main" w="0">
+            <a:noFill/>
+          </a:ln>
+        </p:spPr>
+      </p:sp>
+      <p:sp>
+        <p:nvSpPr>
+          <p:cNvPr id="11" name="">
+            <a:extLst xmlns:a="http://schemas.openxmlformats.org/drawingml/2006/main">
+              <a:ext uri="{FF2B5EF4-FFF2-40B4-BE49-F238E27FC236}">
+                <a16:creationId xmlns:a16="http://schemas.microsoft.com/office/drawing/2014/main" id="{BE74205A-BEE4-4F31-8D4D-AE4125F34559}"/>
+              </a:ext>
+            </a:extLst>
+          </p:cNvPr>
+          <p:cNvSpPr>
+            <a:spLocks xmlns:a="http://schemas.openxmlformats.org/drawingml/2006/main" noGrp="1"/>
+          </p:cNvSpPr>
+          <p:nvPr/>
+        </p:nvSpPr>
+        <p:spPr>
+          <a:xfrm xmlns:a="http://schemas.openxmlformats.org/drawingml/2006/main">
+            <a:off x="714375" y="2600325"/>
+            <a:ext cx="1238250" cy="361950"/>
+          </a:xfrm>
+          <a:prstGeom xmlns:a="http://schemas.openxmlformats.org/drawingml/2006/main" prst="rect">
+            <a:avLst/>
+          </a:prstGeom>
+          <a:noFill xmlns:a="http://schemas.openxmlformats.org/drawingml/2006/main"/>
+          <a:ln xmlns:a="http://schemas.openxmlformats.org/drawingml/2006/main" w="0">
+            <a:noFill/>
+          </a:ln>
+        </p:spPr>
+        <p:txBody>
+          <a:bodyPr xmlns:a="http://schemas.openxmlformats.org/drawingml/2006/main" lIns="0" tIns="0" rIns="0" bIns="0" anchor="ctr"/>
+          <a:lstStyle xmlns:a="http://schemas.openxmlformats.org/drawingml/2006/main">
+            <a:defPPr>
+              <a:defRPr sz="1800" b="1">
+                <a:solidFill>
+                  <a:srgbClr val="77E694"/>
+                </a:solidFill>
+                <a:latin typeface="Aptos Mono"/>
+                <a:ea typeface="Aptos Mono"/>
+                <a:cs typeface="Aptos Mono"/>
+              </a:defRPr>
+            </a:defPPr>
+          </a:lstStyle>
+          <a:p xmlns:a="http://schemas.openxmlformats.org/drawingml/2006/main">
+            <a:pPr>
+              <a:defRPr sz="1800" b="1">
+                <a:solidFill>
+                  <a:srgbClr val="77E694"/>
+                </a:solidFill>
+                <a:latin typeface="Aptos Mono"/>
+                <a:ea typeface="Aptos Mono"/>
+                <a:cs typeface="Aptos Mono"/>
+              </a:defRPr>
+            </a:pPr>
+            <a:r>
+              <a:rPr sz="1800" b="1">
+                <a:solidFill>
+                  <a:srgbClr val="77E694"/>
+                </a:solidFill>
+                <a:latin typeface="Aptos Mono"/>
+                <a:ea typeface="Aptos Mono"/>
+                <a:cs typeface="Aptos Mono"/>
+              </a:rPr>
+              <a:t>%c</a:t>
+            </a:r>
+          </a:p>
+        </p:txBody>
+      </p:sp>
+      <p:sp>
+        <p:nvSpPr>
+          <p:cNvPr id="12" name="">
+            <a:extLst xmlns:a="http://schemas.openxmlformats.org/drawingml/2006/main">
+              <a:ext uri="{FF2B5EF4-FFF2-40B4-BE49-F238E27FC236}">
+                <a16:creationId xmlns:a16="http://schemas.microsoft.com/office/drawing/2014/main" id="{C8745C77-DACF-43F6-A2E0-E2A236F2904E}"/>
+              </a:ext>
+            </a:extLst>
+          </p:cNvPr>
+          <p:cNvSpPr>
+            <a:spLocks xmlns:a="http://schemas.openxmlformats.org/drawingml/2006/main" noGrp="1"/>
+          </p:cNvSpPr>
+          <p:nvPr/>
+        </p:nvSpPr>
+        <p:spPr>
+          <a:xfrm xmlns:a="http://schemas.openxmlformats.org/drawingml/2006/main">
+            <a:off x="2228850" y="2600325"/>
+            <a:ext cx="3714750" cy="361950"/>
+          </a:xfrm>
+          <a:prstGeom xmlns:a="http://schemas.openxmlformats.org/drawingml/2006/main" prst="rect">
+            <a:avLst/>
+          </a:prstGeom>
+          <a:noFill xmlns:a="http://schemas.openxmlformats.org/drawingml/2006/main"/>
+          <a:ln xmlns:a="http://schemas.openxmlformats.org/drawingml/2006/main" w="0">
+            <a:noFill/>
+          </a:ln>
+        </p:spPr>
+        <p:txBody>
+          <a:bodyPr xmlns:a="http://schemas.openxmlformats.org/drawingml/2006/main" lIns="0" tIns="0" rIns="0" bIns="0" anchor="ctr"/>
+          <a:lstStyle xmlns:a="http://schemas.openxmlformats.org/drawingml/2006/main">
+            <a:defPPr>
+              <a:defRPr sz="1575" b="0">
+                <a:solidFill>
+                  <a:srgbClr val="FFFFFF"/>
+                </a:solidFill>
+                <a:latin typeface="Arial"/>
+                <a:ea typeface="Arial"/>
+                <a:cs typeface="Arial"/>
+              </a:defRPr>
+            </a:defPPr>
+          </a:lstStyle>
+          <a:p xmlns:a="http://schemas.openxmlformats.org/drawingml/2006/main">
+            <a:pPr>
+              <a:defRPr sz="1575" b="0">
+                <a:solidFill>
+                  <a:srgbClr val="FFFFFF"/>
+                </a:solidFill>
+                <a:latin typeface="Arial"/>
+                <a:ea typeface="Arial"/>
+                <a:cs typeface="Arial"/>
+              </a:defRPr>
+            </a:pPr>
+            <a:r>
+              <a:rPr sz="1575" b="0">
+                <a:solidFill>
+                  <a:srgbClr val="FFFFFF"/>
+                </a:solidFill>
+                <a:latin typeface="Arial"/>
+                <a:ea typeface="Arial"/>
+                <a:cs typeface="Arial"/>
+              </a:rPr>
+              <a:t>one character (char)</a:t>
+            </a:r>
+          </a:p>
+        </p:txBody>
+      </p:sp>
+      <p:sp>
+        <p:nvSpPr>
+          <p:cNvPr id="13" name="">
+            <a:extLst xmlns:a="http://schemas.openxmlformats.org/drawingml/2006/main">
+              <a:ext uri="{FF2B5EF4-FFF2-40B4-BE49-F238E27FC236}">
+                <a16:creationId xmlns:a16="http://schemas.microsoft.com/office/drawing/2014/main" id="{AEF28942-C807-415B-B4FE-D41552FCF1FD}"/>
+              </a:ext>
+            </a:extLst>
+          </p:cNvPr>
+          <p:cNvSpPr>
+            <a:spLocks xmlns:a="http://schemas.openxmlformats.org/drawingml/2006/main" noGrp="1"/>
+          </p:cNvSpPr>
+          <p:nvPr/>
+        </p:nvSpPr>
+        <p:spPr>
+          <a:xfrm xmlns:a="http://schemas.openxmlformats.org/drawingml/2006/main">
+            <a:off x="6115050" y="2600325"/>
+            <a:ext cx="2381250" cy="361950"/>
+          </a:xfrm>
+          <a:prstGeom xmlns:a="http://schemas.openxmlformats.org/drawingml/2006/main" prst="rect">
+            <a:avLst/>
+          </a:prstGeom>
+          <a:noFill xmlns:a="http://schemas.openxmlformats.org/drawingml/2006/main"/>
+          <a:ln xmlns:a="http://schemas.openxmlformats.org/drawingml/2006/main" w="0">
+            <a:noFill/>
+          </a:ln>
+        </p:spPr>
+        <p:txBody>
+          <a:bodyPr xmlns:a="http://schemas.openxmlformats.org/drawingml/2006/main" lIns="0" tIns="0" rIns="0" bIns="0" anchor="ctr"/>
+          <a:lstStyle xmlns:a="http://schemas.openxmlformats.org/drawingml/2006/main">
+            <a:defPPr>
+              <a:defRPr sz="1575" b="0">
+                <a:solidFill>
+                  <a:srgbClr val="FFFFFF"/>
+                </a:solidFill>
+                <a:latin typeface="Aptos Mono"/>
+                <a:ea typeface="Aptos Mono"/>
+                <a:cs typeface="Aptos Mono"/>
+              </a:defRPr>
+            </a:defPPr>
+          </a:lstStyle>
+          <a:p xmlns:a="http://schemas.openxmlformats.org/drawingml/2006/main">
+            <a:pPr>
+              <a:defRPr sz="1575" b="0">
+                <a:solidFill>
+                  <a:srgbClr val="FFFFFF"/>
+                </a:solidFill>
+                <a:latin typeface="Aptos Mono"/>
+                <a:ea typeface="Aptos Mono"/>
+                <a:cs typeface="Aptos Mono"/>
+              </a:defRPr>
+            </a:pPr>
+            <a:r>
+              <a:rPr sz="1575" b="0">
+                <a:solidFill>
+                  <a:srgbClr val="FFFFFF"/>
+                </a:solidFill>
+                <a:latin typeface="Aptos Mono"/>
+                <a:ea typeface="Aptos Mono"/>
+                <a:cs typeface="Aptos Mono"/>
+              </a:rPr>
+              <a:t>A</a:t>
+            </a:r>
+          </a:p>
+        </p:txBody>
+      </p:sp>
+      <p:sp>
+        <p:nvSpPr>
+          <p:cNvPr id="14" name="">
+            <a:extLst xmlns:a="http://schemas.openxmlformats.org/drawingml/2006/main">
+              <a:ext uri="{FF2B5EF4-FFF2-40B4-BE49-F238E27FC236}">
+                <a16:creationId xmlns:a16="http://schemas.microsoft.com/office/drawing/2014/main" id="{942B043B-CE7D-47ED-B792-5B8ADA18C275}"/>
+              </a:ext>
+            </a:extLst>
+          </p:cNvPr>
+          <p:cNvSpPr>
+            <a:spLocks xmlns:a="http://schemas.openxmlformats.org/drawingml/2006/main" noGrp="1"/>
+          </p:cNvSpPr>
+          <p:nvPr/>
+        </p:nvSpPr>
+        <p:spPr>
+          <a:xfrm xmlns:a="http://schemas.openxmlformats.org/drawingml/2006/main">
+            <a:off x="590550" y="3028950"/>
+            <a:ext cx="8096250" cy="409575"/>
+          </a:xfrm>
+          <a:prstGeom xmlns:a="http://schemas.openxmlformats.org/drawingml/2006/main" prst="rect">
+            <a:avLst/>
+          </a:prstGeom>
+          <a:solidFill xmlns:a="http://schemas.openxmlformats.org/drawingml/2006/main">
+            <a:srgbClr val="29292F"/>
+          </a:solidFill>
+          <a:ln xmlns:a="http://schemas.openxmlformats.org/drawingml/2006/main" w="0">
+            <a:noFill/>
+          </a:ln>
+        </p:spPr>
+      </p:sp>
+      <p:sp>
+        <p:nvSpPr>
+          <p:cNvPr id="15" name="">
+            <a:extLst xmlns:a="http://schemas.openxmlformats.org/drawingml/2006/main">
+              <a:ext uri="{FF2B5EF4-FFF2-40B4-BE49-F238E27FC236}">
+                <a16:creationId xmlns:a16="http://schemas.microsoft.com/office/drawing/2014/main" id="{94560067-E7A1-4B64-84F5-2782C7F24B57}"/>
+              </a:ext>
+            </a:extLst>
+          </p:cNvPr>
+          <p:cNvSpPr>
+            <a:spLocks xmlns:a="http://schemas.openxmlformats.org/drawingml/2006/main" noGrp="1"/>
+          </p:cNvSpPr>
+          <p:nvPr/>
+        </p:nvSpPr>
+        <p:spPr>
+          <a:xfrm xmlns:a="http://schemas.openxmlformats.org/drawingml/2006/main">
+            <a:off x="714375" y="3048000"/>
+            <a:ext cx="1238250" cy="361950"/>
+          </a:xfrm>
+          <a:prstGeom xmlns:a="http://schemas.openxmlformats.org/drawingml/2006/main" prst="rect">
+            <a:avLst/>
+          </a:prstGeom>
+          <a:noFill xmlns:a="http://schemas.openxmlformats.org/drawingml/2006/main"/>
+          <a:ln xmlns:a="http://schemas.openxmlformats.org/drawingml/2006/main" w="0">
+            <a:noFill/>
+          </a:ln>
+        </p:spPr>
+        <p:txBody>
+          <a:bodyPr xmlns:a="http://schemas.openxmlformats.org/drawingml/2006/main" lIns="0" tIns="0" rIns="0" bIns="0" anchor="ctr"/>
+          <a:lstStyle xmlns:a="http://schemas.openxmlformats.org/drawingml/2006/main">
+            <a:defPPr>
+              <a:defRPr sz="1800" b="1">
+                <a:solidFill>
+                  <a:srgbClr val="77E694"/>
+                </a:solidFill>
+                <a:latin typeface="Aptos Mono"/>
+                <a:ea typeface="Aptos Mono"/>
+                <a:cs typeface="Aptos Mono"/>
+              </a:defRPr>
+            </a:defPPr>
+          </a:lstStyle>
+          <a:p xmlns:a="http://schemas.openxmlformats.org/drawingml/2006/main">
+            <a:pPr>
+              <a:defRPr sz="1800" b="1">
+                <a:solidFill>
+                  <a:srgbClr val="77E694"/>
+                </a:solidFill>
+                <a:latin typeface="Aptos Mono"/>
+                <a:ea typeface="Aptos Mono"/>
+                <a:cs typeface="Aptos Mono"/>
+              </a:defRPr>
+            </a:pPr>
+            <a:r>
+              <a:rPr sz="1800" b="1">
+                <a:solidFill>
+                  <a:srgbClr val="77E694"/>
+                </a:solidFill>
+                <a:latin typeface="Aptos Mono"/>
+                <a:ea typeface="Aptos Mono"/>
+                <a:cs typeface="Aptos Mono"/>
+              </a:rPr>
+              <a:t>%s</a:t>
+            </a:r>
+          </a:p>
+        </p:txBody>
+      </p:sp>
+      <p:sp>
+        <p:nvSpPr>
+          <p:cNvPr id="16" name="">
+            <a:extLst xmlns:a="http://schemas.openxmlformats.org/drawingml/2006/main">
+              <a:ext uri="{FF2B5EF4-FFF2-40B4-BE49-F238E27FC236}">
+                <a16:creationId xmlns:a16="http://schemas.microsoft.com/office/drawing/2014/main" id="{829FE3FA-8892-4D4C-98E7-0C170FFB6B98}"/>
+              </a:ext>
+            </a:extLst>
+          </p:cNvPr>
+          <p:cNvSpPr>
+            <a:spLocks xmlns:a="http://schemas.openxmlformats.org/drawingml/2006/main" noGrp="1"/>
+          </p:cNvSpPr>
+          <p:nvPr/>
+        </p:nvSpPr>
+        <p:spPr>
+          <a:xfrm xmlns:a="http://schemas.openxmlformats.org/drawingml/2006/main">
+            <a:off x="2228850" y="3048000"/>
+            <a:ext cx="3714750" cy="361950"/>
+          </a:xfrm>
+          <a:prstGeom xmlns:a="http://schemas.openxmlformats.org/drawingml/2006/main" prst="rect">
+            <a:avLst/>
+          </a:prstGeom>
+          <a:noFill xmlns:a="http://schemas.openxmlformats.org/drawingml/2006/main"/>
+          <a:ln xmlns:a="http://schemas.openxmlformats.org/drawingml/2006/main" w="0">
+            <a:noFill/>
+          </a:ln>
+        </p:spPr>
+        <p:txBody>
+          <a:bodyPr xmlns:a="http://schemas.openxmlformats.org/drawingml/2006/main" lIns="0" tIns="0" rIns="0" bIns="0" anchor="ctr"/>
+          <a:lstStyle xmlns:a="http://schemas.openxmlformats.org/drawingml/2006/main">
+            <a:defPPr>
+              <a:defRPr sz="1575" b="0">
+                <a:solidFill>
+                  <a:srgbClr val="FFFFFF"/>
+                </a:solidFill>
+                <a:latin typeface="Arial"/>
+                <a:ea typeface="Arial"/>
+                <a:cs typeface="Arial"/>
+              </a:defRPr>
+            </a:defPPr>
+          </a:lstStyle>
+          <a:p xmlns:a="http://schemas.openxmlformats.org/drawingml/2006/main">
+            <a:pPr>
+              <a:defRPr sz="1575" b="0">
+                <a:solidFill>
+                  <a:srgbClr val="FFFFFF"/>
+                </a:solidFill>
+                <a:latin typeface="Arial"/>
+                <a:ea typeface="Arial"/>
+                <a:cs typeface="Arial"/>
+              </a:defRPr>
+            </a:pPr>
+            <a:r>
+              <a:rPr sz="1575" b="0">
+                <a:solidFill>
+                  <a:srgbClr val="FFFFFF"/>
+                </a:solidFill>
+                <a:latin typeface="Arial"/>
+                <a:ea typeface="Arial"/>
+                <a:cs typeface="Arial"/>
+              </a:rPr>
+              <a:t>text (C string)</a:t>
+            </a:r>
+          </a:p>
+        </p:txBody>
+      </p:sp>
+      <p:sp>
+        <p:nvSpPr>
+          <p:cNvPr id="17" name="">
+            <a:extLst xmlns:a="http://schemas.openxmlformats.org/drawingml/2006/main">
+              <a:ext uri="{FF2B5EF4-FFF2-40B4-BE49-F238E27FC236}">
+                <a16:creationId xmlns:a16="http://schemas.microsoft.com/office/drawing/2014/main" id="{935697EC-CC95-4A77-94ED-DC2F42C39291}"/>
+              </a:ext>
+            </a:extLst>
+          </p:cNvPr>
+          <p:cNvSpPr>
+            <a:spLocks xmlns:a="http://schemas.openxmlformats.org/drawingml/2006/main" noGrp="1"/>
+          </p:cNvSpPr>
+          <p:nvPr/>
+        </p:nvSpPr>
+        <p:spPr>
+          <a:xfrm xmlns:a="http://schemas.openxmlformats.org/drawingml/2006/main">
+            <a:off x="6115050" y="3048000"/>
+            <a:ext cx="2381250" cy="361950"/>
+          </a:xfrm>
+          <a:prstGeom xmlns:a="http://schemas.openxmlformats.org/drawingml/2006/main" prst="rect">
+            <a:avLst/>
+          </a:prstGeom>
+          <a:noFill xmlns:a="http://schemas.openxmlformats.org/drawingml/2006/main"/>
+          <a:ln xmlns:a="http://schemas.openxmlformats.org/drawingml/2006/main" w="0">
+            <a:noFill/>
+          </a:ln>
+        </p:spPr>
+        <p:txBody>
+          <a:bodyPr xmlns:a="http://schemas.openxmlformats.org/drawingml/2006/main" lIns="0" tIns="0" rIns="0" bIns="0" anchor="ctr"/>
+          <a:lstStyle xmlns:a="http://schemas.openxmlformats.org/drawingml/2006/main">
+            <a:defPPr>
+              <a:defRPr sz="1575" b="0">
+                <a:solidFill>
+                  <a:srgbClr val="FFFFFF"/>
+                </a:solidFill>
+                <a:latin typeface="Aptos Mono"/>
+                <a:ea typeface="Aptos Mono"/>
+                <a:cs typeface="Aptos Mono"/>
+              </a:defRPr>
+            </a:defPPr>
+          </a:lstStyle>
+          <a:p xmlns:a="http://schemas.openxmlformats.org/drawingml/2006/main">
+            <a:pPr>
+              <a:defRPr sz="1575" b="0">
+                <a:solidFill>
+                  <a:srgbClr val="FFFFFF"/>
+                </a:solidFill>
+                <a:latin typeface="Aptos Mono"/>
+                <a:ea typeface="Aptos Mono"/>
+                <a:cs typeface="Aptos Mono"/>
+              </a:defRPr>
+            </a:pPr>
+            <a:r>
+              <a:rPr sz="1575" b="0">
+                <a:solidFill>
+                  <a:srgbClr val="FFFFFF"/>
+                </a:solidFill>
+                <a:latin typeface="Aptos Mono"/>
+                <a:ea typeface="Aptos Mono"/>
+                <a:cs typeface="Aptos Mono"/>
+              </a:rPr>
+              <a:t>Library</a:t>
+            </a:r>
+          </a:p>
+        </p:txBody>
+      </p:sp>
+      <p:sp>
+        <p:nvSpPr>
+          <p:cNvPr id="18" name="">
+            <a:extLst xmlns:a="http://schemas.openxmlformats.org/drawingml/2006/main">
+              <a:ext uri="{FF2B5EF4-FFF2-40B4-BE49-F238E27FC236}">
+                <a16:creationId xmlns:a16="http://schemas.microsoft.com/office/drawing/2014/main" id="{5A41A4E8-CA85-4EE0-8275-CB2CC286EFF1}"/>
+              </a:ext>
+            </a:extLst>
+          </p:cNvPr>
+          <p:cNvSpPr>
+            <a:spLocks xmlns:a="http://schemas.openxmlformats.org/drawingml/2006/main" noGrp="1"/>
+          </p:cNvSpPr>
+          <p:nvPr/>
+        </p:nvSpPr>
+        <p:spPr>
+          <a:xfrm xmlns:a="http://schemas.openxmlformats.org/drawingml/2006/main">
+            <a:off x="590550" y="3476625"/>
+            <a:ext cx="8096250" cy="409575"/>
+          </a:xfrm>
+          <a:prstGeom xmlns:a="http://schemas.openxmlformats.org/drawingml/2006/main" prst="rect">
+            <a:avLst/>
+          </a:prstGeom>
+          <a:solidFill xmlns:a="http://schemas.openxmlformats.org/drawingml/2006/main">
+            <a:srgbClr val="1E1E22"/>
+          </a:solidFill>
+          <a:ln xmlns:a="http://schemas.openxmlformats.org/drawingml/2006/main" w="0">
+            <a:noFill/>
+          </a:ln>
+        </p:spPr>
+      </p:sp>
+      <p:sp>
+        <p:nvSpPr>
+          <p:cNvPr id="19" name="">
+            <a:extLst xmlns:a="http://schemas.openxmlformats.org/drawingml/2006/main">
+              <a:ext uri="{FF2B5EF4-FFF2-40B4-BE49-F238E27FC236}">
+                <a16:creationId xmlns:a16="http://schemas.microsoft.com/office/drawing/2014/main" id="{29A14FFD-EB3E-46BB-A235-2992A02B16E7}"/>
+              </a:ext>
+            </a:extLst>
+          </p:cNvPr>
+          <p:cNvSpPr>
+            <a:spLocks xmlns:a="http://schemas.openxmlformats.org/drawingml/2006/main" noGrp="1"/>
+          </p:cNvSpPr>
+          <p:nvPr/>
+        </p:nvSpPr>
+        <p:spPr>
+          <a:xfrm xmlns:a="http://schemas.openxmlformats.org/drawingml/2006/main">
+            <a:off x="714375" y="3495675"/>
+            <a:ext cx="1238250" cy="361950"/>
+          </a:xfrm>
+          <a:prstGeom xmlns:a="http://schemas.openxmlformats.org/drawingml/2006/main" prst="rect">
+            <a:avLst/>
+          </a:prstGeom>
+          <a:noFill xmlns:a="http://schemas.openxmlformats.org/drawingml/2006/main"/>
+          <a:ln xmlns:a="http://schemas.openxmlformats.org/drawingml/2006/main" w="0">
+            <a:noFill/>
+          </a:ln>
+        </p:spPr>
+        <p:txBody>
+          <a:bodyPr xmlns:a="http://schemas.openxmlformats.org/drawingml/2006/main" lIns="0" tIns="0" rIns="0" bIns="0" anchor="ctr"/>
+          <a:lstStyle xmlns:a="http://schemas.openxmlformats.org/drawingml/2006/main">
+            <a:defPPr>
+              <a:defRPr sz="1800" b="1">
+                <a:solidFill>
+                  <a:srgbClr val="77E694"/>
+                </a:solidFill>
+                <a:latin typeface="Aptos Mono"/>
+                <a:ea typeface="Aptos Mono"/>
+                <a:cs typeface="Aptos Mono"/>
+              </a:defRPr>
+            </a:defPPr>
+          </a:lstStyle>
+          <a:p xmlns:a="http://schemas.openxmlformats.org/drawingml/2006/main">
+            <a:pPr>
+              <a:defRPr sz="1800" b="1">
+                <a:solidFill>
+                  <a:srgbClr val="77E694"/>
+                </a:solidFill>
+                <a:latin typeface="Aptos Mono"/>
+                <a:ea typeface="Aptos Mono"/>
+                <a:cs typeface="Aptos Mono"/>
+              </a:defRPr>
+            </a:pPr>
+            <a:r>
+              <a:rPr sz="1800" b="1">
+                <a:solidFill>
+                  <a:srgbClr val="77E694"/>
+                </a:solidFill>
+                <a:latin typeface="Aptos Mono"/>
+                <a:ea typeface="Aptos Mono"/>
+                <a:cs typeface="Aptos Mono"/>
+              </a:rPr>
+              <a:t>%f</a:t>
+            </a:r>
+          </a:p>
+        </p:txBody>
+      </p:sp>
+      <p:sp>
+        <p:nvSpPr>
+          <p:cNvPr id="20" name="">
+            <a:extLst xmlns:a="http://schemas.openxmlformats.org/drawingml/2006/main">
+              <a:ext uri="{FF2B5EF4-FFF2-40B4-BE49-F238E27FC236}">
+                <a16:creationId xmlns:a16="http://schemas.microsoft.com/office/drawing/2014/main" id="{BB5BB450-91EF-493C-912F-80289A33DFEE}"/>
+              </a:ext>
+            </a:extLst>
+          </p:cNvPr>
+          <p:cNvSpPr>
+            <a:spLocks xmlns:a="http://schemas.openxmlformats.org/drawingml/2006/main" noGrp="1"/>
+          </p:cNvSpPr>
+          <p:nvPr/>
+        </p:nvSpPr>
+        <p:spPr>
+          <a:xfrm xmlns:a="http://schemas.openxmlformats.org/drawingml/2006/main">
+            <a:off x="2228850" y="3495675"/>
+            <a:ext cx="3714750" cy="361950"/>
+          </a:xfrm>
+          <a:prstGeom xmlns:a="http://schemas.openxmlformats.org/drawingml/2006/main" prst="rect">
+            <a:avLst/>
+          </a:prstGeom>
+          <a:noFill xmlns:a="http://schemas.openxmlformats.org/drawingml/2006/main"/>
+          <a:ln xmlns:a="http://schemas.openxmlformats.org/drawingml/2006/main" w="0">
+            <a:noFill/>
+          </a:ln>
+        </p:spPr>
+        <p:txBody>
+          <a:bodyPr xmlns:a="http://schemas.openxmlformats.org/drawingml/2006/main" lIns="0" tIns="0" rIns="0" bIns="0" anchor="ctr"/>
+          <a:lstStyle xmlns:a="http://schemas.openxmlformats.org/drawingml/2006/main">
+            <a:defPPr>
+              <a:defRPr sz="1575" b="0">
+                <a:solidFill>
+                  <a:srgbClr val="FFFFFF"/>
+                </a:solidFill>
+                <a:latin typeface="Arial"/>
+                <a:ea typeface="Arial"/>
+                <a:cs typeface="Arial"/>
+              </a:defRPr>
+            </a:defPPr>
+          </a:lstStyle>
+          <a:p xmlns:a="http://schemas.openxmlformats.org/drawingml/2006/main">
+            <a:pPr>
+              <a:defRPr sz="1575" b="0">
+                <a:solidFill>
+                  <a:srgbClr val="FFFFFF"/>
+                </a:solidFill>
+                <a:latin typeface="Arial"/>
+                <a:ea typeface="Arial"/>
+                <a:cs typeface="Arial"/>
+              </a:defRPr>
+            </a:pPr>
+            <a:r>
+              <a:rPr sz="1575" b="0">
+                <a:solidFill>
+                  <a:srgbClr val="FFFFFF"/>
+                </a:solidFill>
+                <a:latin typeface="Arial"/>
+                <a:ea typeface="Arial"/>
+                <a:cs typeface="Arial"/>
+              </a:rPr>
+              <a:t>decimal (double)</a:t>
+            </a:r>
+          </a:p>
+        </p:txBody>
+      </p:sp>
+      <p:sp>
+        <p:nvSpPr>
+          <p:cNvPr id="21" name="">
+            <a:extLst xmlns:a="http://schemas.openxmlformats.org/drawingml/2006/main">
+              <a:ext uri="{FF2B5EF4-FFF2-40B4-BE49-F238E27FC236}">
+                <a16:creationId xmlns:a16="http://schemas.microsoft.com/office/drawing/2014/main" id="{7802D93D-367B-424B-95C1-ADB089A3E93D}"/>
+              </a:ext>
+            </a:extLst>
+          </p:cNvPr>
+          <p:cNvSpPr>
+            <a:spLocks xmlns:a="http://schemas.openxmlformats.org/drawingml/2006/main" noGrp="1"/>
+          </p:cNvSpPr>
+          <p:nvPr/>
+        </p:nvSpPr>
+        <p:spPr>
+          <a:xfrm xmlns:a="http://schemas.openxmlformats.org/drawingml/2006/main">
+            <a:off x="6115050" y="3495675"/>
+            <a:ext cx="2381250" cy="361950"/>
+          </a:xfrm>
+          <a:prstGeom xmlns:a="http://schemas.openxmlformats.org/drawingml/2006/main" prst="rect">
+            <a:avLst/>
+          </a:prstGeom>
+          <a:noFill xmlns:a="http://schemas.openxmlformats.org/drawingml/2006/main"/>
+          <a:ln xmlns:a="http://schemas.openxmlformats.org/drawingml/2006/main" w="0">
+            <a:noFill/>
+          </a:ln>
+        </p:spPr>
+        <p:txBody>
+          <a:bodyPr xmlns:a="http://schemas.openxmlformats.org/drawingml/2006/main" lIns="0" tIns="0" rIns="0" bIns="0" anchor="ctr"/>
+          <a:lstStyle xmlns:a="http://schemas.openxmlformats.org/drawingml/2006/main">
+            <a:defPPr>
+              <a:defRPr sz="1575" b="0">
+                <a:solidFill>
+                  <a:srgbClr val="FFFFFF"/>
+                </a:solidFill>
+                <a:latin typeface="Aptos Mono"/>
+                <a:ea typeface="Aptos Mono"/>
+                <a:cs typeface="Aptos Mono"/>
+              </a:defRPr>
+            </a:defPPr>
+          </a:lstStyle>
+          <a:p xmlns:a="http://schemas.openxmlformats.org/drawingml/2006/main">
+            <a:pPr>
+              <a:defRPr sz="1575" b="0">
+                <a:solidFill>
+                  <a:srgbClr val="FFFFFF"/>
+                </a:solidFill>
+                <a:latin typeface="Aptos Mono"/>
+                <a:ea typeface="Aptos Mono"/>
+                <a:cs typeface="Aptos Mono"/>
+              </a:defRPr>
+            </a:pPr>
+            <a:r>
+              <a:rPr sz="1575" b="0">
+                <a:solidFill>
+                  <a:srgbClr val="FFFFFF"/>
+                </a:solidFill>
+                <a:latin typeface="Aptos Mono"/>
+                <a:ea typeface="Aptos Mono"/>
+                <a:cs typeface="Aptos Mono"/>
+              </a:rPr>
+              <a:t>31.250000</a:t>
+            </a:r>
+          </a:p>
+        </p:txBody>
+      </p:sp>
+      <p:sp>
+        <p:nvSpPr>
+          <p:cNvPr id="22" name="">
+            <a:extLst xmlns:a="http://schemas.openxmlformats.org/drawingml/2006/main">
+              <a:ext uri="{FF2B5EF4-FFF2-40B4-BE49-F238E27FC236}">
+                <a16:creationId xmlns:a16="http://schemas.microsoft.com/office/drawing/2014/main" id="{5367C954-3F9A-4A78-9747-1A3354FA60F3}"/>
+              </a:ext>
+            </a:extLst>
+          </p:cNvPr>
+          <p:cNvSpPr>
+            <a:spLocks xmlns:a="http://schemas.openxmlformats.org/drawingml/2006/main" noGrp="1"/>
+          </p:cNvSpPr>
+          <p:nvPr/>
+        </p:nvSpPr>
+        <p:spPr>
+          <a:xfrm xmlns:a="http://schemas.openxmlformats.org/drawingml/2006/main">
+            <a:off x="590550" y="3924300"/>
+            <a:ext cx="8096250" cy="409575"/>
+          </a:xfrm>
+          <a:prstGeom xmlns:a="http://schemas.openxmlformats.org/drawingml/2006/main" prst="rect">
+            <a:avLst/>
+          </a:prstGeom>
+          <a:solidFill xmlns:a="http://schemas.openxmlformats.org/drawingml/2006/main">
+            <a:srgbClr val="29292F"/>
+          </a:solidFill>
+          <a:ln xmlns:a="http://schemas.openxmlformats.org/drawingml/2006/main" w="0">
+            <a:noFill/>
+          </a:ln>
+        </p:spPr>
+      </p:sp>
+      <p:sp>
+        <p:nvSpPr>
+          <p:cNvPr id="23" name="">
+            <a:extLst xmlns:a="http://schemas.openxmlformats.org/drawingml/2006/main">
+              <a:ext uri="{FF2B5EF4-FFF2-40B4-BE49-F238E27FC236}">
+                <a16:creationId xmlns:a16="http://schemas.microsoft.com/office/drawing/2014/main" id="{88939A89-6B45-418C-A22E-1F23624EF546}"/>
+              </a:ext>
+            </a:extLst>
+          </p:cNvPr>
+          <p:cNvSpPr>
+            <a:spLocks xmlns:a="http://schemas.openxmlformats.org/drawingml/2006/main" noGrp="1"/>
+          </p:cNvSpPr>
+          <p:nvPr/>
+        </p:nvSpPr>
+        <p:spPr>
+          <a:xfrm xmlns:a="http://schemas.openxmlformats.org/drawingml/2006/main">
+            <a:off x="714375" y="3943350"/>
+            <a:ext cx="1238250" cy="361950"/>
+          </a:xfrm>
+          <a:prstGeom xmlns:a="http://schemas.openxmlformats.org/drawingml/2006/main" prst="rect">
+            <a:avLst/>
+          </a:prstGeom>
+          <a:noFill xmlns:a="http://schemas.openxmlformats.org/drawingml/2006/main"/>
+          <a:ln xmlns:a="http://schemas.openxmlformats.org/drawingml/2006/main" w="0">
+            <a:noFill/>
+          </a:ln>
+        </p:spPr>
+        <p:txBody>
+          <a:bodyPr xmlns:a="http://schemas.openxmlformats.org/drawingml/2006/main" lIns="0" tIns="0" rIns="0" bIns="0" anchor="ctr"/>
+          <a:lstStyle xmlns:a="http://schemas.openxmlformats.org/drawingml/2006/main">
+            <a:defPPr>
+              <a:defRPr sz="1800" b="1">
+                <a:solidFill>
+                  <a:srgbClr val="77E694"/>
+                </a:solidFill>
+                <a:latin typeface="Aptos Mono"/>
+                <a:ea typeface="Aptos Mono"/>
+                <a:cs typeface="Aptos Mono"/>
+              </a:defRPr>
+            </a:defPPr>
+          </a:lstStyle>
+          <a:p xmlns:a="http://schemas.openxmlformats.org/drawingml/2006/main">
+            <a:pPr>
+              <a:defRPr sz="1800" b="1">
+                <a:solidFill>
+                  <a:srgbClr val="77E694"/>
+                </a:solidFill>
+                <a:latin typeface="Aptos Mono"/>
+                <a:ea typeface="Aptos Mono"/>
+                <a:cs typeface="Aptos Mono"/>
+              </a:defRPr>
+            </a:pPr>
+            <a:r>
+              <a:rPr sz="1800" b="1">
+                <a:solidFill>
+                  <a:srgbClr val="77E694"/>
+                </a:solidFill>
+                <a:latin typeface="Aptos Mono"/>
+                <a:ea typeface="Aptos Mono"/>
+                <a:cs typeface="Aptos Mono"/>
+              </a:rPr>
+              <a:t>%.2f</a:t>
+            </a:r>
+          </a:p>
+        </p:txBody>
+      </p:sp>
+      <p:sp>
+        <p:nvSpPr>
+          <p:cNvPr id="24" name="">
+            <a:extLst xmlns:a="http://schemas.openxmlformats.org/drawingml/2006/main">
+              <a:ext uri="{FF2B5EF4-FFF2-40B4-BE49-F238E27FC236}">
+                <a16:creationId xmlns:a16="http://schemas.microsoft.com/office/drawing/2014/main" id="{E92FCC82-1462-4CE5-BB3D-B6D4ACD99C14}"/>
+              </a:ext>
+            </a:extLst>
+          </p:cNvPr>
+          <p:cNvSpPr>
+            <a:spLocks xmlns:a="http://schemas.openxmlformats.org/drawingml/2006/main" noGrp="1"/>
+          </p:cNvSpPr>
+          <p:nvPr/>
+        </p:nvSpPr>
+        <p:spPr>
+          <a:xfrm xmlns:a="http://schemas.openxmlformats.org/drawingml/2006/main">
+            <a:off x="2228850" y="3943350"/>
+            <a:ext cx="3714750" cy="361950"/>
+          </a:xfrm>
+          <a:prstGeom xmlns:a="http://schemas.openxmlformats.org/drawingml/2006/main" prst="rect">
+            <a:avLst/>
+          </a:prstGeom>
+          <a:noFill xmlns:a="http://schemas.openxmlformats.org/drawingml/2006/main"/>
+          <a:ln xmlns:a="http://schemas.openxmlformats.org/drawingml/2006/main" w="0">
+            <a:noFill/>
+          </a:ln>
+        </p:spPr>
+        <p:txBody>
+          <a:bodyPr xmlns:a="http://schemas.openxmlformats.org/drawingml/2006/main" lIns="0" tIns="0" rIns="0" bIns="0" anchor="ctr"/>
+          <a:lstStyle xmlns:a="http://schemas.openxmlformats.org/drawingml/2006/main">
+            <a:defPPr>
+              <a:defRPr sz="1575" b="0">
+                <a:solidFill>
+                  <a:srgbClr val="FFFFFF"/>
+                </a:solidFill>
+                <a:latin typeface="Arial"/>
+                <a:ea typeface="Arial"/>
+                <a:cs typeface="Arial"/>
+              </a:defRPr>
+            </a:defPPr>
+          </a:lstStyle>
+          <a:p xmlns:a="http://schemas.openxmlformats.org/drawingml/2006/main">
+            <a:pPr>
+              <a:defRPr sz="1575" b="0">
+                <a:solidFill>
+                  <a:srgbClr val="FFFFFF"/>
+                </a:solidFill>
+                <a:latin typeface="Arial"/>
+                <a:ea typeface="Arial"/>
+                <a:cs typeface="Arial"/>
+              </a:defRPr>
+            </a:pPr>
+            <a:r>
+              <a:rPr sz="1575" b="0">
+                <a:solidFill>
+                  <a:srgbClr val="FFFFFF"/>
+                </a:solidFill>
+                <a:latin typeface="Arial"/>
+                <a:ea typeface="Arial"/>
+                <a:cs typeface="Arial"/>
+              </a:rPr>
+              <a:t>double, 2 decimal places</a:t>
+            </a:r>
+          </a:p>
+        </p:txBody>
+      </p:sp>
+      <p:sp>
+        <p:nvSpPr>
+          <p:cNvPr id="25" name="">
+            <a:extLst xmlns:a="http://schemas.openxmlformats.org/drawingml/2006/main">
+              <a:ext uri="{FF2B5EF4-FFF2-40B4-BE49-F238E27FC236}">
+                <a16:creationId xmlns:a16="http://schemas.microsoft.com/office/drawing/2014/main" id="{E5B504A8-A3C4-4391-BE53-53D8C7AFC176}"/>
+              </a:ext>
+            </a:extLst>
+          </p:cNvPr>
+          <p:cNvSpPr>
+            <a:spLocks xmlns:a="http://schemas.openxmlformats.org/drawingml/2006/main" noGrp="1"/>
+          </p:cNvSpPr>
+          <p:nvPr/>
+        </p:nvSpPr>
+        <p:spPr>
+          <a:xfrm xmlns:a="http://schemas.openxmlformats.org/drawingml/2006/main">
+            <a:off x="6115050" y="3943350"/>
+            <a:ext cx="2381250" cy="361950"/>
+          </a:xfrm>
+          <a:prstGeom xmlns:a="http://schemas.openxmlformats.org/drawingml/2006/main" prst="rect">
+            <a:avLst/>
+          </a:prstGeom>
+          <a:noFill xmlns:a="http://schemas.openxmlformats.org/drawingml/2006/main"/>
+          <a:ln xmlns:a="http://schemas.openxmlformats.org/drawingml/2006/main" w="0">
+            <a:noFill/>
+          </a:ln>
+        </p:spPr>
+        <p:txBody>
+          <a:bodyPr xmlns:a="http://schemas.openxmlformats.org/drawingml/2006/main" lIns="0" tIns="0" rIns="0" bIns="0" anchor="ctr"/>
+          <a:lstStyle xmlns:a="http://schemas.openxmlformats.org/drawingml/2006/main">
+            <a:defPPr>
+              <a:defRPr sz="1575" b="0">
+                <a:solidFill>
+                  <a:srgbClr val="FFFFFF"/>
+                </a:solidFill>
+                <a:latin typeface="Aptos Mono"/>
+                <a:ea typeface="Aptos Mono"/>
+                <a:cs typeface="Aptos Mono"/>
+              </a:defRPr>
+            </a:defPPr>
+          </a:lstStyle>
+          <a:p xmlns:a="http://schemas.openxmlformats.org/drawingml/2006/main">
+            <a:pPr>
+              <a:defRPr sz="1575" b="0">
+                <a:solidFill>
+                  <a:srgbClr val="FFFFFF"/>
+                </a:solidFill>
+                <a:latin typeface="Aptos Mono"/>
+                <a:ea typeface="Aptos Mono"/>
+                <a:cs typeface="Aptos Mono"/>
+              </a:defRPr>
+            </a:pPr>
+            <a:r>
+              <a:rPr sz="1575" b="0">
+                <a:solidFill>
+                  <a:srgbClr val="FFFFFF"/>
+                </a:solidFill>
+                <a:latin typeface="Aptos Mono"/>
+                <a:ea typeface="Aptos Mono"/>
+                <a:cs typeface="Aptos Mono"/>
+              </a:rPr>
+              <a:t>31.25</a:t>
+            </a:r>
+          </a:p>
+        </p:txBody>
+      </p:sp>
+      <p:sp>
+        <p:nvSpPr>
+          <p:cNvPr id="26" name="">
+            <a:extLst xmlns:a="http://schemas.openxmlformats.org/drawingml/2006/main">
+              <a:ext uri="{FF2B5EF4-FFF2-40B4-BE49-F238E27FC236}">
+                <a16:creationId xmlns:a16="http://schemas.microsoft.com/office/drawing/2014/main" id="{D3149A6B-2357-4680-A37F-0A3832FC2BB9}"/>
+              </a:ext>
+            </a:extLst>
+          </p:cNvPr>
+          <p:cNvSpPr>
+            <a:spLocks xmlns:a="http://schemas.openxmlformats.org/drawingml/2006/main" noGrp="1"/>
+          </p:cNvSpPr>
+          <p:nvPr/>
+        </p:nvSpPr>
+        <p:spPr>
+          <a:xfrm xmlns:a="http://schemas.openxmlformats.org/drawingml/2006/main">
+            <a:off x="590550" y="4371975"/>
+            <a:ext cx="8096250" cy="409575"/>
+          </a:xfrm>
+          <a:prstGeom xmlns:a="http://schemas.openxmlformats.org/drawingml/2006/main" prst="rect">
+            <a:avLst/>
+          </a:prstGeom>
+          <a:solidFill xmlns:a="http://schemas.openxmlformats.org/drawingml/2006/main">
+            <a:srgbClr val="1E1E22"/>
+          </a:solidFill>
+          <a:ln xmlns:a="http://schemas.openxmlformats.org/drawingml/2006/main" w="0">
+            <a:noFill/>
+          </a:ln>
+        </p:spPr>
+      </p:sp>
+      <p:sp>
+        <p:nvSpPr>
+          <p:cNvPr id="27" name="">
+            <a:extLst xmlns:a="http://schemas.openxmlformats.org/drawingml/2006/main">
+              <a:ext uri="{FF2B5EF4-FFF2-40B4-BE49-F238E27FC236}">
+                <a16:creationId xmlns:a16="http://schemas.microsoft.com/office/drawing/2014/main" id="{05140CF5-7C8E-4D11-89F9-6BE3D87C1D06}"/>
+              </a:ext>
+            </a:extLst>
+          </p:cNvPr>
+          <p:cNvSpPr>
+            <a:spLocks xmlns:a="http://schemas.openxmlformats.org/drawingml/2006/main" noGrp="1"/>
+          </p:cNvSpPr>
+          <p:nvPr/>
+        </p:nvSpPr>
+        <p:spPr>
+          <a:xfrm xmlns:a="http://schemas.openxmlformats.org/drawingml/2006/main">
+            <a:off x="714375" y="4391025"/>
+            <a:ext cx="1238250" cy="361950"/>
+          </a:xfrm>
+          <a:prstGeom xmlns:a="http://schemas.openxmlformats.org/drawingml/2006/main" prst="rect">
+            <a:avLst/>
+          </a:prstGeom>
+          <a:noFill xmlns:a="http://schemas.openxmlformats.org/drawingml/2006/main"/>
+          <a:ln xmlns:a="http://schemas.openxmlformats.org/drawingml/2006/main" w="0">
+            <a:noFill/>
+          </a:ln>
+        </p:spPr>
+        <p:txBody>
+          <a:bodyPr xmlns:a="http://schemas.openxmlformats.org/drawingml/2006/main" lIns="0" tIns="0" rIns="0" bIns="0" anchor="ctr"/>
+          <a:lstStyle xmlns:a="http://schemas.openxmlformats.org/drawingml/2006/main">
+            <a:defPPr>
+              <a:defRPr sz="1800" b="1">
+                <a:solidFill>
+                  <a:srgbClr val="77E694"/>
+                </a:solidFill>
+                <a:latin typeface="Aptos Mono"/>
+                <a:ea typeface="Aptos Mono"/>
+                <a:cs typeface="Aptos Mono"/>
+              </a:defRPr>
+            </a:defPPr>
+          </a:lstStyle>
+          <a:p xmlns:a="http://schemas.openxmlformats.org/drawingml/2006/main">
+            <a:pPr>
+              <a:defRPr sz="1800" b="1">
+                <a:solidFill>
+                  <a:srgbClr val="77E694"/>
+                </a:solidFill>
+                <a:latin typeface="Aptos Mono"/>
+                <a:ea typeface="Aptos Mono"/>
+                <a:cs typeface="Aptos Mono"/>
+              </a:defRPr>
+            </a:pPr>
+            <a:r>
+              <a:rPr sz="1800" b="1">
+                <a:solidFill>
+                  <a:srgbClr val="77E694"/>
+                </a:solidFill>
+                <a:latin typeface="Aptos Mono"/>
+                <a:ea typeface="Aptos Mono"/>
+                <a:cs typeface="Aptos Mono"/>
+              </a:rPr>
+              <a:t>%%</a:t>
+            </a:r>
+          </a:p>
+        </p:txBody>
+      </p:sp>
+      <p:sp>
+        <p:nvSpPr>
+          <p:cNvPr id="28" name="">
+            <a:extLst xmlns:a="http://schemas.openxmlformats.org/drawingml/2006/main">
+              <a:ext uri="{FF2B5EF4-FFF2-40B4-BE49-F238E27FC236}">
+                <a16:creationId xmlns:a16="http://schemas.microsoft.com/office/drawing/2014/main" id="{DFE16358-D5FD-41C8-B1FF-A412E18439F2}"/>
+              </a:ext>
+            </a:extLst>
+          </p:cNvPr>
+          <p:cNvSpPr>
+            <a:spLocks xmlns:a="http://schemas.openxmlformats.org/drawingml/2006/main" noGrp="1"/>
+          </p:cNvSpPr>
+          <p:nvPr/>
+        </p:nvSpPr>
+        <p:spPr>
+          <a:xfrm xmlns:a="http://schemas.openxmlformats.org/drawingml/2006/main">
+            <a:off x="2228850" y="4391025"/>
+            <a:ext cx="3714750" cy="361950"/>
+          </a:xfrm>
+          <a:prstGeom xmlns:a="http://schemas.openxmlformats.org/drawingml/2006/main" prst="rect">
+            <a:avLst/>
+          </a:prstGeom>
+          <a:noFill xmlns:a="http://schemas.openxmlformats.org/drawingml/2006/main"/>
+          <a:ln xmlns:a="http://schemas.openxmlformats.org/drawingml/2006/main" w="0">
+            <a:noFill/>
+          </a:ln>
+        </p:spPr>
+        <p:txBody>
+          <a:bodyPr xmlns:a="http://schemas.openxmlformats.org/drawingml/2006/main" lIns="0" tIns="0" rIns="0" bIns="0" anchor="ctr"/>
+          <a:lstStyle xmlns:a="http://schemas.openxmlformats.org/drawingml/2006/main">
+            <a:defPPr>
+              <a:defRPr sz="1575" b="0">
+                <a:solidFill>
+                  <a:srgbClr val="FFFFFF"/>
+                </a:solidFill>
+                <a:latin typeface="Arial"/>
+                <a:ea typeface="Arial"/>
+                <a:cs typeface="Arial"/>
+              </a:defRPr>
+            </a:defPPr>
+          </a:lstStyle>
+          <a:p xmlns:a="http://schemas.openxmlformats.org/drawingml/2006/main">
+            <a:pPr>
+              <a:defRPr sz="1575" b="0">
+                <a:solidFill>
+                  <a:srgbClr val="FFFFFF"/>
+                </a:solidFill>
+                <a:latin typeface="Arial"/>
+                <a:ea typeface="Arial"/>
+                <a:cs typeface="Arial"/>
+              </a:defRPr>
+            </a:pPr>
+            <a:r>
+              <a:rPr sz="1575" b="0">
+                <a:solidFill>
+                  <a:srgbClr val="FFFFFF"/>
+                </a:solidFill>
+                <a:latin typeface="Arial"/>
+                <a:ea typeface="Arial"/>
+                <a:cs typeface="Arial"/>
+              </a:rPr>
+              <a:t>a literal %; no value needed</a:t>
+            </a:r>
+          </a:p>
+        </p:txBody>
+      </p:sp>
+      <p:sp>
+        <p:nvSpPr>
+          <p:cNvPr id="29" name="">
+            <a:extLst xmlns:a="http://schemas.openxmlformats.org/drawingml/2006/main">
+              <a:ext uri="{FF2B5EF4-FFF2-40B4-BE49-F238E27FC236}">
+                <a16:creationId xmlns:a16="http://schemas.microsoft.com/office/drawing/2014/main" id="{27F7AFEE-2B51-4C67-A518-BE3051E41815}"/>
+              </a:ext>
+            </a:extLst>
+          </p:cNvPr>
+          <p:cNvSpPr>
+            <a:spLocks xmlns:a="http://schemas.openxmlformats.org/drawingml/2006/main" noGrp="1"/>
+          </p:cNvSpPr>
+          <p:nvPr/>
+        </p:nvSpPr>
+        <p:spPr>
+          <a:xfrm xmlns:a="http://schemas.openxmlformats.org/drawingml/2006/main">
+            <a:off x="6115050" y="4391025"/>
+            <a:ext cx="2381250" cy="361950"/>
+          </a:xfrm>
+          <a:prstGeom xmlns:a="http://schemas.openxmlformats.org/drawingml/2006/main" prst="rect">
+            <a:avLst/>
+          </a:prstGeom>
+          <a:noFill xmlns:a="http://schemas.openxmlformats.org/drawingml/2006/main"/>
+          <a:ln xmlns:a="http://schemas.openxmlformats.org/drawingml/2006/main" w="0">
+            <a:noFill/>
+          </a:ln>
+        </p:spPr>
+        <p:txBody>
+          <a:bodyPr xmlns:a="http://schemas.openxmlformats.org/drawingml/2006/main" lIns="0" tIns="0" rIns="0" bIns="0" anchor="ctr"/>
+          <a:lstStyle xmlns:a="http://schemas.openxmlformats.org/drawingml/2006/main">
+            <a:defPPr>
+              <a:defRPr sz="1575" b="0">
+                <a:solidFill>
+                  <a:srgbClr val="FFFFFF"/>
+                </a:solidFill>
+                <a:latin typeface="Aptos Mono"/>
+                <a:ea typeface="Aptos Mono"/>
+                <a:cs typeface="Aptos Mono"/>
+              </a:defRPr>
+            </a:defPPr>
+          </a:lstStyle>
+          <a:p xmlns:a="http://schemas.openxmlformats.org/drawingml/2006/main">
+            <a:pPr>
+              <a:defRPr sz="1575" b="0">
+                <a:solidFill>
+                  <a:srgbClr val="FFFFFF"/>
+                </a:solidFill>
+                <a:latin typeface="Aptos Mono"/>
+                <a:ea typeface="Aptos Mono"/>
+                <a:cs typeface="Aptos Mono"/>
+              </a:defRPr>
+            </a:pPr>
+            <a:r>
+              <a:rPr sz="1575" b="0">
+                <a:solidFill>
+                  <a:srgbClr val="FFFFFF"/>
+                </a:solidFill>
+                <a:latin typeface="Aptos Mono"/>
+                <a:ea typeface="Aptos Mono"/>
+                <a:cs typeface="Aptos Mono"/>
+              </a:rPr>
+              <a:t>%</a:t>
+            </a:r>
+          </a:p>
+        </p:txBody>
+      </p:sp>
+      <p:sp>
+        <p:nvSpPr>
+          <p:cNvPr id="30" name="">
+            <a:extLst xmlns:a="http://schemas.openxmlformats.org/drawingml/2006/main">
+              <a:ext uri="{FF2B5EF4-FFF2-40B4-BE49-F238E27FC236}">
+                <a16:creationId xmlns:a16="http://schemas.microsoft.com/office/drawing/2014/main" id="{AC842D4D-00F4-476C-8C10-4F4ECF24CE42}"/>
+              </a:ext>
+            </a:extLst>
+          </p:cNvPr>
+          <p:cNvSpPr>
+            <a:spLocks xmlns:a="http://schemas.openxmlformats.org/drawingml/2006/main" noGrp="1"/>
+          </p:cNvSpPr>
+          <p:nvPr/>
+        </p:nvSpPr>
+        <p:spPr>
+          <a:xfrm xmlns:a="http://schemas.openxmlformats.org/drawingml/2006/main">
+            <a:off x="9096375" y="1847850"/>
+            <a:ext cx="2476500" cy="352425"/>
+          </a:xfrm>
+          <a:prstGeom xmlns:a="http://schemas.openxmlformats.org/drawingml/2006/main" prst="rect">
+            <a:avLst/>
+          </a:prstGeom>
+          <a:noFill xmlns:a="http://schemas.openxmlformats.org/drawingml/2006/main"/>
+          <a:ln xmlns:a="http://schemas.openxmlformats.org/drawingml/2006/main" w="0">
+            <a:noFill/>
+          </a:ln>
+        </p:spPr>
+        <p:txBody>
+          <a:bodyPr xmlns:a="http://schemas.openxmlformats.org/drawingml/2006/main" lIns="0" tIns="0" rIns="0" bIns="0" anchor="ctr"/>
+          <a:lstStyle xmlns:a="http://schemas.openxmlformats.org/drawingml/2006/main">
+            <a:defPPr>
+              <a:defRPr sz="2025" b="1">
+                <a:solidFill>
+                  <a:srgbClr val="77E694"/>
+                </a:solidFill>
+                <a:latin typeface="Georgia"/>
+                <a:ea typeface="Georgia"/>
+                <a:cs typeface="Georgia"/>
+              </a:defRPr>
+            </a:defPPr>
+          </a:lstStyle>
+          <a:p xmlns:a="http://schemas.openxmlformats.org/drawingml/2006/main">
+            <a:pPr>
+              <a:defRPr sz="2025" b="1">
+                <a:solidFill>
+                  <a:srgbClr val="77E694"/>
+                </a:solidFill>
+                <a:latin typeface="Georgia"/>
+                <a:ea typeface="Georgia"/>
+                <a:cs typeface="Georgia"/>
+              </a:defRPr>
+            </a:pPr>
+            <a:r>
+              <a:rPr sz="2025" b="1">
+                <a:solidFill>
+                  <a:srgbClr val="77E694"/>
+                </a:solidFill>
+                <a:latin typeface="Georgia"/>
+                <a:ea typeface="Georgia"/>
+                <a:cs typeface="Georgia"/>
+              </a:rPr>
+              <a:t>Three rules</a:t>
+            </a:r>
+          </a:p>
+        </p:txBody>
+      </p:sp>
+      <p:sp>
+        <p:nvSpPr>
+          <p:cNvPr id="31" name="">
+            <a:extLst xmlns:a="http://schemas.openxmlformats.org/drawingml/2006/main">
+              <a:ext uri="{FF2B5EF4-FFF2-40B4-BE49-F238E27FC236}">
+                <a16:creationId xmlns:a16="http://schemas.microsoft.com/office/drawing/2014/main" id="{38D8A116-A0BA-4096-96C3-72DB338338B9}"/>
+              </a:ext>
+            </a:extLst>
+          </p:cNvPr>
+          <p:cNvSpPr>
+            <a:spLocks xmlns:a="http://schemas.openxmlformats.org/drawingml/2006/main" noGrp="1"/>
+          </p:cNvSpPr>
+          <p:nvPr/>
+        </p:nvSpPr>
+        <p:spPr>
+          <a:xfrm xmlns:a="http://schemas.openxmlformats.org/drawingml/2006/main">
+            <a:off x="9096375" y="2324100"/>
+            <a:ext cx="2333625" cy="781050"/>
+          </a:xfrm>
+          <a:prstGeom xmlns:a="http://schemas.openxmlformats.org/drawingml/2006/main" prst="rect">
+            <a:avLst/>
+          </a:prstGeom>
+          <a:noFill xmlns:a="http://schemas.openxmlformats.org/drawingml/2006/main"/>
+          <a:ln xmlns:a="http://schemas.openxmlformats.org/drawingml/2006/main" w="0">
+            <a:noFill/>
+          </a:ln>
+        </p:spPr>
+        <p:txBody>
+          <a:bodyPr xmlns:a="http://schemas.openxmlformats.org/drawingml/2006/main" lIns="0" tIns="0" rIns="0" bIns="0" anchor="ctr"/>
+          <a:lstStyle xmlns:a="http://schemas.openxmlformats.org/drawingml/2006/main">
+            <a:defPPr>
+              <a:defRPr sz="1575" b="0">
+                <a:solidFill>
+                  <a:srgbClr val="FFFFFF"/>
+                </a:solidFill>
+                <a:latin typeface="Arial"/>
+                <a:ea typeface="Arial"/>
+                <a:cs typeface="Arial"/>
+              </a:defRPr>
+            </a:defPPr>
+          </a:lstStyle>
+          <a:p xmlns:a="http://schemas.openxmlformats.org/drawingml/2006/main">
+            <a:pPr>
+              <a:defRPr sz="1575" b="0">
+                <a:solidFill>
+                  <a:srgbClr val="FFFFFF"/>
+                </a:solidFill>
+                <a:latin typeface="Arial"/>
+                <a:ea typeface="Arial"/>
+                <a:cs typeface="Arial"/>
+              </a:defRPr>
+            </a:pPr>
+            <a:r>
+              <a:rPr sz="1575" b="0">
+                <a:solidFill>
+                  <a:srgbClr val="FFFFFF"/>
+                </a:solidFill>
+                <a:latin typeface="Arial"/>
+                <a:ea typeface="Arial"/>
+                <a:cs typeface="Arial"/>
+              </a:rPr>
+              <a:t>1  Values follow the format string in the same order.</a:t>
+            </a:r>
+          </a:p>
+        </p:txBody>
+      </p:sp>
+      <p:sp>
+        <p:nvSpPr>
+          <p:cNvPr id="32" name="">
+            <a:extLst xmlns:a="http://schemas.openxmlformats.org/drawingml/2006/main">
+              <a:ext uri="{FF2B5EF4-FFF2-40B4-BE49-F238E27FC236}">
+                <a16:creationId xmlns:a16="http://schemas.microsoft.com/office/drawing/2014/main" id="{D35E8A73-89A2-43E0-9809-B58EE7007CBF}"/>
+              </a:ext>
+            </a:extLst>
+          </p:cNvPr>
+          <p:cNvSpPr>
+            <a:spLocks xmlns:a="http://schemas.openxmlformats.org/drawingml/2006/main" noGrp="1"/>
+          </p:cNvSpPr>
+          <p:nvPr/>
+        </p:nvSpPr>
+        <p:spPr>
+          <a:xfrm xmlns:a="http://schemas.openxmlformats.org/drawingml/2006/main">
+            <a:off x="9096375" y="3190875"/>
+            <a:ext cx="2333625" cy="714375"/>
+          </a:xfrm>
+          <a:prstGeom xmlns:a="http://schemas.openxmlformats.org/drawingml/2006/main" prst="rect">
+            <a:avLst/>
+          </a:prstGeom>
+          <a:noFill xmlns:a="http://schemas.openxmlformats.org/drawingml/2006/main"/>
+          <a:ln xmlns:a="http://schemas.openxmlformats.org/drawingml/2006/main" w="0">
+            <a:noFill/>
+          </a:ln>
+        </p:spPr>
+        <p:txBody>
+          <a:bodyPr xmlns:a="http://schemas.openxmlformats.org/drawingml/2006/main" lIns="0" tIns="0" rIns="0" bIns="0" anchor="ctr"/>
+          <a:lstStyle xmlns:a="http://schemas.openxmlformats.org/drawingml/2006/main">
+            <a:defPPr>
+              <a:defRPr sz="1575" b="0">
+                <a:solidFill>
+                  <a:srgbClr val="FFFFFF"/>
+                </a:solidFill>
+                <a:latin typeface="Arial"/>
+                <a:ea typeface="Arial"/>
+                <a:cs typeface="Arial"/>
+              </a:defRPr>
+            </a:defPPr>
+          </a:lstStyle>
+          <a:p xmlns:a="http://schemas.openxmlformats.org/drawingml/2006/main">
+            <a:pPr>
+              <a:defRPr sz="1575" b="0">
+                <a:solidFill>
+                  <a:srgbClr val="FFFFFF"/>
+                </a:solidFill>
+                <a:latin typeface="Arial"/>
+                <a:ea typeface="Arial"/>
+                <a:cs typeface="Arial"/>
+              </a:defRPr>
+            </a:pPr>
+            <a:r>
+              <a:rPr sz="1575" b="0">
+                <a:solidFill>
+                  <a:srgbClr val="FFFFFF"/>
+                </a:solidFill>
+                <a:latin typeface="Arial"/>
+                <a:ea typeface="Arial"/>
+                <a:cs typeface="Arial"/>
+              </a:rPr>
+              <a:t>2  Match each code to its value type.</a:t>
+            </a:r>
+          </a:p>
+        </p:txBody>
+      </p:sp>
+      <p:sp>
+        <p:nvSpPr>
+          <p:cNvPr id="33" name="">
+            <a:extLst xmlns:a="http://schemas.openxmlformats.org/drawingml/2006/main">
+              <a:ext uri="{FF2B5EF4-FFF2-40B4-BE49-F238E27FC236}">
+                <a16:creationId xmlns:a16="http://schemas.microsoft.com/office/drawing/2014/main" id="{77C66BC1-1B8C-445A-AEA4-A55D7AF204CC}"/>
+              </a:ext>
+            </a:extLst>
+          </p:cNvPr>
+          <p:cNvSpPr>
+            <a:spLocks xmlns:a="http://schemas.openxmlformats.org/drawingml/2006/main" noGrp="1"/>
+          </p:cNvSpPr>
+          <p:nvPr/>
+        </p:nvSpPr>
+        <p:spPr>
+          <a:xfrm xmlns:a="http://schemas.openxmlformats.org/drawingml/2006/main">
+            <a:off x="9096375" y="4067175"/>
+            <a:ext cx="2333625" cy="742950"/>
+          </a:xfrm>
+          <a:prstGeom xmlns:a="http://schemas.openxmlformats.org/drawingml/2006/main" prst="rect">
+            <a:avLst/>
+          </a:prstGeom>
+          <a:noFill xmlns:a="http://schemas.openxmlformats.org/drawingml/2006/main"/>
+          <a:ln xmlns:a="http://schemas.openxmlformats.org/drawingml/2006/main" w="0">
+            <a:noFill/>
+          </a:ln>
+        </p:spPr>
+        <p:txBody>
+          <a:bodyPr xmlns:a="http://schemas.openxmlformats.org/drawingml/2006/main" lIns="0" tIns="0" rIns="0" bIns="0" anchor="ctr"/>
+          <a:lstStyle xmlns:a="http://schemas.openxmlformats.org/drawingml/2006/main">
+            <a:defPPr>
+              <a:defRPr sz="1575" b="0">
+                <a:solidFill>
+                  <a:srgbClr val="FFFFFF"/>
+                </a:solidFill>
+                <a:latin typeface="Arial"/>
+                <a:ea typeface="Arial"/>
+                <a:cs typeface="Arial"/>
+              </a:defRPr>
+            </a:defPPr>
+          </a:lstStyle>
+          <a:p xmlns:a="http://schemas.openxmlformats.org/drawingml/2006/main">
+            <a:pPr>
+              <a:defRPr sz="1575" b="0">
+                <a:solidFill>
+                  <a:srgbClr val="FFFFFF"/>
+                </a:solidFill>
+                <a:latin typeface="Arial"/>
+                <a:ea typeface="Arial"/>
+                <a:cs typeface="Arial"/>
+              </a:defRPr>
+            </a:pPr>
+            <a:r>
+              <a:rPr sz="1575" b="0">
+                <a:solidFill>
+                  <a:srgbClr val="FFFFFF"/>
+                </a:solidFill>
+                <a:latin typeface="Arial"/>
+                <a:ea typeface="Arial"/>
+                <a:cs typeface="Arial"/>
+              </a:rPr>
+              <a:t>3  %% prints one % and takes no value.</a:t>
+            </a:r>
+          </a:p>
+        </p:txBody>
+      </p:sp>
+      <p:sp>
+        <p:nvSpPr>
+          <p:cNvPr id="34" name="">
+            <a:extLst xmlns:a="http://schemas.openxmlformats.org/drawingml/2006/main">
+              <a:ext uri="{FF2B5EF4-FFF2-40B4-BE49-F238E27FC236}">
+                <a16:creationId xmlns:a16="http://schemas.microsoft.com/office/drawing/2014/main" id="{3AD85FB0-240E-47F0-821A-18538C7CFE32}"/>
+              </a:ext>
+            </a:extLst>
+          </p:cNvPr>
+          <p:cNvSpPr>
+            <a:spLocks xmlns:a="http://schemas.openxmlformats.org/drawingml/2006/main" noGrp="1"/>
+          </p:cNvSpPr>
+          <p:nvPr/>
+        </p:nvSpPr>
+        <p:spPr>
+          <a:xfrm xmlns:a="http://schemas.openxmlformats.org/drawingml/2006/main">
+            <a:off x="590550" y="5095875"/>
+            <a:ext cx="10953750" cy="695325"/>
+          </a:xfrm>
+          <a:prstGeom xmlns:a="http://schemas.openxmlformats.org/drawingml/2006/main" prst="rect">
+            <a:avLst/>
+          </a:prstGeom>
+          <a:solidFill xmlns:a="http://schemas.openxmlformats.org/drawingml/2006/main">
+            <a:srgbClr val="202A23"/>
+          </a:solidFill>
+          <a:ln xmlns:a="http://schemas.openxmlformats.org/drawingml/2006/main" w="9525">
+            <a:solidFill>
+              <a:srgbClr val="77E694"/>
+            </a:solidFill>
+          </a:ln>
+        </p:spPr>
+      </p:sp>
+      <p:sp>
+        <p:nvSpPr>
+          <p:cNvPr id="35" name="">
+            <a:extLst xmlns:a="http://schemas.openxmlformats.org/drawingml/2006/main">
+              <a:ext uri="{FF2B5EF4-FFF2-40B4-BE49-F238E27FC236}">
+                <a16:creationId xmlns:a16="http://schemas.microsoft.com/office/drawing/2014/main" id="{7A863458-4E8F-4789-AAC2-560025E91AE0}"/>
+              </a:ext>
+            </a:extLst>
+          </p:cNvPr>
+          <p:cNvSpPr>
+            <a:spLocks xmlns:a="http://schemas.openxmlformats.org/drawingml/2006/main" noGrp="1"/>
+          </p:cNvSpPr>
+          <p:nvPr/>
+        </p:nvSpPr>
+        <p:spPr>
+          <a:xfrm xmlns:a="http://schemas.openxmlformats.org/drawingml/2006/main">
+            <a:off x="762000" y="5191125"/>
+            <a:ext cx="10382250" cy="238125"/>
+          </a:xfrm>
+          <a:prstGeom xmlns:a="http://schemas.openxmlformats.org/drawingml/2006/main" prst="rect">
+            <a:avLst/>
+          </a:prstGeom>
+          <a:noFill xmlns:a="http://schemas.openxmlformats.org/drawingml/2006/main"/>
+          <a:ln xmlns:a="http://schemas.openxmlformats.org/drawingml/2006/main" w="0">
+            <a:noFill/>
+          </a:ln>
+        </p:spPr>
+        <p:txBody>
+          <a:bodyPr xmlns:a="http://schemas.openxmlformats.org/drawingml/2006/main" lIns="0" tIns="0" rIns="0" bIns="0" anchor="ctr"/>
+          <a:lstStyle xmlns:a="http://schemas.openxmlformats.org/drawingml/2006/main">
+            <a:defPPr>
+              <a:defRPr sz="1650" b="0">
+                <a:solidFill>
+                  <a:srgbClr val="FFFFFF"/>
+                </a:solidFill>
+                <a:latin typeface="Aptos Mono"/>
+                <a:ea typeface="Aptos Mono"/>
+                <a:cs typeface="Aptos Mono"/>
+              </a:defRPr>
+            </a:defPPr>
+          </a:lstStyle>
+          <a:p xmlns:a="http://schemas.openxmlformats.org/drawingml/2006/main">
+            <a:pPr>
+              <a:defRPr sz="1650" b="0">
+                <a:solidFill>
+                  <a:srgbClr val="FFFFFF"/>
+                </a:solidFill>
+                <a:latin typeface="Aptos Mono"/>
+                <a:ea typeface="Aptos Mono"/>
+                <a:cs typeface="Aptos Mono"/>
+              </a:defRPr>
+            </a:pPr>
+            <a:r>
+              <a:rPr sz="1650" b="0">
+                <a:solidFill>
+                  <a:srgbClr val="FFFFFF"/>
+                </a:solidFill>
+                <a:latin typeface="Aptos Mono"/>
+                <a:ea typeface="Aptos Mono"/>
+                <a:cs typeface="Aptos Mono"/>
+              </a:rPr>
+              <a:t>printf("%c: %.2f%%\n", route_code, percent_complete);</a:t>
+            </a:r>
+          </a:p>
+        </p:txBody>
+      </p:sp>
+      <p:sp>
+        <p:nvSpPr>
+          <p:cNvPr id="36" name="">
+            <a:extLst xmlns:a="http://schemas.openxmlformats.org/drawingml/2006/main">
+              <a:ext uri="{FF2B5EF4-FFF2-40B4-BE49-F238E27FC236}">
+                <a16:creationId xmlns:a16="http://schemas.microsoft.com/office/drawing/2014/main" id="{52A56240-C1B6-44B6-83D5-E729344EBBD3}"/>
+              </a:ext>
+            </a:extLst>
+          </p:cNvPr>
+          <p:cNvSpPr>
+            <a:spLocks xmlns:a="http://schemas.openxmlformats.org/drawingml/2006/main" noGrp="1"/>
+          </p:cNvSpPr>
+          <p:nvPr/>
+        </p:nvSpPr>
+        <p:spPr>
+          <a:xfrm xmlns:a="http://schemas.openxmlformats.org/drawingml/2006/main">
+            <a:off x="762000" y="5495925"/>
+            <a:ext cx="10382250" cy="228600"/>
+          </a:xfrm>
+          <a:prstGeom xmlns:a="http://schemas.openxmlformats.org/drawingml/2006/main" prst="rect">
+            <a:avLst/>
+          </a:prstGeom>
+          <a:noFill xmlns:a="http://schemas.openxmlformats.org/drawingml/2006/main"/>
+          <a:ln xmlns:a="http://schemas.openxmlformats.org/drawingml/2006/main" w="0">
+            <a:noFill/>
+          </a:ln>
+        </p:spPr>
+        <p:txBody>
+          <a:bodyPr xmlns:a="http://schemas.openxmlformats.org/drawingml/2006/main" lIns="0" tIns="0" rIns="0" bIns="0" anchor="ctr"/>
+          <a:lstStyle xmlns:a="http://schemas.openxmlformats.org/drawingml/2006/main">
+            <a:defPPr>
+              <a:defRPr sz="1350" b="0">
+                <a:solidFill>
+                  <a:srgbClr val="D9ECDD"/>
+                </a:solidFill>
+                <a:latin typeface="Arial"/>
+                <a:ea typeface="Arial"/>
+                <a:cs typeface="Arial"/>
+              </a:defRPr>
+            </a:defPPr>
+          </a:lstStyle>
+          <a:p xmlns:a="http://schemas.openxmlformats.org/drawingml/2006/main">
+            <a:pPr>
+              <a:defRPr sz="1350" b="0">
+                <a:solidFill>
+                  <a:srgbClr val="D9ECDD"/>
+                </a:solidFill>
+                <a:latin typeface="Arial"/>
+                <a:ea typeface="Arial"/>
+                <a:cs typeface="Arial"/>
+              </a:defRPr>
+            </a:pPr>
+            <a:r>
+              <a:rPr sz="1350" b="0">
+                <a:solidFill>
+                  <a:srgbClr val="D9ECDD"/>
+                </a:solidFill>
+                <a:latin typeface="Arial"/>
+                <a:ea typeface="Arial"/>
+                <a:cs typeface="Arial"/>
+              </a:rPr>
+              <a:t>If route_code = A and percent_complete = 31.25, output:  A: 31.25%</a:t>
+            </a:r>
+          </a:p>
+        </p:txBody>
+      </p:sp>
+      <p:sp>
+        <p:nvSpPr>
+          <p:cNvPr id="37" name="">
+            <a:extLst xmlns:a="http://schemas.openxmlformats.org/drawingml/2006/main">
+              <a:ext uri="{FF2B5EF4-FFF2-40B4-BE49-F238E27FC236}">
+                <a16:creationId xmlns:a16="http://schemas.microsoft.com/office/drawing/2014/main" id="{8F4817D8-96D3-4DDF-9A18-DC7C19933101}"/>
+              </a:ext>
+            </a:extLst>
+          </p:cNvPr>
+          <p:cNvSpPr>
+            <a:spLocks xmlns:a="http://schemas.openxmlformats.org/drawingml/2006/main" noGrp="1"/>
+          </p:cNvSpPr>
+          <p:nvPr/>
+        </p:nvSpPr>
+        <p:spPr>
+          <a:xfrm xmlns:a="http://schemas.openxmlformats.org/drawingml/2006/main">
+            <a:off x="590550" y="6134100"/>
+            <a:ext cx="5238750" cy="285750"/>
+          </a:xfrm>
+          <a:prstGeom xmlns:a="http://schemas.openxmlformats.org/drawingml/2006/main" prst="rect">
+            <a:avLst/>
+          </a:prstGeom>
+          <a:noFill xmlns:a="http://schemas.openxmlformats.org/drawingml/2006/main"/>
+          <a:ln xmlns:a="http://schemas.openxmlformats.org/drawingml/2006/main" w="0">
+            <a:noFill/>
+          </a:ln>
+        </p:spPr>
+        <p:txBody>
+          <a:bodyPr xmlns:a="http://schemas.openxmlformats.org/drawingml/2006/main" lIns="0" tIns="0" rIns="0" bIns="0" anchor="ctr"/>
+          <a:lstStyle xmlns:a="http://schemas.openxmlformats.org/drawingml/2006/main">
+            <a:defPPr>
+              <a:defRPr sz="1050" b="0">
+                <a:solidFill>
+                  <a:srgbClr val="B5B5B5"/>
+                </a:solidFill>
+                <a:latin typeface="Arial"/>
+                <a:ea typeface="Arial"/>
+                <a:cs typeface="Arial"/>
+              </a:defRPr>
+            </a:defPPr>
+          </a:lstStyle>
+          <a:p xmlns:a="http://schemas.openxmlformats.org/drawingml/2006/main">
+            <a:pPr>
+              <a:defRPr sz="1050" b="0">
+                <a:solidFill>
+                  <a:srgbClr val="B5B5B5"/>
+                </a:solidFill>
+                <a:latin typeface="Arial"/>
+                <a:ea typeface="Arial"/>
+                <a:cs typeface="Arial"/>
+              </a:defRPr>
+            </a:pPr>
+            <a:r>
+              <a:rPr sz="1050" b="0">
+                <a:solidFill>
+                  <a:srgbClr val="B5B5B5"/>
+                </a:solidFill>
+                <a:latin typeface="Arial"/>
+                <a:ea typeface="Arial"/>
+                <a:cs typeface="Arial"/>
+              </a:rPr>
+              <a:t>C FUNDAMENTALS  •  19</a:t>
+            </a:r>
+          </a:p>
+        </p:txBody>
+      </p:sp>
+      <p:sp>
+        <p:nvSpPr>
+          <p:cNvPr id="38" name="">
+            <a:extLst xmlns:a="http://schemas.openxmlformats.org/drawingml/2006/main">
+              <a:ext uri="{FF2B5EF4-FFF2-40B4-BE49-F238E27FC236}">
+                <a16:creationId xmlns:a16="http://schemas.microsoft.com/office/drawing/2014/main" id="{14E6B5DE-F762-42D3-AE70-4C3EBE861C62}"/>
+              </a:ext>
+            </a:extLst>
+          </p:cNvPr>
+          <p:cNvSpPr>
+            <a:spLocks xmlns:a="http://schemas.openxmlformats.org/drawingml/2006/main" noGrp="1"/>
+          </p:cNvSpPr>
+          <p:nvPr/>
+        </p:nvSpPr>
+        <p:spPr>
+          <a:xfrm xmlns:a="http://schemas.openxmlformats.org/drawingml/2006/main">
+            <a:off x="6419850" y="6134100"/>
+            <a:ext cx="5124450" cy="285750"/>
+          </a:xfrm>
+          <a:prstGeom xmlns:a="http://schemas.openxmlformats.org/drawingml/2006/main" prst="rect">
+            <a:avLst/>
+          </a:prstGeom>
+          <a:noFill xmlns:a="http://schemas.openxmlformats.org/drawingml/2006/main"/>
+          <a:ln xmlns:a="http://schemas.openxmlformats.org/drawingml/2006/main" w="0">
+            <a:noFill/>
+          </a:ln>
+        </p:spPr>
+        <p:txBody>
+          <a:bodyPr xmlns:a="http://schemas.openxmlformats.org/drawingml/2006/main" lIns="0" tIns="0" rIns="0" bIns="0" anchor="ctr"/>
+          <a:lstStyle xmlns:a="http://schemas.openxmlformats.org/drawingml/2006/main">
+            <a:defPPr>
+              <a:defRPr sz="1050" b="0">
+                <a:solidFill>
+                  <a:srgbClr val="B5B5B5"/>
+                </a:solidFill>
+                <a:latin typeface="Arial"/>
+                <a:ea typeface="Arial"/>
+                <a:cs typeface="Arial"/>
+              </a:defRPr>
+            </a:defPPr>
+          </a:lstStyle>
+          <a:p xmlns:a="http://schemas.openxmlformats.org/drawingml/2006/main">
+            <a:pPr>
+              <a:defRPr sz="1050" b="0">
+                <a:solidFill>
+                  <a:srgbClr val="B5B5B5"/>
+                </a:solidFill>
+                <a:latin typeface="Arial"/>
+                <a:ea typeface="Arial"/>
+                <a:cs typeface="Arial"/>
+              </a:defRPr>
+            </a:pPr>
+            <a:r>
+              <a:rPr sz="1050" b="0">
+                <a:solidFill>
+                  <a:srgbClr val="B5B5B5"/>
+                </a:solidFill>
+                <a:latin typeface="Arial"/>
+                <a:ea typeface="Arial"/>
+                <a:cs typeface="Arial"/>
+              </a:rPr>
+              <a:t>Try another: %u = unsigned int   •   %ld = long   •   %zu = size_t</a:t>
             </a:r>
           </a:p>
         </p:txBody>
@@ -9213,7 +11376,7 @@
     </p:spTree>
     <p:extLst>
       <p:ext uri="{BB962C8B-B14F-4D97-AF65-F5344CB8AC3E}">
-        <p14:creationId xmlns:p14="http://schemas.microsoft.com/office/powerpoint/2010/main" val="790313487"/>
+        <p14:creationId xmlns:p14="http://schemas.microsoft.com/office/powerpoint/2010/main" val="1836438415"/>
       </p:ext>
     </p:extLst>
   </p:cSld>
@@ -9285,6 +11448,7 @@
           </a:lstStyle>
           <a:p xmlns:a="http://schemas.openxmlformats.org/drawingml/2006/main">
             <a:pPr>
+              <a:buNone/>
               <a:defRPr sz="3675" b="1">
                 <a:solidFill>
                   <a:srgbClr val="FFFFFF"/>
@@ -9354,6 +11518,7 @@
           </a:lstStyle>
           <a:p xmlns:a="http://schemas.openxmlformats.org/drawingml/2006/main">
             <a:pPr>
+              <a:buNone/>
               <a:defRPr sz="1200" b="0">
                 <a:solidFill>
                   <a:srgbClr val="C8C8CC"/>
@@ -9423,6 +11588,7 @@
           </a:lstStyle>
           <a:p xmlns:a="http://schemas.openxmlformats.org/drawingml/2006/main">
             <a:pPr>
+              <a:buNone/>
               <a:defRPr sz="2850" b="1">
                 <a:solidFill>
                   <a:srgbClr val="F55A47"/>
@@ -9492,6 +11658,7 @@
           </a:lstStyle>
           <a:p xmlns:a="http://schemas.openxmlformats.org/drawingml/2006/main">
             <a:pPr>
+              <a:buNone/>
               <a:defRPr sz="2625" b="0">
                 <a:solidFill>
                   <a:srgbClr val="FFFFFF"/>
@@ -9561,6 +11728,7 @@
           </a:lstStyle>
           <a:p xmlns:a="http://schemas.openxmlformats.org/drawingml/2006/main">
             <a:pPr>
+              <a:buNone/>
               <a:defRPr sz="2775" b="1">
                 <a:solidFill>
                   <a:srgbClr val="7DDC93"/>
@@ -9618,7 +11786,7 @@
           <p:cNvPr id="6" name="">
             <a:extLst xmlns:a="http://schemas.openxmlformats.org/drawingml/2006/main">
               <a:ext uri="{FF2B5EF4-FFF2-40B4-BE49-F238E27FC236}">
-                <a16:creationId xmlns:a16="http://schemas.microsoft.com/office/drawing/2014/main" id="{AA91698D-89DF-4169-9D37-AE941D10DA83}"/>
+                <a16:creationId xmlns:a16="http://schemas.microsoft.com/office/drawing/2014/main" id="{96279E9E-B076-4661-BACE-1C8BAD9D2FDA}"/>
               </a:ext>
             </a:extLst>
           </p:cNvPr>
@@ -9659,6 +11827,7 @@
           </a:lstStyle>
           <a:p xmlns:a="http://schemas.openxmlformats.org/drawingml/2006/main">
             <a:pPr>
+              <a:buNone/>
               <a:defRPr sz="3675" b="1">
                 <a:solidFill>
                   <a:srgbClr val="FFFFFF"/>
@@ -9677,7 +11846,7 @@
                 <a:ea typeface="Georgia"/>
                 <a:cs typeface="Georgia"/>
               </a:rPr>
-              <a:t>C declarations are explicit</a:t>
+              <a:t>Type checks and conversions</a:t>
             </a:r>
           </a:p>
         </p:txBody>
@@ -9687,7 +11856,7 @@
           <p:cNvPr id="2" name="">
             <a:extLst xmlns:a="http://schemas.openxmlformats.org/drawingml/2006/main">
               <a:ext uri="{FF2B5EF4-FFF2-40B4-BE49-F238E27FC236}">
-                <a16:creationId xmlns:a16="http://schemas.microsoft.com/office/drawing/2014/main" id="{ED9AE09D-95E3-48DE-9356-F168F01E8458}"/>
+                <a16:creationId xmlns:a16="http://schemas.microsoft.com/office/drawing/2014/main" id="{E74F7F48-8660-4402-998D-A5EAC876CD36}"/>
               </a:ext>
             </a:extLst>
           </p:cNvPr>
@@ -9728,6 +11897,7 @@
           </a:lstStyle>
           <a:p xmlns:a="http://schemas.openxmlformats.org/drawingml/2006/main">
             <a:pPr>
+              <a:buNone/>
               <a:defRPr sz="1200" b="0">
                 <a:solidFill>
                   <a:srgbClr val="C8C8CC"/>
@@ -9756,19 +11926,19 @@
           <p:cNvPr id="3" name="">
             <a:extLst xmlns:a="http://schemas.openxmlformats.org/drawingml/2006/main">
               <a:ext uri="{FF2B5EF4-FFF2-40B4-BE49-F238E27FC236}">
-                <a16:creationId xmlns:a16="http://schemas.microsoft.com/office/drawing/2014/main" id="{5CC309B9-0638-471A-9654-8C8AB83E7220}"/>
-              </a:ext>
-            </a:extLst>
-          </p:cNvPr>
-          <p:cNvSpPr>
-            <a:spLocks xmlns:a="http://schemas.openxmlformats.org/drawingml/2006/main" noGrp="1"/>
-          </p:cNvSpPr>
-          <p:nvPr/>
-        </p:nvSpPr>
-        <p:spPr>
-          <a:xfrm xmlns:a="http://schemas.openxmlformats.org/drawingml/2006/main">
-            <a:off x="590550" y="2143125"/>
-            <a:ext cx="10953750" cy="2047875"/>
+                <a16:creationId xmlns:a16="http://schemas.microsoft.com/office/drawing/2014/main" id="{74BBA953-D845-4822-9E82-40AB9C4D89B2}"/>
+              </a:ext>
+            </a:extLst>
+          </p:cNvPr>
+          <p:cNvSpPr>
+            <a:spLocks xmlns:a="http://schemas.openxmlformats.org/drawingml/2006/main" noGrp="1"/>
+          </p:cNvSpPr>
+          <p:nvPr/>
+        </p:nvSpPr>
+        <p:spPr>
+          <a:xfrm xmlns:a="http://schemas.openxmlformats.org/drawingml/2006/main">
+            <a:off x="590550" y="2286000"/>
+            <a:ext cx="10953750" cy="1619250"/>
           </a:xfrm>
           <a:prstGeom xmlns:a="http://schemas.openxmlformats.org/drawingml/2006/main" prst="rect">
             <a:avLst/>
@@ -9787,134 +11957,19 @@
           <p:cNvPr id="4" name="">
             <a:extLst xmlns:a="http://schemas.openxmlformats.org/drawingml/2006/main">
               <a:ext uri="{FF2B5EF4-FFF2-40B4-BE49-F238E27FC236}">
-                <a16:creationId xmlns:a16="http://schemas.microsoft.com/office/drawing/2014/main" id="{2B3F3AC5-2784-44D6-AC15-83ED0E3D1716}"/>
-              </a:ext>
-            </a:extLst>
-          </p:cNvPr>
-          <p:cNvSpPr>
-            <a:spLocks xmlns:a="http://schemas.openxmlformats.org/drawingml/2006/main" noGrp="1"/>
-          </p:cNvSpPr>
-          <p:nvPr/>
-        </p:nvSpPr>
-        <p:spPr>
-          <a:xfrm xmlns:a="http://schemas.openxmlformats.org/drawingml/2006/main">
-            <a:off x="828675" y="2295525"/>
-            <a:ext cx="10477500" cy="1743075"/>
-          </a:xfrm>
-          <a:prstGeom xmlns:a="http://schemas.openxmlformats.org/drawingml/2006/main" prst="rect">
-            <a:avLst/>
-          </a:prstGeom>
-          <a:noFill xmlns:a="http://schemas.openxmlformats.org/drawingml/2006/main"/>
-          <a:ln xmlns:a="http://schemas.openxmlformats.org/drawingml/2006/main" w="0">
-            <a:noFill/>
-            <a:prstDash val="solid"/>
-          </a:ln>
-        </p:spPr>
-        <p:txBody>
-          <a:bodyPr xmlns:a="http://schemas.openxmlformats.org/drawingml/2006/main" wrap="square" lIns="0" tIns="0" rIns="0" bIns="0" anchor="ctr">
-            <a:noAutofit/>
-          </a:bodyPr>
-          <a:lstStyle xmlns:a="http://schemas.openxmlformats.org/drawingml/2006/main">
-            <a:defPPr>
-              <a:defRPr sz="2250" b="0">
-                <a:solidFill>
-                  <a:srgbClr val="FFFFFF"/>
-                </a:solidFill>
-                <a:latin typeface="Menlo"/>
-                <a:ea typeface="Menlo"/>
-                <a:cs typeface="Menlo"/>
-              </a:defRPr>
-            </a:defPPr>
-          </a:lstStyle>
-          <a:p xmlns:a="http://schemas.openxmlformats.org/drawingml/2006/main">
-            <a:pPr>
-              <a:defRPr sz="2250" b="0">
-                <a:solidFill>
-                  <a:srgbClr val="FFFFFF"/>
-                </a:solidFill>
-                <a:latin typeface="Menlo"/>
-                <a:ea typeface="Menlo"/>
-                <a:cs typeface="Menlo"/>
-              </a:defRPr>
-            </a:pPr>
-            <a:r>
-              <a:rPr sz="2250" b="0">
-                <a:solidFill>
-                  <a:srgbClr val="FFFFFF"/>
-                </a:solidFill>
-                <a:latin typeface="Menlo"/>
-                <a:ea typeface="Menlo"/>
-                <a:cs typeface="Menlo"/>
-              </a:rPr>
-              <a:t>int meters_walked = 250;</a:t>
-            </a:r>
-          </a:p>
-          <a:p xmlns:a="http://schemas.openxmlformats.org/drawingml/2006/main">
-            <a:pPr>
-              <a:defRPr sz="2250" b="0">
-                <a:solidFill>
-                  <a:srgbClr val="FFFFFF"/>
-                </a:solidFill>
-                <a:latin typeface="Menlo"/>
-                <a:ea typeface="Menlo"/>
-                <a:cs typeface="Menlo"/>
-              </a:defRPr>
-            </a:pPr>
-            <a:r>
-              <a:rPr sz="2250" b="0">
-                <a:solidFill>
-                  <a:srgbClr val="FFFFFF"/>
-                </a:solidFill>
-                <a:latin typeface="Menlo"/>
-                <a:ea typeface="Menlo"/>
-                <a:cs typeface="Menlo"/>
-              </a:rPr>
-              <a:t>double percent_complete = 31.25;</a:t>
-            </a:r>
-          </a:p>
-          <a:p xmlns:a="http://schemas.openxmlformats.org/drawingml/2006/main">
-            <a:pPr>
-              <a:defRPr sz="2250" b="0">
-                <a:solidFill>
-                  <a:srgbClr val="FFFFFF"/>
-                </a:solidFill>
-                <a:latin typeface="Menlo"/>
-                <a:ea typeface="Menlo"/>
-                <a:cs typeface="Menlo"/>
-              </a:defRPr>
-            </a:pPr>
-            <a:r>
-              <a:rPr sz="2250" b="0">
-                <a:solidFill>
-                  <a:srgbClr val="FFFFFF"/>
-                </a:solidFill>
-                <a:latin typeface="Menlo"/>
-                <a:ea typeface="Menlo"/>
-                <a:cs typeface="Menlo"/>
-              </a:rPr>
-              <a:t>char route_code = 'A';</a:t>
-            </a:r>
-          </a:p>
-        </p:txBody>
-      </p:sp>
-      <p:sp>
-        <p:nvSpPr>
-          <p:cNvPr id="5" name="">
-            <a:extLst xmlns:a="http://schemas.openxmlformats.org/drawingml/2006/main">
-              <a:ext uri="{FF2B5EF4-FFF2-40B4-BE49-F238E27FC236}">
-                <a16:creationId xmlns:a16="http://schemas.microsoft.com/office/drawing/2014/main" id="{9A4B81C7-4239-4013-8E25-2C82F1F38C6E}"/>
-              </a:ext>
-            </a:extLst>
-          </p:cNvPr>
-          <p:cNvSpPr>
-            <a:spLocks xmlns:a="http://schemas.openxmlformats.org/drawingml/2006/main" noGrp="1"/>
-          </p:cNvSpPr>
-          <p:nvPr/>
-        </p:nvSpPr>
-        <p:spPr>
-          <a:xfrm xmlns:a="http://schemas.openxmlformats.org/drawingml/2006/main">
-            <a:off x="590550" y="4762500"/>
-            <a:ext cx="10572750" cy="619125"/>
+                <a16:creationId xmlns:a16="http://schemas.microsoft.com/office/drawing/2014/main" id="{D66D0F95-53AC-4EF1-9E47-5635C026DCFC}"/>
+              </a:ext>
+            </a:extLst>
+          </p:cNvPr>
+          <p:cNvSpPr>
+            <a:spLocks xmlns:a="http://schemas.openxmlformats.org/drawingml/2006/main" noGrp="1"/>
+          </p:cNvSpPr>
+          <p:nvPr/>
+        </p:nvSpPr>
+        <p:spPr>
+          <a:xfrm xmlns:a="http://schemas.openxmlformats.org/drawingml/2006/main">
+            <a:off x="828675" y="2438400"/>
+            <a:ext cx="10477500" cy="1314450"/>
           </a:xfrm>
           <a:prstGeom xmlns:a="http://schemas.openxmlformats.org/drawingml/2006/main" prst="rect">
             <a:avLst/>
@@ -9933,7 +11988,7 @@
             <a:defPPr>
               <a:defRPr sz="2175" b="0">
                 <a:solidFill>
-                  <a:srgbClr val="7DDC93"/>
+                  <a:srgbClr val="FFFFFF"/>
                 </a:solidFill>
                 <a:latin typeface="Menlo"/>
                 <a:ea typeface="Menlo"/>
@@ -9943,9 +11998,10 @@
           </a:lstStyle>
           <a:p xmlns:a="http://schemas.openxmlformats.org/drawingml/2006/main">
             <a:pPr>
+              <a:buNone/>
               <a:defRPr sz="2175" b="0">
                 <a:solidFill>
-                  <a:srgbClr val="7DDC93"/>
+                  <a:srgbClr val="FFFFFF"/>
                 </a:solidFill>
                 <a:latin typeface="Menlo"/>
                 <a:ea typeface="Menlo"/>
@@ -9955,13 +12011,107 @@
             <a:r>
               <a:rPr sz="2175" b="0">
                 <a:solidFill>
-                  <a:srgbClr val="7DDC93"/>
-                </a:solidFill>
-                <a:latin typeface="Menlo"/>
-                <a:ea typeface="Menlo"/>
-                <a:cs typeface="Menlo"/>
-              </a:rPr>
-              <a:t>type     name     initial value</a:t>
+                  <a:srgbClr val="FFFFFF"/>
+                </a:solidFill>
+                <a:latin typeface="Menlo"/>
+                <a:ea typeface="Menlo"/>
+                <a:cs typeface="Menlo"/>
+              </a:rPr>
+              <a:t>double exact_percent = 31.25;</a:t>
+            </a:r>
+          </a:p>
+          <a:p xmlns:a="http://schemas.openxmlformats.org/drawingml/2006/main">
+            <a:pPr>
+              <a:buNone/>
+              <a:defRPr sz="2175" b="0">
+                <a:solidFill>
+                  <a:srgbClr val="FFFFFF"/>
+                </a:solidFill>
+                <a:latin typeface="Menlo"/>
+                <a:ea typeface="Menlo"/>
+                <a:cs typeface="Menlo"/>
+              </a:defRPr>
+            </a:pPr>
+            <a:r>
+              <a:rPr sz="2175" b="0">
+                <a:solidFill>
+                  <a:srgbClr val="FFFFFF"/>
+                </a:solidFill>
+                <a:latin typeface="Menlo"/>
+                <a:ea typeface="Menlo"/>
+                <a:cs typeface="Menlo"/>
+              </a:rPr>
+              <a:t>int percent_complete = exact_percent;  /* loses .25 */</a:t>
+            </a:r>
+          </a:p>
+        </p:txBody>
+      </p:sp>
+      <p:sp>
+        <p:nvSpPr>
+          <p:cNvPr id="5" name="">
+            <a:extLst xmlns:a="http://schemas.openxmlformats.org/drawingml/2006/main">
+              <a:ext uri="{FF2B5EF4-FFF2-40B4-BE49-F238E27FC236}">
+                <a16:creationId xmlns:a16="http://schemas.microsoft.com/office/drawing/2014/main" id="{03819087-EAE6-4D0F-9170-AB4009CB32B9}"/>
+              </a:ext>
+            </a:extLst>
+          </p:cNvPr>
+          <p:cNvSpPr>
+            <a:spLocks xmlns:a="http://schemas.openxmlformats.org/drawingml/2006/main" noGrp="1"/>
+          </p:cNvSpPr>
+          <p:nvPr/>
+        </p:nvSpPr>
+        <p:spPr>
+          <a:xfrm xmlns:a="http://schemas.openxmlformats.org/drawingml/2006/main">
+            <a:off x="590550" y="4667250"/>
+            <a:ext cx="10572750" cy="1000125"/>
+          </a:xfrm>
+          <a:prstGeom xmlns:a="http://schemas.openxmlformats.org/drawingml/2006/main" prst="rect">
+            <a:avLst/>
+          </a:prstGeom>
+          <a:noFill xmlns:a="http://schemas.openxmlformats.org/drawingml/2006/main"/>
+          <a:ln xmlns:a="http://schemas.openxmlformats.org/drawingml/2006/main" w="0">
+            <a:noFill/>
+            <a:prstDash val="solid"/>
+          </a:ln>
+        </p:spPr>
+        <p:txBody>
+          <a:bodyPr xmlns:a="http://schemas.openxmlformats.org/drawingml/2006/main" wrap="square" lIns="0" tIns="0" rIns="0" bIns="0" anchor="ctr">
+            <a:noAutofit/>
+          </a:bodyPr>
+          <a:lstStyle xmlns:a="http://schemas.openxmlformats.org/drawingml/2006/main">
+            <a:defPPr>
+              <a:defRPr sz="2400" b="1">
+                <a:solidFill>
+                  <a:srgbClr val="F55A47"/>
+                </a:solidFill>
+                <a:latin typeface="Georgia"/>
+                <a:ea typeface="Georgia"/>
+                <a:cs typeface="Georgia"/>
+              </a:defRPr>
+            </a:defPPr>
+          </a:lstStyle>
+          <a:p xmlns:a="http://schemas.openxmlformats.org/drawingml/2006/main">
+            <a:pPr>
+              <a:buNone/>
+              <a:defRPr sz="2400" b="1">
+                <a:solidFill>
+                  <a:srgbClr val="F55A47"/>
+                </a:solidFill>
+                <a:latin typeface="Georgia"/>
+                <a:ea typeface="Georgia"/>
+                <a:cs typeface="Georgia"/>
+              </a:defRPr>
+            </a:pPr>
+            <a:r>
+              <a:rPr sz="2400" b="1">
+                <a:solidFill>
+                  <a:srgbClr val="F55A47"/>
+                </a:solidFill>
+                <a:latin typeface="Georgia"/>
+                <a:ea typeface="Georgia"/>
+                <a:cs typeface="Georgia"/>
+              </a:rPr>
+              <a:t>C may allow conversion; read warnings and check the result.</a:t>
             </a:r>
           </a:p>
         </p:txBody>
@@ -9969,7 +12119,7 @@
     </p:spTree>
     <p:extLst>
       <p:ext uri="{BB962C8B-B14F-4D97-AF65-F5344CB8AC3E}">
-        <p14:creationId xmlns:p14="http://schemas.microsoft.com/office/powerpoint/2010/main" val="1526666098"/>
+        <p14:creationId xmlns:p14="http://schemas.microsoft.com/office/powerpoint/2010/main" val="790313487"/>
       </p:ext>
     </p:extLst>
   </p:cSld>
@@ -10000,7 +12150,7 @@
           <p:cNvPr id="6" name="">
             <a:extLst xmlns:a="http://schemas.openxmlformats.org/drawingml/2006/main">
               <a:ext uri="{FF2B5EF4-FFF2-40B4-BE49-F238E27FC236}">
-                <a16:creationId xmlns:a16="http://schemas.microsoft.com/office/drawing/2014/main" id="{44042A35-CEB8-4A89-8BDB-EC4CD1266911}"/>
+                <a16:creationId xmlns:a16="http://schemas.microsoft.com/office/drawing/2014/main" id="{AA91698D-89DF-4169-9D37-AE941D10DA83}"/>
               </a:ext>
             </a:extLst>
           </p:cNvPr>
@@ -10041,6 +12191,7 @@
           </a:lstStyle>
           <a:p xmlns:a="http://schemas.openxmlformats.org/drawingml/2006/main">
             <a:pPr>
+              <a:buNone/>
               <a:defRPr sz="3675" b="1">
                 <a:solidFill>
                   <a:srgbClr val="FFFFFF"/>
@@ -10059,7 +12210,7 @@
                 <a:ea typeface="Georgia"/>
                 <a:cs typeface="Georgia"/>
               </a:rPr>
-              <a:t>Initialize before reading</a:t>
+              <a:t>C declarations are explicit</a:t>
             </a:r>
           </a:p>
         </p:txBody>
@@ -10069,7 +12220,7 @@
           <p:cNvPr id="2" name="">
             <a:extLst xmlns:a="http://schemas.openxmlformats.org/drawingml/2006/main">
               <a:ext uri="{FF2B5EF4-FFF2-40B4-BE49-F238E27FC236}">
-                <a16:creationId xmlns:a16="http://schemas.microsoft.com/office/drawing/2014/main" id="{EB72815B-FB81-4C62-A234-98F86802F0E8}"/>
+                <a16:creationId xmlns:a16="http://schemas.microsoft.com/office/drawing/2014/main" id="{ED9AE09D-95E3-48DE-9356-F168F01E8458}"/>
               </a:ext>
             </a:extLst>
           </p:cNvPr>
@@ -10110,6 +12261,7 @@
           </a:lstStyle>
           <a:p xmlns:a="http://schemas.openxmlformats.org/drawingml/2006/main">
             <a:pPr>
+              <a:buNone/>
               <a:defRPr sz="1200" b="0">
                 <a:solidFill>
                   <a:srgbClr val="C8C8CC"/>
@@ -10138,19 +12290,19 @@
           <p:cNvPr id="3" name="">
             <a:extLst xmlns:a="http://schemas.openxmlformats.org/drawingml/2006/main">
               <a:ext uri="{FF2B5EF4-FFF2-40B4-BE49-F238E27FC236}">
-                <a16:creationId xmlns:a16="http://schemas.microsoft.com/office/drawing/2014/main" id="{FE5D100F-97D8-448B-9283-571E1C125EC9}"/>
-              </a:ext>
-            </a:extLst>
-          </p:cNvPr>
-          <p:cNvSpPr>
-            <a:spLocks xmlns:a="http://schemas.openxmlformats.org/drawingml/2006/main" noGrp="1"/>
-          </p:cNvSpPr>
-          <p:nvPr/>
-        </p:nvSpPr>
-        <p:spPr>
-          <a:xfrm xmlns:a="http://schemas.openxmlformats.org/drawingml/2006/main">
-            <a:off x="590550" y="1952625"/>
-            <a:ext cx="10953750" cy="2571750"/>
+                <a16:creationId xmlns:a16="http://schemas.microsoft.com/office/drawing/2014/main" id="{5CC309B9-0638-471A-9654-8C8AB83E7220}"/>
+              </a:ext>
+            </a:extLst>
+          </p:cNvPr>
+          <p:cNvSpPr>
+            <a:spLocks xmlns:a="http://schemas.openxmlformats.org/drawingml/2006/main" noGrp="1"/>
+          </p:cNvSpPr>
+          <p:nvPr/>
+        </p:nvSpPr>
+        <p:spPr>
+          <a:xfrm xmlns:a="http://schemas.openxmlformats.org/drawingml/2006/main">
+            <a:off x="590550" y="2143125"/>
+            <a:ext cx="10953750" cy="2047875"/>
           </a:xfrm>
           <a:prstGeom xmlns:a="http://schemas.openxmlformats.org/drawingml/2006/main" prst="rect">
             <a:avLst/>
@@ -10169,19 +12321,19 @@
           <p:cNvPr id="4" name="">
             <a:extLst xmlns:a="http://schemas.openxmlformats.org/drawingml/2006/main">
               <a:ext uri="{FF2B5EF4-FFF2-40B4-BE49-F238E27FC236}">
-                <a16:creationId xmlns:a16="http://schemas.microsoft.com/office/drawing/2014/main" id="{D22D5B23-0D09-4FA8-8F41-7D3F58D07E6C}"/>
-              </a:ext>
-            </a:extLst>
-          </p:cNvPr>
-          <p:cNvSpPr>
-            <a:spLocks xmlns:a="http://schemas.openxmlformats.org/drawingml/2006/main" noGrp="1"/>
-          </p:cNvSpPr>
-          <p:nvPr/>
-        </p:nvSpPr>
-        <p:spPr>
-          <a:xfrm xmlns:a="http://schemas.openxmlformats.org/drawingml/2006/main">
-            <a:off x="828675" y="2105025"/>
-            <a:ext cx="10477500" cy="2266950"/>
+                <a16:creationId xmlns:a16="http://schemas.microsoft.com/office/drawing/2014/main" id="{2B3F3AC5-2784-44D6-AC15-83ED0E3D1716}"/>
+              </a:ext>
+            </a:extLst>
+          </p:cNvPr>
+          <p:cNvSpPr>
+            <a:spLocks xmlns:a="http://schemas.openxmlformats.org/drawingml/2006/main" noGrp="1"/>
+          </p:cNvSpPr>
+          <p:nvPr/>
+        </p:nvSpPr>
+        <p:spPr>
+          <a:xfrm xmlns:a="http://schemas.openxmlformats.org/drawingml/2006/main">
+            <a:off x="828675" y="2295525"/>
+            <a:ext cx="10477500" cy="1743075"/>
           </a:xfrm>
           <a:prstGeom xmlns:a="http://schemas.openxmlformats.org/drawingml/2006/main" prst="rect">
             <a:avLst/>
@@ -10198,7 +12350,7 @@
           </a:bodyPr>
           <a:lstStyle xmlns:a="http://schemas.openxmlformats.org/drawingml/2006/main">
             <a:defPPr>
-              <a:defRPr sz="2025" b="0">
+              <a:defRPr sz="2250" b="0">
                 <a:solidFill>
                   <a:srgbClr val="FFFFFF"/>
                 </a:solidFill>
@@ -10210,99 +12362,74 @@
           </a:lstStyle>
           <a:p xmlns:a="http://schemas.openxmlformats.org/drawingml/2006/main">
             <a:pPr>
-              <a:defRPr sz="2025" b="0">
-                <a:solidFill>
-                  <a:srgbClr val="FFFFFF"/>
-                </a:solidFill>
-                <a:latin typeface="Menlo"/>
-                <a:ea typeface="Menlo"/>
-                <a:cs typeface="Menlo"/>
-              </a:defRPr>
-            </a:pPr>
-            <a:r>
-              <a:rPr sz="2025" b="0">
-                <a:solidFill>
-                  <a:srgbClr val="FFFFFF"/>
-                </a:solidFill>
-                <a:latin typeface="Menlo"/>
-                <a:ea typeface="Menlo"/>
-                <a:cs typeface="Menlo"/>
-              </a:rPr>
-              <a:t>int steps_today;</a:t>
-            </a:r>
-          </a:p>
-          <a:p xmlns:a="http://schemas.openxmlformats.org/drawingml/2006/main">
-            <a:pPr>
-              <a:defRPr sz="2025" b="0">
-                <a:solidFill>
-                  <a:srgbClr val="FFFFFF"/>
-                </a:solidFill>
-                <a:latin typeface="Menlo"/>
-                <a:ea typeface="Menlo"/>
-                <a:cs typeface="Menlo"/>
-              </a:defRPr>
-            </a:pPr>
-            <a:r>
-              <a:rPr sz="2025" b="0">
-                <a:solidFill>
-                  <a:srgbClr val="FFFFFF"/>
-                </a:solidFill>
-                <a:latin typeface="Menlo"/>
-                <a:ea typeface="Menlo"/>
-                <a:cs typeface="Menlo"/>
-              </a:rPr>
-              <a:t>/* Do not read steps_today here. */</a:t>
-            </a:r>
-          </a:p>
-          <a:p xmlns:a="http://schemas.openxmlformats.org/drawingml/2006/main">
-            <a:r>
-              <a:t/>
-            </a:r>
-          </a:p>
-          <a:p xmlns:a="http://schemas.openxmlformats.org/drawingml/2006/main">
-            <a:pPr>
-              <a:defRPr sz="2025" b="0">
-                <a:solidFill>
-                  <a:srgbClr val="FFFFFF"/>
-                </a:solidFill>
-                <a:latin typeface="Menlo"/>
-                <a:ea typeface="Menlo"/>
-                <a:cs typeface="Menlo"/>
-              </a:defRPr>
-            </a:pPr>
-            <a:r>
-              <a:rPr sz="2025" b="0">
-                <a:solidFill>
-                  <a:srgbClr val="FFFFFF"/>
-                </a:solidFill>
-                <a:latin typeface="Menlo"/>
-                <a:ea typeface="Menlo"/>
-                <a:cs typeface="Menlo"/>
-              </a:rPr>
-              <a:t>int safe_steps_today = 0;</a:t>
-            </a:r>
-          </a:p>
-          <a:p xmlns:a="http://schemas.openxmlformats.org/drawingml/2006/main">
-            <a:pPr>
-              <a:defRPr sz="2025" b="0">
-                <a:solidFill>
-                  <a:srgbClr val="FFFFFF"/>
-                </a:solidFill>
-                <a:latin typeface="Menlo"/>
-                <a:ea typeface="Menlo"/>
-                <a:cs typeface="Menlo"/>
-              </a:defRPr>
-            </a:pPr>
-            <a:r>
-              <a:rPr sz="2025" b="0">
-                <a:solidFill>
-                  <a:srgbClr val="FFFFFF"/>
-                </a:solidFill>
-                <a:latin typeface="Menlo"/>
-                <a:ea typeface="Menlo"/>
-                <a:cs typeface="Menlo"/>
-              </a:rPr>
-              <a:t>printf("%d\n", safe_steps_today);</a:t>
+              <a:buNone/>
+              <a:defRPr sz="2250" b="0">
+                <a:solidFill>
+                  <a:srgbClr val="FFFFFF"/>
+                </a:solidFill>
+                <a:latin typeface="Menlo"/>
+                <a:ea typeface="Menlo"/>
+                <a:cs typeface="Menlo"/>
+              </a:defRPr>
+            </a:pPr>
+            <a:r>
+              <a:rPr sz="2250" b="0">
+                <a:solidFill>
+                  <a:srgbClr val="FFFFFF"/>
+                </a:solidFill>
+                <a:latin typeface="Menlo"/>
+                <a:ea typeface="Menlo"/>
+                <a:cs typeface="Menlo"/>
+              </a:rPr>
+              <a:t>int meters_walked = 250;</a:t>
+            </a:r>
+          </a:p>
+          <a:p xmlns:a="http://schemas.openxmlformats.org/drawingml/2006/main">
+            <a:pPr>
+              <a:buNone/>
+              <a:defRPr sz="2250" b="0">
+                <a:solidFill>
+                  <a:srgbClr val="FFFFFF"/>
+                </a:solidFill>
+                <a:latin typeface="Menlo"/>
+                <a:ea typeface="Menlo"/>
+                <a:cs typeface="Menlo"/>
+              </a:defRPr>
+            </a:pPr>
+            <a:r>
+              <a:rPr sz="2250" b="0">
+                <a:solidFill>
+                  <a:srgbClr val="FFFFFF"/>
+                </a:solidFill>
+                <a:latin typeface="Menlo"/>
+                <a:ea typeface="Menlo"/>
+                <a:cs typeface="Menlo"/>
+              </a:rPr>
+              <a:t>double percent_complete = 31.25;</a:t>
+            </a:r>
+          </a:p>
+          <a:p xmlns:a="http://schemas.openxmlformats.org/drawingml/2006/main">
+            <a:pPr>
+              <a:buNone/>
+              <a:defRPr sz="2250" b="0">
+                <a:solidFill>
+                  <a:srgbClr val="FFFFFF"/>
+                </a:solidFill>
+                <a:latin typeface="Menlo"/>
+                <a:ea typeface="Menlo"/>
+                <a:cs typeface="Menlo"/>
+              </a:defRPr>
+            </a:pPr>
+            <a:r>
+              <a:rPr sz="2250" b="0">
+                <a:solidFill>
+                  <a:srgbClr val="FFFFFF"/>
+                </a:solidFill>
+                <a:latin typeface="Menlo"/>
+                <a:ea typeface="Menlo"/>
+                <a:cs typeface="Menlo"/>
+              </a:rPr>
+              <a:t>char route_code = 'A';</a:t>
             </a:r>
           </a:p>
         </p:txBody>
@@ -10312,19 +12439,19 @@
           <p:cNvPr id="5" name="">
             <a:extLst xmlns:a="http://schemas.openxmlformats.org/drawingml/2006/main">
               <a:ext uri="{FF2B5EF4-FFF2-40B4-BE49-F238E27FC236}">
-                <a16:creationId xmlns:a16="http://schemas.microsoft.com/office/drawing/2014/main" id="{02A69BEC-29FE-425B-8958-BA5A05773F4C}"/>
-              </a:ext>
-            </a:extLst>
-          </p:cNvPr>
-          <p:cNvSpPr>
-            <a:spLocks xmlns:a="http://schemas.openxmlformats.org/drawingml/2006/main" noGrp="1"/>
-          </p:cNvSpPr>
-          <p:nvPr/>
-        </p:nvSpPr>
-        <p:spPr>
-          <a:xfrm xmlns:a="http://schemas.openxmlformats.org/drawingml/2006/main">
-            <a:off x="590550" y="5048250"/>
-            <a:ext cx="10572750" cy="714375"/>
+                <a16:creationId xmlns:a16="http://schemas.microsoft.com/office/drawing/2014/main" id="{9A4B81C7-4239-4013-8E25-2C82F1F38C6E}"/>
+              </a:ext>
+            </a:extLst>
+          </p:cNvPr>
+          <p:cNvSpPr>
+            <a:spLocks xmlns:a="http://schemas.openxmlformats.org/drawingml/2006/main" noGrp="1"/>
+          </p:cNvSpPr>
+          <p:nvPr/>
+        </p:nvSpPr>
+        <p:spPr>
+          <a:xfrm xmlns:a="http://schemas.openxmlformats.org/drawingml/2006/main">
+            <a:off x="590550" y="4762500"/>
+            <a:ext cx="10572750" cy="619125"/>
           </a:xfrm>
           <a:prstGeom xmlns:a="http://schemas.openxmlformats.org/drawingml/2006/main" prst="rect">
             <a:avLst/>
@@ -10341,37 +12468,38 @@
           </a:bodyPr>
           <a:lstStyle xmlns:a="http://schemas.openxmlformats.org/drawingml/2006/main">
             <a:defPPr>
-              <a:defRPr sz="2325" b="1">
-                <a:solidFill>
-                  <a:srgbClr val="F55A47"/>
-                </a:solidFill>
-                <a:latin typeface="Georgia"/>
-                <a:ea typeface="Georgia"/>
-                <a:cs typeface="Georgia"/>
+              <a:defRPr sz="2175" b="0">
+                <a:solidFill>
+                  <a:srgbClr val="7DDC93"/>
+                </a:solidFill>
+                <a:latin typeface="Menlo"/>
+                <a:ea typeface="Menlo"/>
+                <a:cs typeface="Menlo"/>
               </a:defRPr>
             </a:defPPr>
           </a:lstStyle>
           <a:p xmlns:a="http://schemas.openxmlformats.org/drawingml/2006/main">
             <a:pPr>
-              <a:defRPr sz="2325" b="1">
-                <a:solidFill>
-                  <a:srgbClr val="F55A47"/>
-                </a:solidFill>
-                <a:latin typeface="Georgia"/>
-                <a:ea typeface="Georgia"/>
-                <a:cs typeface="Georgia"/>
-              </a:defRPr>
-            </a:pPr>
-            <a:r>
-              <a:rPr sz="2325" b="1">
-                <a:solidFill>
-                  <a:srgbClr val="F55A47"/>
-                </a:solidFill>
-                <a:latin typeface="Georgia"/>
-                <a:ea typeface="Georgia"/>
-                <a:cs typeface="Georgia"/>
-              </a:rPr>
-              <a:t>A local value must be assigned before it is read.</a:t>
+              <a:buNone/>
+              <a:defRPr sz="2175" b="0">
+                <a:solidFill>
+                  <a:srgbClr val="7DDC93"/>
+                </a:solidFill>
+                <a:latin typeface="Menlo"/>
+                <a:ea typeface="Menlo"/>
+                <a:cs typeface="Menlo"/>
+              </a:defRPr>
+            </a:pPr>
+            <a:r>
+              <a:rPr sz="2175" b="0">
+                <a:solidFill>
+                  <a:srgbClr val="7DDC93"/>
+                </a:solidFill>
+                <a:latin typeface="Menlo"/>
+                <a:ea typeface="Menlo"/>
+                <a:cs typeface="Menlo"/>
+              </a:rPr>
+              <a:t>type     name     initial value</a:t>
             </a:r>
           </a:p>
         </p:txBody>
@@ -10379,7 +12507,7 @@
     </p:spTree>
     <p:extLst>
       <p:ext uri="{BB962C8B-B14F-4D97-AF65-F5344CB8AC3E}">
-        <p14:creationId xmlns:p14="http://schemas.microsoft.com/office/powerpoint/2010/main" val="546718634"/>
+        <p14:creationId xmlns:p14="http://schemas.microsoft.com/office/powerpoint/2010/main" val="1526666098"/>
       </p:ext>
     </p:extLst>
   </p:cSld>
@@ -10410,7 +12538,7 @@
           <p:cNvPr id="6" name="">
             <a:extLst xmlns:a="http://schemas.openxmlformats.org/drawingml/2006/main">
               <a:ext uri="{FF2B5EF4-FFF2-40B4-BE49-F238E27FC236}">
-                <a16:creationId xmlns:a16="http://schemas.microsoft.com/office/drawing/2014/main" id="{F3E74F87-62A5-4B72-9C01-392451DF905F}"/>
+                <a16:creationId xmlns:a16="http://schemas.microsoft.com/office/drawing/2014/main" id="{44042A35-CEB8-4A89-8BDB-EC4CD1266911}"/>
               </a:ext>
             </a:extLst>
           </p:cNvPr>
@@ -10451,6 +12579,7 @@
           </a:lstStyle>
           <a:p xmlns:a="http://schemas.openxmlformats.org/drawingml/2006/main">
             <a:pPr>
+              <a:buNone/>
               <a:defRPr sz="3675" b="1">
                 <a:solidFill>
                   <a:srgbClr val="FFFFFF"/>
@@ -10469,7 +12598,7 @@
                 <a:ea typeface="Georgia"/>
                 <a:cs typeface="Georgia"/>
               </a:rPr>
-              <a:t>Calculate percent complete</a:t>
+              <a:t>Initialize before reading</a:t>
             </a:r>
           </a:p>
         </p:txBody>
@@ -10479,7 +12608,7 @@
           <p:cNvPr id="2" name="">
             <a:extLst xmlns:a="http://schemas.openxmlformats.org/drawingml/2006/main">
               <a:ext uri="{FF2B5EF4-FFF2-40B4-BE49-F238E27FC236}">
-                <a16:creationId xmlns:a16="http://schemas.microsoft.com/office/drawing/2014/main" id="{D28EA172-358D-4AFF-B95C-50E422303183}"/>
+                <a16:creationId xmlns:a16="http://schemas.microsoft.com/office/drawing/2014/main" id="{EB72815B-FB81-4C62-A234-98F86802F0E8}"/>
               </a:ext>
             </a:extLst>
           </p:cNvPr>
@@ -10520,6 +12649,7 @@
           </a:lstStyle>
           <a:p xmlns:a="http://schemas.openxmlformats.org/drawingml/2006/main">
             <a:pPr>
+              <a:buNone/>
               <a:defRPr sz="1200" b="0">
                 <a:solidFill>
                   <a:srgbClr val="C8C8CC"/>
@@ -10548,19 +12678,19 @@
           <p:cNvPr id="3" name="">
             <a:extLst xmlns:a="http://schemas.openxmlformats.org/drawingml/2006/main">
               <a:ext uri="{FF2B5EF4-FFF2-40B4-BE49-F238E27FC236}">
-                <a16:creationId xmlns:a16="http://schemas.microsoft.com/office/drawing/2014/main" id="{0CC8CE58-B03F-47FD-879F-82FBF88F8607}"/>
-              </a:ext>
-            </a:extLst>
-          </p:cNvPr>
-          <p:cNvSpPr>
-            <a:spLocks xmlns:a="http://schemas.openxmlformats.org/drawingml/2006/main" noGrp="1"/>
-          </p:cNvSpPr>
-          <p:nvPr/>
-        </p:nvSpPr>
-        <p:spPr>
-          <a:xfrm xmlns:a="http://schemas.openxmlformats.org/drawingml/2006/main">
-            <a:off x="590550" y="1981200"/>
-            <a:ext cx="10953750" cy="2286000"/>
+                <a16:creationId xmlns:a16="http://schemas.microsoft.com/office/drawing/2014/main" id="{FE5D100F-97D8-448B-9283-571E1C125EC9}"/>
+              </a:ext>
+            </a:extLst>
+          </p:cNvPr>
+          <p:cNvSpPr>
+            <a:spLocks xmlns:a="http://schemas.openxmlformats.org/drawingml/2006/main" noGrp="1"/>
+          </p:cNvSpPr>
+          <p:nvPr/>
+        </p:nvSpPr>
+        <p:spPr>
+          <a:xfrm xmlns:a="http://schemas.openxmlformats.org/drawingml/2006/main">
+            <a:off x="590550" y="1952625"/>
+            <a:ext cx="10953750" cy="2571750"/>
           </a:xfrm>
           <a:prstGeom xmlns:a="http://schemas.openxmlformats.org/drawingml/2006/main" prst="rect">
             <a:avLst/>
@@ -10579,19 +12709,19 @@
           <p:cNvPr id="4" name="">
             <a:extLst xmlns:a="http://schemas.openxmlformats.org/drawingml/2006/main">
               <a:ext uri="{FF2B5EF4-FFF2-40B4-BE49-F238E27FC236}">
-                <a16:creationId xmlns:a16="http://schemas.microsoft.com/office/drawing/2014/main" id="{375DB62D-89B7-4F2E-B211-0E67CC3F0A56}"/>
-              </a:ext>
-            </a:extLst>
-          </p:cNvPr>
-          <p:cNvSpPr>
-            <a:spLocks xmlns:a="http://schemas.openxmlformats.org/drawingml/2006/main" noGrp="1"/>
-          </p:cNvSpPr>
-          <p:nvPr/>
-        </p:nvSpPr>
-        <p:spPr>
-          <a:xfrm xmlns:a="http://schemas.openxmlformats.org/drawingml/2006/main">
-            <a:off x="828675" y="2133600"/>
-            <a:ext cx="10477500" cy="1981200"/>
+                <a16:creationId xmlns:a16="http://schemas.microsoft.com/office/drawing/2014/main" id="{D22D5B23-0D09-4FA8-8F41-7D3F58D07E6C}"/>
+              </a:ext>
+            </a:extLst>
+          </p:cNvPr>
+          <p:cNvSpPr>
+            <a:spLocks xmlns:a="http://schemas.openxmlformats.org/drawingml/2006/main" noGrp="1"/>
+          </p:cNvSpPr>
+          <p:nvPr/>
+        </p:nvSpPr>
+        <p:spPr>
+          <a:xfrm xmlns:a="http://schemas.openxmlformats.org/drawingml/2006/main">
+            <a:off x="828675" y="2105025"/>
+            <a:ext cx="10477500" cy="2266950"/>
           </a:xfrm>
           <a:prstGeom xmlns:a="http://schemas.openxmlformats.org/drawingml/2006/main" prst="rect">
             <a:avLst/>
@@ -10620,6 +12750,7 @@
           </a:lstStyle>
           <a:p xmlns:a="http://schemas.openxmlformats.org/drawingml/2006/main">
             <a:pPr>
+              <a:buNone/>
               <a:defRPr sz="2025" b="0">
                 <a:solidFill>
                   <a:srgbClr val="FFFFFF"/>
@@ -10638,11 +12769,12 @@
                 <a:ea typeface="Menlo"/>
                 <a:cs typeface="Menlo"/>
               </a:rPr>
-              <a:t>double percent_complete =</a:t>
-            </a:r>
-          </a:p>
-          <a:p xmlns:a="http://schemas.openxmlformats.org/drawingml/2006/main">
-            <a:pPr>
+              <a:t>int steps_today;</a:t>
+            </a:r>
+          </a:p>
+          <a:p xmlns:a="http://schemas.openxmlformats.org/drawingml/2006/main">
+            <a:pPr>
+              <a:buNone/>
               <a:defRPr sz="2025" b="0">
                 <a:solidFill>
                   <a:srgbClr val="FFFFFF"/>
@@ -10661,11 +12793,17 @@
                 <a:ea typeface="Menlo"/>
                 <a:cs typeface="Menlo"/>
               </a:rPr>
-              <a:t>    (double) meters_walked * 100.0 / route_meters;</a:t>
-            </a:r>
-          </a:p>
-          <a:p xmlns:a="http://schemas.openxmlformats.org/drawingml/2006/main">
-            <a:pPr>
+              <a:t>/* Do not read steps_today here. */</a:t>
+            </a:r>
+          </a:p>
+          <a:p xmlns:a="http://schemas.openxmlformats.org/drawingml/2006/main">
+            <a:r>
+              <a:t/>
+            </a:r>
+          </a:p>
+          <a:p xmlns:a="http://schemas.openxmlformats.org/drawingml/2006/main">
+            <a:pPr>
+              <a:buNone/>
               <a:defRPr sz="2025" b="0">
                 <a:solidFill>
                   <a:srgbClr val="FFFFFF"/>
@@ -10684,7 +12822,31 @@
                 <a:ea typeface="Menlo"/>
                 <a:cs typeface="Menlo"/>
               </a:rPr>
-              <a:t>printf("Completed: %.2f%%\n", percent_complete);</a:t>
+              <a:t>int safe_steps_today = 0;</a:t>
+            </a:r>
+          </a:p>
+          <a:p xmlns:a="http://schemas.openxmlformats.org/drawingml/2006/main">
+            <a:pPr>
+              <a:buNone/>
+              <a:defRPr sz="2025" b="0">
+                <a:solidFill>
+                  <a:srgbClr val="FFFFFF"/>
+                </a:solidFill>
+                <a:latin typeface="Menlo"/>
+                <a:ea typeface="Menlo"/>
+                <a:cs typeface="Menlo"/>
+              </a:defRPr>
+            </a:pPr>
+            <a:r>
+              <a:rPr sz="2025" b="0">
+                <a:solidFill>
+                  <a:srgbClr val="FFFFFF"/>
+                </a:solidFill>
+                <a:latin typeface="Menlo"/>
+                <a:ea typeface="Menlo"/>
+                <a:cs typeface="Menlo"/>
+              </a:rPr>
+              <a:t>printf("%d\n", safe_steps_today);</a:t>
             </a:r>
           </a:p>
         </p:txBody>
@@ -10694,19 +12856,19 @@
           <p:cNvPr id="5" name="">
             <a:extLst xmlns:a="http://schemas.openxmlformats.org/drawingml/2006/main">
               <a:ext uri="{FF2B5EF4-FFF2-40B4-BE49-F238E27FC236}">
-                <a16:creationId xmlns:a16="http://schemas.microsoft.com/office/drawing/2014/main" id="{5CCDAB02-84C9-4CBF-91E4-7D26B9A3FECA}"/>
-              </a:ext>
-            </a:extLst>
-          </p:cNvPr>
-          <p:cNvSpPr>
-            <a:spLocks xmlns:a="http://schemas.openxmlformats.org/drawingml/2006/main" noGrp="1"/>
-          </p:cNvSpPr>
-          <p:nvPr/>
-        </p:nvSpPr>
-        <p:spPr>
-          <a:xfrm xmlns:a="http://schemas.openxmlformats.org/drawingml/2006/main">
-            <a:off x="590550" y="4810125"/>
-            <a:ext cx="10572750" cy="762000"/>
+                <a16:creationId xmlns:a16="http://schemas.microsoft.com/office/drawing/2014/main" id="{02A69BEC-29FE-425B-8958-BA5A05773F4C}"/>
+              </a:ext>
+            </a:extLst>
+          </p:cNvPr>
+          <p:cNvSpPr>
+            <a:spLocks xmlns:a="http://schemas.openxmlformats.org/drawingml/2006/main" noGrp="1"/>
+          </p:cNvSpPr>
+          <p:nvPr/>
+        </p:nvSpPr>
+        <p:spPr>
+          <a:xfrm xmlns:a="http://schemas.openxmlformats.org/drawingml/2006/main">
+            <a:off x="590550" y="5048250"/>
+            <a:ext cx="10572750" cy="714375"/>
           </a:xfrm>
           <a:prstGeom xmlns:a="http://schemas.openxmlformats.org/drawingml/2006/main" prst="rect">
             <a:avLst/>
@@ -10723,9 +12885,9 @@
           </a:bodyPr>
           <a:lstStyle xmlns:a="http://schemas.openxmlformats.org/drawingml/2006/main">
             <a:defPPr>
-              <a:defRPr sz="2550" b="1">
-                <a:solidFill>
-                  <a:srgbClr val="7DDC93"/>
+              <a:defRPr sz="2325" b="1">
+                <a:solidFill>
+                  <a:srgbClr val="F55A47"/>
                 </a:solidFill>
                 <a:latin typeface="Georgia"/>
                 <a:ea typeface="Georgia"/>
@@ -10735,25 +12897,26 @@
           </a:lstStyle>
           <a:p xmlns:a="http://schemas.openxmlformats.org/drawingml/2006/main">
             <a:pPr>
-              <a:defRPr sz="2550" b="1">
-                <a:solidFill>
-                  <a:srgbClr val="7DDC93"/>
-                </a:solidFill>
-                <a:latin typeface="Georgia"/>
-                <a:ea typeface="Georgia"/>
-                <a:cs typeface="Georgia"/>
-              </a:defRPr>
-            </a:pPr>
-            <a:r>
-              <a:rPr sz="2550" b="1">
-                <a:solidFill>
-                  <a:srgbClr val="7DDC93"/>
-                </a:solidFill>
-                <a:latin typeface="Georgia"/>
-                <a:ea typeface="Georgia"/>
-                <a:cs typeface="Georgia"/>
-              </a:rPr>
-              <a:t>250 ÷ 800 × 100 = 31.25%</a:t>
+              <a:buNone/>
+              <a:defRPr sz="2325" b="1">
+                <a:solidFill>
+                  <a:srgbClr val="F55A47"/>
+                </a:solidFill>
+                <a:latin typeface="Georgia"/>
+                <a:ea typeface="Georgia"/>
+                <a:cs typeface="Georgia"/>
+              </a:defRPr>
+            </a:pPr>
+            <a:r>
+              <a:rPr sz="2325" b="1">
+                <a:solidFill>
+                  <a:srgbClr val="F55A47"/>
+                </a:solidFill>
+                <a:latin typeface="Georgia"/>
+                <a:ea typeface="Georgia"/>
+                <a:cs typeface="Georgia"/>
+              </a:rPr>
+              <a:t>A local value must be assigned before it is read.</a:t>
             </a:r>
           </a:p>
         </p:txBody>
@@ -10761,7 +12924,7 @@
     </p:spTree>
     <p:extLst>
       <p:ext uri="{BB962C8B-B14F-4D97-AF65-F5344CB8AC3E}">
-        <p14:creationId xmlns:p14="http://schemas.microsoft.com/office/powerpoint/2010/main" val="677091492"/>
+        <p14:creationId xmlns:p14="http://schemas.microsoft.com/office/powerpoint/2010/main" val="546718634"/>
       </p:ext>
     </p:extLst>
   </p:cSld>
@@ -10792,7 +12955,7 @@
           <p:cNvPr id="6" name="">
             <a:extLst xmlns:a="http://schemas.openxmlformats.org/drawingml/2006/main">
               <a:ext uri="{FF2B5EF4-FFF2-40B4-BE49-F238E27FC236}">
-                <a16:creationId xmlns:a16="http://schemas.microsoft.com/office/drawing/2014/main" id="{A2E8DE66-5160-4A6B-81E2-DA1ABC7D4CE2}"/>
+                <a16:creationId xmlns:a16="http://schemas.microsoft.com/office/drawing/2014/main" id="{F3E74F87-62A5-4B72-9C01-392451DF905F}"/>
               </a:ext>
             </a:extLst>
           </p:cNvPr>
@@ -10833,6 +12996,7 @@
           </a:lstStyle>
           <a:p xmlns:a="http://schemas.openxmlformats.org/drawingml/2006/main">
             <a:pPr>
+              <a:buNone/>
               <a:defRPr sz="3675" b="1">
                 <a:solidFill>
                   <a:srgbClr val="FFFFFF"/>
@@ -10851,7 +13015,7 @@
                 <a:ea typeface="Georgia"/>
                 <a:cs typeface="Georgia"/>
               </a:rPr>
-              <a:t>Readable numbers in C11</a:t>
+              <a:t>Calculate percent complete</a:t>
             </a:r>
           </a:p>
         </p:txBody>
@@ -10861,7 +13025,7 @@
           <p:cNvPr id="2" name="">
             <a:extLst xmlns:a="http://schemas.openxmlformats.org/drawingml/2006/main">
               <a:ext uri="{FF2B5EF4-FFF2-40B4-BE49-F238E27FC236}">
-                <a16:creationId xmlns:a16="http://schemas.microsoft.com/office/drawing/2014/main" id="{3682505C-272D-4CFC-90D6-1A7A69AAE23A}"/>
+                <a16:creationId xmlns:a16="http://schemas.microsoft.com/office/drawing/2014/main" id="{D28EA172-358D-4AFF-B95C-50E422303183}"/>
               </a:ext>
             </a:extLst>
           </p:cNvPr>
@@ -10902,6 +13066,7 @@
           </a:lstStyle>
           <a:p xmlns:a="http://schemas.openxmlformats.org/drawingml/2006/main">
             <a:pPr>
+              <a:buNone/>
               <a:defRPr sz="1200" b="0">
                 <a:solidFill>
                   <a:srgbClr val="C8C8CC"/>
@@ -10930,19 +13095,19 @@
           <p:cNvPr id="3" name="">
             <a:extLst xmlns:a="http://schemas.openxmlformats.org/drawingml/2006/main">
               <a:ext uri="{FF2B5EF4-FFF2-40B4-BE49-F238E27FC236}">
-                <a16:creationId xmlns:a16="http://schemas.microsoft.com/office/drawing/2014/main" id="{E753533B-791B-4FD3-812B-76FB8BC41C07}"/>
-              </a:ext>
-            </a:extLst>
-          </p:cNvPr>
-          <p:cNvSpPr>
-            <a:spLocks xmlns:a="http://schemas.openxmlformats.org/drawingml/2006/main" noGrp="1"/>
-          </p:cNvSpPr>
-          <p:nvPr/>
-        </p:nvSpPr>
-        <p:spPr>
-          <a:xfrm xmlns:a="http://schemas.openxmlformats.org/drawingml/2006/main">
-            <a:off x="590550" y="2143125"/>
-            <a:ext cx="10953750" cy="2095500"/>
+                <a16:creationId xmlns:a16="http://schemas.microsoft.com/office/drawing/2014/main" id="{0CC8CE58-B03F-47FD-879F-82FBF88F8607}"/>
+              </a:ext>
+            </a:extLst>
+          </p:cNvPr>
+          <p:cNvSpPr>
+            <a:spLocks xmlns:a="http://schemas.openxmlformats.org/drawingml/2006/main" noGrp="1"/>
+          </p:cNvSpPr>
+          <p:nvPr/>
+        </p:nvSpPr>
+        <p:spPr>
+          <a:xfrm xmlns:a="http://schemas.openxmlformats.org/drawingml/2006/main">
+            <a:off x="590550" y="1981200"/>
+            <a:ext cx="10953750" cy="2286000"/>
           </a:xfrm>
           <a:prstGeom xmlns:a="http://schemas.openxmlformats.org/drawingml/2006/main" prst="rect">
             <a:avLst/>
@@ -10961,19 +13126,19 @@
           <p:cNvPr id="4" name="">
             <a:extLst xmlns:a="http://schemas.openxmlformats.org/drawingml/2006/main">
               <a:ext uri="{FF2B5EF4-FFF2-40B4-BE49-F238E27FC236}">
-                <a16:creationId xmlns:a16="http://schemas.microsoft.com/office/drawing/2014/main" id="{AE3461CD-E120-4631-982D-82D5C9C15871}"/>
-              </a:ext>
-            </a:extLst>
-          </p:cNvPr>
-          <p:cNvSpPr>
-            <a:spLocks xmlns:a="http://schemas.openxmlformats.org/drawingml/2006/main" noGrp="1"/>
-          </p:cNvSpPr>
-          <p:nvPr/>
-        </p:nvSpPr>
-        <p:spPr>
-          <a:xfrm xmlns:a="http://schemas.openxmlformats.org/drawingml/2006/main">
-            <a:off x="828675" y="2295525"/>
-            <a:ext cx="10477500" cy="1790700"/>
+                <a16:creationId xmlns:a16="http://schemas.microsoft.com/office/drawing/2014/main" id="{375DB62D-89B7-4F2E-B211-0E67CC3F0A56}"/>
+              </a:ext>
+            </a:extLst>
+          </p:cNvPr>
+          <p:cNvSpPr>
+            <a:spLocks xmlns:a="http://schemas.openxmlformats.org/drawingml/2006/main" noGrp="1"/>
+          </p:cNvSpPr>
+          <p:nvPr/>
+        </p:nvSpPr>
+        <p:spPr>
+          <a:xfrm xmlns:a="http://schemas.openxmlformats.org/drawingml/2006/main">
+            <a:off x="828675" y="2133600"/>
+            <a:ext cx="10477500" cy="1981200"/>
           </a:xfrm>
           <a:prstGeom xmlns:a="http://schemas.openxmlformats.org/drawingml/2006/main" prst="rect">
             <a:avLst/>
@@ -10990,7 +13155,7 @@
           </a:bodyPr>
           <a:lstStyle xmlns:a="http://schemas.openxmlformats.org/drawingml/2006/main">
             <a:defPPr>
-              <a:defRPr sz="1950" b="0">
+              <a:defRPr sz="2025" b="0">
                 <a:solidFill>
                   <a:srgbClr val="FFFFFF"/>
                 </a:solidFill>
@@ -11002,71 +13167,74 @@
           </a:lstStyle>
           <a:p xmlns:a="http://schemas.openxmlformats.org/drawingml/2006/main">
             <a:pPr>
-              <a:defRPr sz="1950" b="0">
-                <a:solidFill>
-                  <a:srgbClr val="FFFFFF"/>
-                </a:solidFill>
-                <a:latin typeface="Menlo"/>
-                <a:ea typeface="Menlo"/>
-                <a:cs typeface="Menlo"/>
-              </a:defRPr>
-            </a:pPr>
-            <a:r>
-              <a:rPr sz="1950" b="0">
-                <a:solidFill>
-                  <a:srgbClr val="FFFFFF"/>
-                </a:solidFill>
-                <a:latin typeface="Menlo"/>
-                <a:ea typeface="Menlo"/>
-                <a:cs typeface="Menlo"/>
-              </a:rPr>
-              <a:t>const int daily_step_goal = 10000;  /* C11 */</a:t>
-            </a:r>
-          </a:p>
-          <a:p xmlns:a="http://schemas.openxmlformats.org/drawingml/2006/main">
-            <a:pPr>
-              <a:defRPr sz="1950" b="0">
-                <a:solidFill>
-                  <a:srgbClr val="FFFFFF"/>
-                </a:solidFill>
-                <a:latin typeface="Menlo"/>
-                <a:ea typeface="Menlo"/>
-                <a:cs typeface="Menlo"/>
-              </a:defRPr>
-            </a:pPr>
-            <a:r>
-              <a:rPr sz="1950" b="0">
-                <a:solidFill>
-                  <a:srgbClr val="FFFFFF"/>
-                </a:solidFill>
-                <a:latin typeface="Menlo"/>
-                <a:ea typeface="Menlo"/>
-                <a:cs typeface="Menlo"/>
-              </a:rPr>
-              <a:t>/* 10_000 is not a C11 integer literal. */</a:t>
-            </a:r>
-          </a:p>
-          <a:p xmlns:a="http://schemas.openxmlformats.org/drawingml/2006/main">
-            <a:pPr>
-              <a:defRPr sz="1950" b="0">
-                <a:solidFill>
-                  <a:srgbClr val="FFFFFF"/>
-                </a:solidFill>
-                <a:latin typeface="Menlo"/>
-                <a:ea typeface="Menlo"/>
-                <a:cs typeface="Menlo"/>
-              </a:defRPr>
-            </a:pPr>
-            <a:r>
-              <a:rPr sz="1950" b="0">
-                <a:solidFill>
-                  <a:srgbClr val="FFFFFF"/>
-                </a:solidFill>
-                <a:latin typeface="Menlo"/>
-                <a:ea typeface="Menlo"/>
-                <a:cs typeface="Menlo"/>
-              </a:rPr>
-              <a:t>printf("Daily goal: %d steps\n", daily_step_goal);</a:t>
+              <a:buNone/>
+              <a:defRPr sz="2025" b="0">
+                <a:solidFill>
+                  <a:srgbClr val="FFFFFF"/>
+                </a:solidFill>
+                <a:latin typeface="Menlo"/>
+                <a:ea typeface="Menlo"/>
+                <a:cs typeface="Menlo"/>
+              </a:defRPr>
+            </a:pPr>
+            <a:r>
+              <a:rPr sz="2025" b="0">
+                <a:solidFill>
+                  <a:srgbClr val="FFFFFF"/>
+                </a:solidFill>
+                <a:latin typeface="Menlo"/>
+                <a:ea typeface="Menlo"/>
+                <a:cs typeface="Menlo"/>
+              </a:rPr>
+              <a:t>double percent_complete =</a:t>
+            </a:r>
+          </a:p>
+          <a:p xmlns:a="http://schemas.openxmlformats.org/drawingml/2006/main">
+            <a:pPr>
+              <a:buNone/>
+              <a:defRPr sz="2025" b="0">
+                <a:solidFill>
+                  <a:srgbClr val="FFFFFF"/>
+                </a:solidFill>
+                <a:latin typeface="Menlo"/>
+                <a:ea typeface="Menlo"/>
+                <a:cs typeface="Menlo"/>
+              </a:defRPr>
+            </a:pPr>
+            <a:r>
+              <a:rPr sz="2025" b="0">
+                <a:solidFill>
+                  <a:srgbClr val="FFFFFF"/>
+                </a:solidFill>
+                <a:latin typeface="Menlo"/>
+                <a:ea typeface="Menlo"/>
+                <a:cs typeface="Menlo"/>
+              </a:rPr>
+              <a:t>    (double) meters_walked * 100.0 / route_meters;</a:t>
+            </a:r>
+          </a:p>
+          <a:p xmlns:a="http://schemas.openxmlformats.org/drawingml/2006/main">
+            <a:pPr>
+              <a:buNone/>
+              <a:defRPr sz="2025" b="0">
+                <a:solidFill>
+                  <a:srgbClr val="FFFFFF"/>
+                </a:solidFill>
+                <a:latin typeface="Menlo"/>
+                <a:ea typeface="Menlo"/>
+                <a:cs typeface="Menlo"/>
+              </a:defRPr>
+            </a:pPr>
+            <a:r>
+              <a:rPr sz="2025" b="0">
+                <a:solidFill>
+                  <a:srgbClr val="FFFFFF"/>
+                </a:solidFill>
+                <a:latin typeface="Menlo"/>
+                <a:ea typeface="Menlo"/>
+                <a:cs typeface="Menlo"/>
+              </a:rPr>
+              <a:t>printf("Completed: %.2f%%\n", percent_complete);</a:t>
             </a:r>
           </a:p>
         </p:txBody>
@@ -11076,7 +13244,7 @@
           <p:cNvPr id="5" name="">
             <a:extLst xmlns:a="http://schemas.openxmlformats.org/drawingml/2006/main">
               <a:ext uri="{FF2B5EF4-FFF2-40B4-BE49-F238E27FC236}">
-                <a16:creationId xmlns:a16="http://schemas.microsoft.com/office/drawing/2014/main" id="{6CFD1BE3-4B03-4343-B4B2-E8703AC3D6D5}"/>
+                <a16:creationId xmlns:a16="http://schemas.microsoft.com/office/drawing/2014/main" id="{5CCDAB02-84C9-4CBF-91E4-7D26B9A3FECA}"/>
               </a:ext>
             </a:extLst>
           </p:cNvPr>
@@ -11088,7 +13256,7 @@
         <p:spPr>
           <a:xfrm xmlns:a="http://schemas.openxmlformats.org/drawingml/2006/main">
             <a:off x="590550" y="4810125"/>
-            <a:ext cx="10572750" cy="714375"/>
+            <a:ext cx="10572750" cy="762000"/>
           </a:xfrm>
           <a:prstGeom xmlns:a="http://schemas.openxmlformats.org/drawingml/2006/main" prst="rect">
             <a:avLst/>
@@ -11105,37 +13273,38 @@
           </a:bodyPr>
           <a:lstStyle xmlns:a="http://schemas.openxmlformats.org/drawingml/2006/main">
             <a:defPPr>
-              <a:defRPr sz="2100" b="0">
+              <a:defRPr sz="2550" b="1">
                 <a:solidFill>
                   <a:srgbClr val="7DDC93"/>
                 </a:solidFill>
-                <a:latin typeface="Menlo"/>
-                <a:ea typeface="Menlo"/>
-                <a:cs typeface="Menlo"/>
+                <a:latin typeface="Georgia"/>
+                <a:ea typeface="Georgia"/>
+                <a:cs typeface="Georgia"/>
               </a:defRPr>
             </a:defPPr>
           </a:lstStyle>
           <a:p xmlns:a="http://schemas.openxmlformats.org/drawingml/2006/main">
             <a:pPr>
-              <a:defRPr sz="2100" b="0">
+              <a:buNone/>
+              <a:defRPr sz="2550" b="1">
                 <a:solidFill>
                   <a:srgbClr val="7DDC93"/>
                 </a:solidFill>
-                <a:latin typeface="Menlo"/>
-                <a:ea typeface="Menlo"/>
-                <a:cs typeface="Menlo"/>
-              </a:defRPr>
-            </a:pPr>
-            <a:r>
-              <a:rPr sz="2100" b="0">
+                <a:latin typeface="Georgia"/>
+                <a:ea typeface="Georgia"/>
+                <a:cs typeface="Georgia"/>
+              </a:defRPr>
+            </a:pPr>
+            <a:r>
+              <a:rPr sz="2550" b="1">
                 <a:solidFill>
                   <a:srgbClr val="7DDC93"/>
                 </a:solidFill>
-                <a:latin typeface="Menlo"/>
-                <a:ea typeface="Menlo"/>
-                <a:cs typeface="Menlo"/>
-              </a:rPr>
-              <a:t>Output: Daily goal: 10000 steps</a:t>
+                <a:latin typeface="Georgia"/>
+                <a:ea typeface="Georgia"/>
+                <a:cs typeface="Georgia"/>
+              </a:rPr>
+              <a:t>250 ÷ 800 × 100 = 31.25%</a:t>
             </a:r>
           </a:p>
         </p:txBody>
@@ -11143,7 +13312,7 @@
     </p:spTree>
     <p:extLst>
       <p:ext uri="{BB962C8B-B14F-4D97-AF65-F5344CB8AC3E}">
-        <p14:creationId xmlns:p14="http://schemas.microsoft.com/office/powerpoint/2010/main" val="1250652547"/>
+        <p14:creationId xmlns:p14="http://schemas.microsoft.com/office/powerpoint/2010/main" val="677091492"/>
       </p:ext>
     </p:extLst>
   </p:cSld>
@@ -11171,10 +13340,10 @@
       </p:grpSpPr>
       <p:sp>
         <p:nvSpPr>
-          <p:cNvPr id="8" name="">
-            <a:extLst xmlns:a="http://schemas.openxmlformats.org/drawingml/2006/main">
-              <a:ext uri="{FF2B5EF4-FFF2-40B4-BE49-F238E27FC236}">
-                <a16:creationId xmlns:a16="http://schemas.microsoft.com/office/drawing/2014/main" id="{94A501E8-04B8-4968-AEEF-4225BCC62AF0}"/>
+          <p:cNvPr id="6" name="">
+            <a:extLst xmlns:a="http://schemas.openxmlformats.org/drawingml/2006/main">
+              <a:ext uri="{FF2B5EF4-FFF2-40B4-BE49-F238E27FC236}">
+                <a16:creationId xmlns:a16="http://schemas.microsoft.com/office/drawing/2014/main" id="{A2E8DE66-5160-4A6B-81E2-DA1ABC7D4CE2}"/>
               </a:ext>
             </a:extLst>
           </p:cNvPr>
@@ -11215,6 +13384,7 @@
           </a:lstStyle>
           <a:p xmlns:a="http://schemas.openxmlformats.org/drawingml/2006/main">
             <a:pPr>
+              <a:buNone/>
               <a:defRPr sz="3675" b="1">
                 <a:solidFill>
                   <a:srgbClr val="FFFFFF"/>
@@ -11233,7 +13403,7 @@
                 <a:ea typeface="Georgia"/>
                 <a:cs typeface="Georgia"/>
               </a:rPr>
-              <a:t>Lab: build the tracker</a:t>
+              <a:t>Readable numbers in C11</a:t>
             </a:r>
           </a:p>
         </p:txBody>
@@ -11243,76 +13413,7 @@
           <p:cNvPr id="2" name="">
             <a:extLst xmlns:a="http://schemas.openxmlformats.org/drawingml/2006/main">
               <a:ext uri="{FF2B5EF4-FFF2-40B4-BE49-F238E27FC236}">
-                <a16:creationId xmlns:a16="http://schemas.microsoft.com/office/drawing/2014/main" id="{B36536F5-8ED7-45A2-8C99-7DB3B7161C54}"/>
-              </a:ext>
-            </a:extLst>
-          </p:cNvPr>
-          <p:cNvSpPr>
-            <a:spLocks xmlns:a="http://schemas.openxmlformats.org/drawingml/2006/main" noGrp="1"/>
-          </p:cNvSpPr>
-          <p:nvPr/>
-        </p:nvSpPr>
-        <p:spPr>
-          <a:xfrm xmlns:a="http://schemas.openxmlformats.org/drawingml/2006/main">
-            <a:off x="590550" y="1343025"/>
-            <a:ext cx="6667500" cy="333375"/>
-          </a:xfrm>
-          <a:prstGeom xmlns:a="http://schemas.openxmlformats.org/drawingml/2006/main" prst="rect">
-            <a:avLst/>
-          </a:prstGeom>
-          <a:noFill xmlns:a="http://schemas.openxmlformats.org/drawingml/2006/main"/>
-          <a:ln xmlns:a="http://schemas.openxmlformats.org/drawingml/2006/main" w="0">
-            <a:noFill/>
-            <a:prstDash val="solid"/>
-          </a:ln>
-        </p:spPr>
-        <p:txBody>
-          <a:bodyPr xmlns:a="http://schemas.openxmlformats.org/drawingml/2006/main" wrap="square" lIns="0" tIns="0" rIns="0" bIns="0" anchor="ctr">
-            <a:noAutofit/>
-          </a:bodyPr>
-          <a:lstStyle xmlns:a="http://schemas.openxmlformats.org/drawingml/2006/main">
-            <a:defPPr>
-              <a:defRPr sz="1500" b="1">
-                <a:solidFill>
-                  <a:srgbClr val="F55A47"/>
-                </a:solidFill>
-                <a:latin typeface="Menlo"/>
-                <a:ea typeface="Menlo"/>
-                <a:cs typeface="Menlo"/>
-              </a:defRPr>
-            </a:defPPr>
-          </a:lstStyle>
-          <a:p xmlns:a="http://schemas.openxmlformats.org/drawingml/2006/main">
-            <a:pPr>
-              <a:defRPr sz="1500" b="1">
-                <a:solidFill>
-                  <a:srgbClr val="F55A47"/>
-                </a:solidFill>
-                <a:latin typeface="Menlo"/>
-                <a:ea typeface="Menlo"/>
-                <a:cs typeface="Menlo"/>
-              </a:defRPr>
-            </a:pPr>
-            <a:r>
-              <a:rPr sz="1500" b="1">
-                <a:solidFill>
-                  <a:srgbClr val="F55A47"/>
-                </a:solidFill>
-                <a:latin typeface="Menlo"/>
-                <a:ea typeface="Menlo"/>
-                <a:cs typeface="Menlo"/>
-              </a:rPr>
-              <a:t>LAB SESSION</a:t>
-            </a:r>
-          </a:p>
-        </p:txBody>
-      </p:sp>
-      <p:sp>
-        <p:nvSpPr>
-          <p:cNvPr id="3" name="">
-            <a:extLst xmlns:a="http://schemas.openxmlformats.org/drawingml/2006/main">
-              <a:ext uri="{FF2B5EF4-FFF2-40B4-BE49-F238E27FC236}">
-                <a16:creationId xmlns:a16="http://schemas.microsoft.com/office/drawing/2014/main" id="{4670566F-E46E-4D77-824E-F35BAB8B76C6}"/>
+                <a16:creationId xmlns:a16="http://schemas.microsoft.com/office/drawing/2014/main" id="{3682505C-272D-4CFC-90D6-1A7A69AAE23A}"/>
               </a:ext>
             </a:extLst>
           </p:cNvPr>
@@ -11353,6 +13454,7 @@
           </a:lstStyle>
           <a:p xmlns:a="http://schemas.openxmlformats.org/drawingml/2006/main">
             <a:pPr>
+              <a:buNone/>
               <a:defRPr sz="1200" b="0">
                 <a:solidFill>
                   <a:srgbClr val="C8C8CC"/>
@@ -11378,22 +13480,53 @@
       </p:sp>
       <p:sp>
         <p:nvSpPr>
+          <p:cNvPr id="3" name="">
+            <a:extLst xmlns:a="http://schemas.openxmlformats.org/drawingml/2006/main">
+              <a:ext uri="{FF2B5EF4-FFF2-40B4-BE49-F238E27FC236}">
+                <a16:creationId xmlns:a16="http://schemas.microsoft.com/office/drawing/2014/main" id="{E753533B-791B-4FD3-812B-76FB8BC41C07}"/>
+              </a:ext>
+            </a:extLst>
+          </p:cNvPr>
+          <p:cNvSpPr>
+            <a:spLocks xmlns:a="http://schemas.openxmlformats.org/drawingml/2006/main" noGrp="1"/>
+          </p:cNvSpPr>
+          <p:nvPr/>
+        </p:nvSpPr>
+        <p:spPr>
+          <a:xfrm xmlns:a="http://schemas.openxmlformats.org/drawingml/2006/main">
+            <a:off x="590550" y="2143125"/>
+            <a:ext cx="10953750" cy="2095500"/>
+          </a:xfrm>
+          <a:prstGeom xmlns:a="http://schemas.openxmlformats.org/drawingml/2006/main" prst="rect">
+            <a:avLst/>
+          </a:prstGeom>
+          <a:solidFill xmlns:a="http://schemas.openxmlformats.org/drawingml/2006/main">
+            <a:srgbClr val="292A31"/>
+          </a:solidFill>
+          <a:ln xmlns:a="http://schemas.openxmlformats.org/drawingml/2006/main" w="0">
+            <a:noFill/>
+            <a:prstDash val="solid"/>
+          </a:ln>
+        </p:spPr>
+      </p:sp>
+      <p:sp>
+        <p:nvSpPr>
           <p:cNvPr id="4" name="">
             <a:extLst xmlns:a="http://schemas.openxmlformats.org/drawingml/2006/main">
               <a:ext uri="{FF2B5EF4-FFF2-40B4-BE49-F238E27FC236}">
-                <a16:creationId xmlns:a16="http://schemas.microsoft.com/office/drawing/2014/main" id="{4DA308C9-DEE0-4006-9F9A-23D6C838D960}"/>
-              </a:ext>
-            </a:extLst>
-          </p:cNvPr>
-          <p:cNvSpPr>
-            <a:spLocks xmlns:a="http://schemas.openxmlformats.org/drawingml/2006/main" noGrp="1"/>
-          </p:cNvSpPr>
-          <p:nvPr/>
-        </p:nvSpPr>
-        <p:spPr>
-          <a:xfrm xmlns:a="http://schemas.openxmlformats.org/drawingml/2006/main">
-            <a:off x="590550" y="1952625"/>
-            <a:ext cx="10668000" cy="714375"/>
+                <a16:creationId xmlns:a16="http://schemas.microsoft.com/office/drawing/2014/main" id="{AE3461CD-E120-4631-982D-82D5C9C15871}"/>
+              </a:ext>
+            </a:extLst>
+          </p:cNvPr>
+          <p:cNvSpPr>
+            <a:spLocks xmlns:a="http://schemas.openxmlformats.org/drawingml/2006/main" noGrp="1"/>
+          </p:cNvSpPr>
+          <p:nvPr/>
+        </p:nvSpPr>
+        <p:spPr>
+          <a:xfrm xmlns:a="http://schemas.openxmlformats.org/drawingml/2006/main">
+            <a:off x="828675" y="2295525"/>
+            <a:ext cx="10477500" cy="1790700"/>
           </a:xfrm>
           <a:prstGeom xmlns:a="http://schemas.openxmlformats.org/drawingml/2006/main" prst="rect">
             <a:avLst/>
@@ -11410,37 +13543,86 @@
           </a:bodyPr>
           <a:lstStyle xmlns:a="http://schemas.openxmlformats.org/drawingml/2006/main">
             <a:defPPr>
-              <a:defRPr sz="2475" b="0">
-                <a:solidFill>
-                  <a:srgbClr val="FFFFFF"/>
-                </a:solidFill>
-                <a:latin typeface="Georgia"/>
-                <a:ea typeface="Georgia"/>
-                <a:cs typeface="Georgia"/>
+              <a:defRPr sz="1950" b="0">
+                <a:solidFill>
+                  <a:srgbClr val="FFFFFF"/>
+                </a:solidFill>
+                <a:latin typeface="Menlo"/>
+                <a:ea typeface="Menlo"/>
+                <a:cs typeface="Menlo"/>
               </a:defRPr>
             </a:defPPr>
           </a:lstStyle>
           <a:p xmlns:a="http://schemas.openxmlformats.org/drawingml/2006/main">
             <a:pPr>
-              <a:defRPr sz="2475" b="0">
-                <a:solidFill>
-                  <a:srgbClr val="FFFFFF"/>
-                </a:solidFill>
-                <a:latin typeface="Georgia"/>
-                <a:ea typeface="Georgia"/>
-                <a:cs typeface="Georgia"/>
-              </a:defRPr>
-            </a:pPr>
-            <a:r>
-              <a:rPr sz="2475" b="0">
-                <a:solidFill>
-                  <a:srgbClr val="FFFFFF"/>
-                </a:solidFill>
-                <a:latin typeface="Georgia"/>
-                <a:ea typeface="Georgia"/>
-                <a:cs typeface="Georgia"/>
-              </a:rPr>
-              <a:t>Open lab/campus_walk_starter.c in VS Code.</a:t>
+              <a:buNone/>
+              <a:defRPr sz="1950" b="0">
+                <a:solidFill>
+                  <a:srgbClr val="FFFFFF"/>
+                </a:solidFill>
+                <a:latin typeface="Menlo"/>
+                <a:ea typeface="Menlo"/>
+                <a:cs typeface="Menlo"/>
+              </a:defRPr>
+            </a:pPr>
+            <a:r>
+              <a:rPr sz="1950" b="0">
+                <a:solidFill>
+                  <a:srgbClr val="FFFFFF"/>
+                </a:solidFill>
+                <a:latin typeface="Menlo"/>
+                <a:ea typeface="Menlo"/>
+                <a:cs typeface="Menlo"/>
+              </a:rPr>
+              <a:t>const int daily_step_goal = 10000;  /* C11 */</a:t>
+            </a:r>
+          </a:p>
+          <a:p xmlns:a="http://schemas.openxmlformats.org/drawingml/2006/main">
+            <a:pPr>
+              <a:buNone/>
+              <a:defRPr sz="1950" b="0">
+                <a:solidFill>
+                  <a:srgbClr val="FFFFFF"/>
+                </a:solidFill>
+                <a:latin typeface="Menlo"/>
+                <a:ea typeface="Menlo"/>
+                <a:cs typeface="Menlo"/>
+              </a:defRPr>
+            </a:pPr>
+            <a:r>
+              <a:rPr sz="1950" b="0">
+                <a:solidFill>
+                  <a:srgbClr val="FFFFFF"/>
+                </a:solidFill>
+                <a:latin typeface="Menlo"/>
+                <a:ea typeface="Menlo"/>
+                <a:cs typeface="Menlo"/>
+              </a:rPr>
+              <a:t>/* 10_000 is not a C11 integer literal. */</a:t>
+            </a:r>
+          </a:p>
+          <a:p xmlns:a="http://schemas.openxmlformats.org/drawingml/2006/main">
+            <a:pPr>
+              <a:buNone/>
+              <a:defRPr sz="1950" b="0">
+                <a:solidFill>
+                  <a:srgbClr val="FFFFFF"/>
+                </a:solidFill>
+                <a:latin typeface="Menlo"/>
+                <a:ea typeface="Menlo"/>
+                <a:cs typeface="Menlo"/>
+              </a:defRPr>
+            </a:pPr>
+            <a:r>
+              <a:rPr sz="1950" b="0">
+                <a:solidFill>
+                  <a:srgbClr val="FFFFFF"/>
+                </a:solidFill>
+                <a:latin typeface="Menlo"/>
+                <a:ea typeface="Menlo"/>
+                <a:cs typeface="Menlo"/>
+              </a:rPr>
+              <a:t>printf("Daily goal: %d steps\n", daily_step_goal);</a:t>
             </a:r>
           </a:p>
         </p:txBody>
@@ -11450,19 +13632,19 @@
           <p:cNvPr id="5" name="">
             <a:extLst xmlns:a="http://schemas.openxmlformats.org/drawingml/2006/main">
               <a:ext uri="{FF2B5EF4-FFF2-40B4-BE49-F238E27FC236}">
-                <a16:creationId xmlns:a16="http://schemas.microsoft.com/office/drawing/2014/main" id="{09BF6DEF-F36A-4313-9E57-4AB9BE27D858}"/>
-              </a:ext>
-            </a:extLst>
-          </p:cNvPr>
-          <p:cNvSpPr>
-            <a:spLocks xmlns:a="http://schemas.openxmlformats.org/drawingml/2006/main" noGrp="1"/>
-          </p:cNvSpPr>
-          <p:nvPr/>
-        </p:nvSpPr>
-        <p:spPr>
-          <a:xfrm xmlns:a="http://schemas.openxmlformats.org/drawingml/2006/main">
-            <a:off x="590550" y="3095625"/>
-            <a:ext cx="10572750" cy="523875"/>
+                <a16:creationId xmlns:a16="http://schemas.microsoft.com/office/drawing/2014/main" id="{6CFD1BE3-4B03-4343-B4B2-E8703AC3D6D5}"/>
+              </a:ext>
+            </a:extLst>
+          </p:cNvPr>
+          <p:cNvSpPr>
+            <a:spLocks xmlns:a="http://schemas.openxmlformats.org/drawingml/2006/main" noGrp="1"/>
+          </p:cNvSpPr>
+          <p:nvPr/>
+        </p:nvSpPr>
+        <p:spPr>
+          <a:xfrm xmlns:a="http://schemas.openxmlformats.org/drawingml/2006/main">
+            <a:off x="590550" y="4810125"/>
+            <a:ext cx="10572750" cy="714375"/>
           </a:xfrm>
           <a:prstGeom xmlns:a="http://schemas.openxmlformats.org/drawingml/2006/main" prst="rect">
             <a:avLst/>
@@ -11491,6 +13673,7 @@
           </a:lstStyle>
           <a:p xmlns:a="http://schemas.openxmlformats.org/drawingml/2006/main">
             <a:pPr>
+              <a:buNone/>
               <a:defRPr sz="2100" b="0">
                 <a:solidFill>
                   <a:srgbClr val="7DDC93"/>
@@ -11509,145 +13692,7 @@
                 <a:ea typeface="Menlo"/>
                 <a:cs typeface="Menlo"/>
               </a:rPr>
-              <a:t>1  Predict and run the starting values</a:t>
-            </a:r>
-          </a:p>
-        </p:txBody>
-      </p:sp>
-      <p:sp>
-        <p:nvSpPr>
-          <p:cNvPr id="6" name="">
-            <a:extLst xmlns:a="http://schemas.openxmlformats.org/drawingml/2006/main">
-              <a:ext uri="{FF2B5EF4-FFF2-40B4-BE49-F238E27FC236}">
-                <a16:creationId xmlns:a16="http://schemas.microsoft.com/office/drawing/2014/main" id="{FC508024-6649-4F6B-98DA-2E8DAEFD470C}"/>
-              </a:ext>
-            </a:extLst>
-          </p:cNvPr>
-          <p:cNvSpPr>
-            <a:spLocks xmlns:a="http://schemas.openxmlformats.org/drawingml/2006/main" noGrp="1"/>
-          </p:cNvSpPr>
-          <p:nvPr/>
-        </p:nvSpPr>
-        <p:spPr>
-          <a:xfrm xmlns:a="http://schemas.openxmlformats.org/drawingml/2006/main">
-            <a:off x="590550" y="3762375"/>
-            <a:ext cx="10572750" cy="523875"/>
-          </a:xfrm>
-          <a:prstGeom xmlns:a="http://schemas.openxmlformats.org/drawingml/2006/main" prst="rect">
-            <a:avLst/>
-          </a:prstGeom>
-          <a:noFill xmlns:a="http://schemas.openxmlformats.org/drawingml/2006/main"/>
-          <a:ln xmlns:a="http://schemas.openxmlformats.org/drawingml/2006/main" w="0">
-            <a:noFill/>
-            <a:prstDash val="solid"/>
-          </a:ln>
-        </p:spPr>
-        <p:txBody>
-          <a:bodyPr xmlns:a="http://schemas.openxmlformats.org/drawingml/2006/main" wrap="square" lIns="0" tIns="0" rIns="0" bIns="0" anchor="ctr">
-            <a:noAutofit/>
-          </a:bodyPr>
-          <a:lstStyle xmlns:a="http://schemas.openxmlformats.org/drawingml/2006/main">
-            <a:defPPr>
-              <a:defRPr sz="2100" b="0">
-                <a:solidFill>
-                  <a:srgbClr val="7DDC93"/>
-                </a:solidFill>
-                <a:latin typeface="Menlo"/>
-                <a:ea typeface="Menlo"/>
-                <a:cs typeface="Menlo"/>
-              </a:defRPr>
-            </a:defPPr>
-          </a:lstStyle>
-          <a:p xmlns:a="http://schemas.openxmlformats.org/drawingml/2006/main">
-            <a:pPr>
-              <a:defRPr sz="2100" b="0">
-                <a:solidFill>
-                  <a:srgbClr val="7DDC93"/>
-                </a:solidFill>
-                <a:latin typeface="Menlo"/>
-                <a:ea typeface="Menlo"/>
-                <a:cs typeface="Menlo"/>
-              </a:defRPr>
-            </a:pPr>
-            <a:r>
-              <a:rPr sz="2100" b="0">
-                <a:solidFill>
-                  <a:srgbClr val="7DDC93"/>
-                </a:solidFill>
-                <a:latin typeface="Menlo"/>
-                <a:ea typeface="Menlo"/>
-                <a:cs typeface="Menlo"/>
-              </a:rPr>
-              <a:t>2  Update metres walked to 250</a:t>
-            </a:r>
-          </a:p>
-        </p:txBody>
-      </p:sp>
-      <p:sp>
-        <p:nvSpPr>
-          <p:cNvPr id="7" name="">
-            <a:extLst xmlns:a="http://schemas.openxmlformats.org/drawingml/2006/main">
-              <a:ext uri="{FF2B5EF4-FFF2-40B4-BE49-F238E27FC236}">
-                <a16:creationId xmlns:a16="http://schemas.microsoft.com/office/drawing/2014/main" id="{5DF198B9-F046-4083-A6E4-67C2D90B62D2}"/>
-              </a:ext>
-            </a:extLst>
-          </p:cNvPr>
-          <p:cNvSpPr>
-            <a:spLocks xmlns:a="http://schemas.openxmlformats.org/drawingml/2006/main" noGrp="1"/>
-          </p:cNvSpPr>
-          <p:nvPr/>
-        </p:nvSpPr>
-        <p:spPr>
-          <a:xfrm xmlns:a="http://schemas.openxmlformats.org/drawingml/2006/main">
-            <a:off x="590550" y="4429125"/>
-            <a:ext cx="10572750" cy="523875"/>
-          </a:xfrm>
-          <a:prstGeom xmlns:a="http://schemas.openxmlformats.org/drawingml/2006/main" prst="rect">
-            <a:avLst/>
-          </a:prstGeom>
-          <a:noFill xmlns:a="http://schemas.openxmlformats.org/drawingml/2006/main"/>
-          <a:ln xmlns:a="http://schemas.openxmlformats.org/drawingml/2006/main" w="0">
-            <a:noFill/>
-            <a:prstDash val="solid"/>
-          </a:ln>
-        </p:spPr>
-        <p:txBody>
-          <a:bodyPr xmlns:a="http://schemas.openxmlformats.org/drawingml/2006/main" wrap="square" lIns="0" tIns="0" rIns="0" bIns="0" anchor="ctr">
-            <a:noAutofit/>
-          </a:bodyPr>
-          <a:lstStyle xmlns:a="http://schemas.openxmlformats.org/drawingml/2006/main">
-            <a:defPPr>
-              <a:defRPr sz="2100" b="0">
-                <a:solidFill>
-                  <a:srgbClr val="7DDC93"/>
-                </a:solidFill>
-                <a:latin typeface="Menlo"/>
-                <a:ea typeface="Menlo"/>
-                <a:cs typeface="Menlo"/>
-              </a:defRPr>
-            </a:defPPr>
-          </a:lstStyle>
-          <a:p xmlns:a="http://schemas.openxmlformats.org/drawingml/2006/main">
-            <a:pPr>
-              <a:defRPr sz="2100" b="0">
-                <a:solidFill>
-                  <a:srgbClr val="7DDC93"/>
-                </a:solidFill>
-                <a:latin typeface="Menlo"/>
-                <a:ea typeface="Menlo"/>
-                <a:cs typeface="Menlo"/>
-              </a:defRPr>
-            </a:pPr>
-            <a:r>
-              <a:rPr sz="2100" b="0">
-                <a:solidFill>
-                  <a:srgbClr val="7DDC93"/>
-                </a:solidFill>
-                <a:latin typeface="Menlo"/>
-                <a:ea typeface="Menlo"/>
-                <a:cs typeface="Menlo"/>
-              </a:rPr>
-              <a:t>3  Calculate and print 31.25% progress</a:t>
+              <a:t>Output: Daily goal: 10000 steps</a:t>
             </a:r>
           </a:p>
         </p:txBody>
@@ -11655,7 +13700,7 @@
     </p:spTree>
     <p:extLst>
       <p:ext uri="{BB962C8B-B14F-4D97-AF65-F5344CB8AC3E}">
-        <p14:creationId xmlns:p14="http://schemas.microsoft.com/office/powerpoint/2010/main" val="1090100035"/>
+        <p14:creationId xmlns:p14="http://schemas.microsoft.com/office/powerpoint/2010/main" val="1250652547"/>
       </p:ext>
     </p:extLst>
   </p:cSld>
@@ -11683,10 +13728,10 @@
       </p:grpSpPr>
       <p:sp>
         <p:nvSpPr>
-          <p:cNvPr id="7" name="">
-            <a:extLst xmlns:a="http://schemas.openxmlformats.org/drawingml/2006/main">
-              <a:ext uri="{FF2B5EF4-FFF2-40B4-BE49-F238E27FC236}">
-                <a16:creationId xmlns:a16="http://schemas.microsoft.com/office/drawing/2014/main" id="{3A410F4A-AA90-404F-B5FF-918A01693B24}"/>
+          <p:cNvPr id="8" name="">
+            <a:extLst xmlns:a="http://schemas.openxmlformats.org/drawingml/2006/main">
+              <a:ext uri="{FF2B5EF4-FFF2-40B4-BE49-F238E27FC236}">
+                <a16:creationId xmlns:a16="http://schemas.microsoft.com/office/drawing/2014/main" id="{94A501E8-04B8-4968-AEEF-4225BCC62AF0}"/>
               </a:ext>
             </a:extLst>
           </p:cNvPr>
@@ -11727,6 +13772,7 @@
           </a:lstStyle>
           <a:p xmlns:a="http://schemas.openxmlformats.org/drawingml/2006/main">
             <a:pPr>
+              <a:buNone/>
               <a:defRPr sz="3675" b="1">
                 <a:solidFill>
                   <a:srgbClr val="FFFFFF"/>
@@ -11745,7 +13791,7 @@
                 <a:ea typeface="Georgia"/>
                 <a:cs typeface="Georgia"/>
               </a:rPr>
-              <a:t>Lab: test and extend</a:t>
+              <a:t>Lab: build the tracker</a:t>
             </a:r>
           </a:p>
         </p:txBody>
@@ -11755,7 +13801,7 @@
           <p:cNvPr id="2" name="">
             <a:extLst xmlns:a="http://schemas.openxmlformats.org/drawingml/2006/main">
               <a:ext uri="{FF2B5EF4-FFF2-40B4-BE49-F238E27FC236}">
-                <a16:creationId xmlns:a16="http://schemas.microsoft.com/office/drawing/2014/main" id="{2DDFE051-FC18-4DBC-941A-195DE34244A7}"/>
+                <a16:creationId xmlns:a16="http://schemas.microsoft.com/office/drawing/2014/main" id="{B36536F5-8ED7-45A2-8C99-7DB3B7161C54}"/>
               </a:ext>
             </a:extLst>
           </p:cNvPr>
@@ -11796,6 +13842,7 @@
           </a:lstStyle>
           <a:p xmlns:a="http://schemas.openxmlformats.org/drawingml/2006/main">
             <a:pPr>
+              <a:buNone/>
               <a:defRPr sz="1500" b="1">
                 <a:solidFill>
                   <a:srgbClr val="F55A47"/>
@@ -11824,7 +13871,7 @@
           <p:cNvPr id="3" name="">
             <a:extLst xmlns:a="http://schemas.openxmlformats.org/drawingml/2006/main">
               <a:ext uri="{FF2B5EF4-FFF2-40B4-BE49-F238E27FC236}">
-                <a16:creationId xmlns:a16="http://schemas.microsoft.com/office/drawing/2014/main" id="{572390DB-3219-4461-BD43-F9A8B1593DAC}"/>
+                <a16:creationId xmlns:a16="http://schemas.microsoft.com/office/drawing/2014/main" id="{4670566F-E46E-4D77-824E-F35BAB8B76C6}"/>
               </a:ext>
             </a:extLst>
           </p:cNvPr>
@@ -11865,6 +13912,7 @@
           </a:lstStyle>
           <a:p xmlns:a="http://schemas.openxmlformats.org/drawingml/2006/main">
             <a:pPr>
+              <a:buNone/>
               <a:defRPr sz="1200" b="0">
                 <a:solidFill>
                   <a:srgbClr val="C8C8CC"/>
@@ -11893,19 +13941,19 @@
           <p:cNvPr id="4" name="">
             <a:extLst xmlns:a="http://schemas.openxmlformats.org/drawingml/2006/main">
               <a:ext uri="{FF2B5EF4-FFF2-40B4-BE49-F238E27FC236}">
-                <a16:creationId xmlns:a16="http://schemas.microsoft.com/office/drawing/2014/main" id="{E38F6828-748F-4254-A75C-887BDEDFF750}"/>
-              </a:ext>
-            </a:extLst>
-          </p:cNvPr>
-          <p:cNvSpPr>
-            <a:spLocks xmlns:a="http://schemas.openxmlformats.org/drawingml/2006/main" noGrp="1"/>
-          </p:cNvSpPr>
-          <p:nvPr/>
-        </p:nvSpPr>
-        <p:spPr>
-          <a:xfrm xmlns:a="http://schemas.openxmlformats.org/drawingml/2006/main">
-            <a:off x="590550" y="2000250"/>
-            <a:ext cx="10572750" cy="742950"/>
+                <a16:creationId xmlns:a16="http://schemas.microsoft.com/office/drawing/2014/main" id="{4DA308C9-DEE0-4006-9F9A-23D6C838D960}"/>
+              </a:ext>
+            </a:extLst>
+          </p:cNvPr>
+          <p:cNvSpPr>
+            <a:spLocks xmlns:a="http://schemas.openxmlformats.org/drawingml/2006/main" noGrp="1"/>
+          </p:cNvSpPr>
+          <p:nvPr/>
+        </p:nvSpPr>
+        <p:spPr>
+          <a:xfrm xmlns:a="http://schemas.openxmlformats.org/drawingml/2006/main">
+            <a:off x="590550" y="1952625"/>
+            <a:ext cx="10668000" cy="714375"/>
           </a:xfrm>
           <a:prstGeom xmlns:a="http://schemas.openxmlformats.org/drawingml/2006/main" prst="rect">
             <a:avLst/>
@@ -11922,7 +13970,7 @@
           </a:bodyPr>
           <a:lstStyle xmlns:a="http://schemas.openxmlformats.org/drawingml/2006/main">
             <a:defPPr>
-              <a:defRPr sz="2400" b="0">
+              <a:defRPr sz="2475" b="0">
                 <a:solidFill>
                   <a:srgbClr val="FFFFFF"/>
                 </a:solidFill>
@@ -11934,25 +13982,26 @@
           </a:lstStyle>
           <a:p xmlns:a="http://schemas.openxmlformats.org/drawingml/2006/main">
             <a:pPr>
-              <a:defRPr sz="2400" b="0">
-                <a:solidFill>
-                  <a:srgbClr val="FFFFFF"/>
-                </a:solidFill>
-                <a:latin typeface="Georgia"/>
-                <a:ea typeface="Georgia"/>
-                <a:cs typeface="Georgia"/>
-              </a:defRPr>
-            </a:pPr>
-            <a:r>
-              <a:rPr sz="2400" b="0">
-                <a:solidFill>
-                  <a:srgbClr val="FFFFFF"/>
-                </a:solidFill>
-                <a:latin typeface="Georgia"/>
-                <a:ea typeface="Georgia"/>
-                <a:cs typeface="Georgia"/>
-              </a:rPr>
-              <a:t>Test a const assignment; record the diagnostic.</a:t>
+              <a:buNone/>
+              <a:defRPr sz="2475" b="0">
+                <a:solidFill>
+                  <a:srgbClr val="FFFFFF"/>
+                </a:solidFill>
+                <a:latin typeface="Georgia"/>
+                <a:ea typeface="Georgia"/>
+                <a:cs typeface="Georgia"/>
+              </a:defRPr>
+            </a:pPr>
+            <a:r>
+              <a:rPr sz="2475" b="0">
+                <a:solidFill>
+                  <a:srgbClr val="FFFFFF"/>
+                </a:solidFill>
+                <a:latin typeface="Georgia"/>
+                <a:ea typeface="Georgia"/>
+                <a:cs typeface="Georgia"/>
+              </a:rPr>
+              <a:t>Open lab/campus_walk_starter.c in VS Code.</a:t>
             </a:r>
           </a:p>
         </p:txBody>
@@ -11962,19 +14011,19 @@
           <p:cNvPr id="5" name="">
             <a:extLst xmlns:a="http://schemas.openxmlformats.org/drawingml/2006/main">
               <a:ext uri="{FF2B5EF4-FFF2-40B4-BE49-F238E27FC236}">
-                <a16:creationId xmlns:a16="http://schemas.microsoft.com/office/drawing/2014/main" id="{C253F4F9-181E-4C6A-ACCD-A22A3939E619}"/>
-              </a:ext>
-            </a:extLst>
-          </p:cNvPr>
-          <p:cNvSpPr>
-            <a:spLocks xmlns:a="http://schemas.openxmlformats.org/drawingml/2006/main" noGrp="1"/>
-          </p:cNvSpPr>
-          <p:nvPr/>
-        </p:nvSpPr>
-        <p:spPr>
-          <a:xfrm xmlns:a="http://schemas.openxmlformats.org/drawingml/2006/main">
-            <a:off x="590550" y="3028950"/>
-            <a:ext cx="10572750" cy="742950"/>
+                <a16:creationId xmlns:a16="http://schemas.microsoft.com/office/drawing/2014/main" id="{09BF6DEF-F36A-4313-9E57-4AB9BE27D858}"/>
+              </a:ext>
+            </a:extLst>
+          </p:cNvPr>
+          <p:cNvSpPr>
+            <a:spLocks xmlns:a="http://schemas.openxmlformats.org/drawingml/2006/main" noGrp="1"/>
+          </p:cNvSpPr>
+          <p:nvPr/>
+        </p:nvSpPr>
+        <p:spPr>
+          <a:xfrm xmlns:a="http://schemas.openxmlformats.org/drawingml/2006/main">
+            <a:off x="590550" y="3095625"/>
+            <a:ext cx="10572750" cy="523875"/>
           </a:xfrm>
           <a:prstGeom xmlns:a="http://schemas.openxmlformats.org/drawingml/2006/main" prst="rect">
             <a:avLst/>
@@ -11991,37 +14040,38 @@
           </a:bodyPr>
           <a:lstStyle xmlns:a="http://schemas.openxmlformats.org/drawingml/2006/main">
             <a:defPPr>
-              <a:defRPr sz="2400" b="0">
-                <a:solidFill>
-                  <a:srgbClr val="FFFFFF"/>
-                </a:solidFill>
-                <a:latin typeface="Georgia"/>
-                <a:ea typeface="Georgia"/>
-                <a:cs typeface="Georgia"/>
+              <a:defRPr sz="2100" b="0">
+                <a:solidFill>
+                  <a:srgbClr val="7DDC93"/>
+                </a:solidFill>
+                <a:latin typeface="Menlo"/>
+                <a:ea typeface="Menlo"/>
+                <a:cs typeface="Menlo"/>
               </a:defRPr>
             </a:defPPr>
           </a:lstStyle>
           <a:p xmlns:a="http://schemas.openxmlformats.org/drawingml/2006/main">
             <a:pPr>
-              <a:defRPr sz="2400" b="0">
-                <a:solidFill>
-                  <a:srgbClr val="FFFFFF"/>
-                </a:solidFill>
-                <a:latin typeface="Georgia"/>
-                <a:ea typeface="Georgia"/>
-                <a:cs typeface="Georgia"/>
-              </a:defRPr>
-            </a:pPr>
-            <a:r>
-              <a:rPr sz="2400" b="0">
-                <a:solidFill>
-                  <a:srgbClr val="FFFFFF"/>
-                </a:solidFill>
-                <a:latin typeface="Georgia"/>
-                <a:ea typeface="Georgia"/>
-                <a:cs typeface="Georgia"/>
-              </a:rPr>
-              <a:t>Find an example of each C type in your program.</a:t>
+              <a:buNone/>
+              <a:defRPr sz="2100" b="0">
+                <a:solidFill>
+                  <a:srgbClr val="7DDC93"/>
+                </a:solidFill>
+                <a:latin typeface="Menlo"/>
+                <a:ea typeface="Menlo"/>
+                <a:cs typeface="Menlo"/>
+              </a:defRPr>
+            </a:pPr>
+            <a:r>
+              <a:rPr sz="2100" b="0">
+                <a:solidFill>
+                  <a:srgbClr val="7DDC93"/>
+                </a:solidFill>
+                <a:latin typeface="Menlo"/>
+                <a:ea typeface="Menlo"/>
+                <a:cs typeface="Menlo"/>
+              </a:rPr>
+              <a:t>1  Predict and run the starting values</a:t>
             </a:r>
           </a:p>
         </p:txBody>
@@ -12031,19 +14081,19 @@
           <p:cNvPr id="6" name="">
             <a:extLst xmlns:a="http://schemas.openxmlformats.org/drawingml/2006/main">
               <a:ext uri="{FF2B5EF4-FFF2-40B4-BE49-F238E27FC236}">
-                <a16:creationId xmlns:a16="http://schemas.microsoft.com/office/drawing/2014/main" id="{E2F66A7A-BD79-45BF-AA47-67A39C746AC1}"/>
-              </a:ext>
-            </a:extLst>
-          </p:cNvPr>
-          <p:cNvSpPr>
-            <a:spLocks xmlns:a="http://schemas.openxmlformats.org/drawingml/2006/main" noGrp="1"/>
-          </p:cNvSpPr>
-          <p:nvPr/>
-        </p:nvSpPr>
-        <p:spPr>
-          <a:xfrm xmlns:a="http://schemas.openxmlformats.org/drawingml/2006/main">
-            <a:off x="590550" y="4095750"/>
-            <a:ext cx="10572750" cy="809625"/>
+                <a16:creationId xmlns:a16="http://schemas.microsoft.com/office/drawing/2014/main" id="{FC508024-6649-4F6B-98DA-2E8DAEFD470C}"/>
+              </a:ext>
+            </a:extLst>
+          </p:cNvPr>
+          <p:cNvSpPr>
+            <a:spLocks xmlns:a="http://schemas.openxmlformats.org/drawingml/2006/main" noGrp="1"/>
+          </p:cNvSpPr>
+          <p:nvPr/>
+        </p:nvSpPr>
+        <p:spPr>
+          <a:xfrm xmlns:a="http://schemas.openxmlformats.org/drawingml/2006/main">
+            <a:off x="590550" y="3762375"/>
+            <a:ext cx="10572750" cy="523875"/>
           </a:xfrm>
           <a:prstGeom xmlns:a="http://schemas.openxmlformats.org/drawingml/2006/main" prst="rect">
             <a:avLst/>
@@ -12060,37 +14110,108 @@
           </a:bodyPr>
           <a:lstStyle xmlns:a="http://schemas.openxmlformats.org/drawingml/2006/main">
             <a:defPPr>
-              <a:defRPr sz="2625" b="1">
-                <a:solidFill>
-                  <a:srgbClr val="F55A47"/>
-                </a:solidFill>
-                <a:latin typeface="Georgia"/>
-                <a:ea typeface="Georgia"/>
-                <a:cs typeface="Georgia"/>
+              <a:defRPr sz="2100" b="0">
+                <a:solidFill>
+                  <a:srgbClr val="7DDC93"/>
+                </a:solidFill>
+                <a:latin typeface="Menlo"/>
+                <a:ea typeface="Menlo"/>
+                <a:cs typeface="Menlo"/>
               </a:defRPr>
             </a:defPPr>
           </a:lstStyle>
           <a:p xmlns:a="http://schemas.openxmlformats.org/drawingml/2006/main">
             <a:pPr>
-              <a:defRPr sz="2625" b="1">
-                <a:solidFill>
-                  <a:srgbClr val="F55A47"/>
-                </a:solidFill>
-                <a:latin typeface="Georgia"/>
-                <a:ea typeface="Georgia"/>
-                <a:cs typeface="Georgia"/>
-              </a:defRPr>
-            </a:pPr>
-            <a:r>
-              <a:rPr sz="2625" b="1">
-                <a:solidFill>
-                  <a:srgbClr val="F55A47"/>
-                </a:solidFill>
-                <a:latin typeface="Georgia"/>
-                <a:ea typeface="Georgia"/>
-                <a:cs typeface="Georgia"/>
-              </a:rPr>
-              <a:t>Extend: 3,467 of 10,000 steps = 34.67%.</a:t>
+              <a:buNone/>
+              <a:defRPr sz="2100" b="0">
+                <a:solidFill>
+                  <a:srgbClr val="7DDC93"/>
+                </a:solidFill>
+                <a:latin typeface="Menlo"/>
+                <a:ea typeface="Menlo"/>
+                <a:cs typeface="Menlo"/>
+              </a:defRPr>
+            </a:pPr>
+            <a:r>
+              <a:rPr sz="2100" b="0">
+                <a:solidFill>
+                  <a:srgbClr val="7DDC93"/>
+                </a:solidFill>
+                <a:latin typeface="Menlo"/>
+                <a:ea typeface="Menlo"/>
+                <a:cs typeface="Menlo"/>
+              </a:rPr>
+              <a:t>2  Update metres walked to 250</a:t>
+            </a:r>
+          </a:p>
+        </p:txBody>
+      </p:sp>
+      <p:sp>
+        <p:nvSpPr>
+          <p:cNvPr id="7" name="">
+            <a:extLst xmlns:a="http://schemas.openxmlformats.org/drawingml/2006/main">
+              <a:ext uri="{FF2B5EF4-FFF2-40B4-BE49-F238E27FC236}">
+                <a16:creationId xmlns:a16="http://schemas.microsoft.com/office/drawing/2014/main" id="{5DF198B9-F046-4083-A6E4-67C2D90B62D2}"/>
+              </a:ext>
+            </a:extLst>
+          </p:cNvPr>
+          <p:cNvSpPr>
+            <a:spLocks xmlns:a="http://schemas.openxmlformats.org/drawingml/2006/main" noGrp="1"/>
+          </p:cNvSpPr>
+          <p:nvPr/>
+        </p:nvSpPr>
+        <p:spPr>
+          <a:xfrm xmlns:a="http://schemas.openxmlformats.org/drawingml/2006/main">
+            <a:off x="590550" y="4429125"/>
+            <a:ext cx="10572750" cy="523875"/>
+          </a:xfrm>
+          <a:prstGeom xmlns:a="http://schemas.openxmlformats.org/drawingml/2006/main" prst="rect">
+            <a:avLst/>
+          </a:prstGeom>
+          <a:noFill xmlns:a="http://schemas.openxmlformats.org/drawingml/2006/main"/>
+          <a:ln xmlns:a="http://schemas.openxmlformats.org/drawingml/2006/main" w="0">
+            <a:noFill/>
+            <a:prstDash val="solid"/>
+          </a:ln>
+        </p:spPr>
+        <p:txBody>
+          <a:bodyPr xmlns:a="http://schemas.openxmlformats.org/drawingml/2006/main" wrap="square" lIns="0" tIns="0" rIns="0" bIns="0" anchor="ctr">
+            <a:noAutofit/>
+          </a:bodyPr>
+          <a:lstStyle xmlns:a="http://schemas.openxmlformats.org/drawingml/2006/main">
+            <a:defPPr>
+              <a:defRPr sz="2100" b="0">
+                <a:solidFill>
+                  <a:srgbClr val="7DDC93"/>
+                </a:solidFill>
+                <a:latin typeface="Menlo"/>
+                <a:ea typeface="Menlo"/>
+                <a:cs typeface="Menlo"/>
+              </a:defRPr>
+            </a:defPPr>
+          </a:lstStyle>
+          <a:p xmlns:a="http://schemas.openxmlformats.org/drawingml/2006/main">
+            <a:pPr>
+              <a:buNone/>
+              <a:defRPr sz="2100" b="0">
+                <a:solidFill>
+                  <a:srgbClr val="7DDC93"/>
+                </a:solidFill>
+                <a:latin typeface="Menlo"/>
+                <a:ea typeface="Menlo"/>
+                <a:cs typeface="Menlo"/>
+              </a:defRPr>
+            </a:pPr>
+            <a:r>
+              <a:rPr sz="2100" b="0">
+                <a:solidFill>
+                  <a:srgbClr val="7DDC93"/>
+                </a:solidFill>
+                <a:latin typeface="Menlo"/>
+                <a:ea typeface="Menlo"/>
+                <a:cs typeface="Menlo"/>
+              </a:rPr>
+              <a:t>3  Calculate and print 31.25% progress</a:t>
             </a:r>
           </a:p>
         </p:txBody>
@@ -12098,7 +14219,7 @@
     </p:spTree>
     <p:extLst>
       <p:ext uri="{BB962C8B-B14F-4D97-AF65-F5344CB8AC3E}">
-        <p14:creationId xmlns:p14="http://schemas.microsoft.com/office/powerpoint/2010/main" val="74779420"/>
+        <p14:creationId xmlns:p14="http://schemas.microsoft.com/office/powerpoint/2010/main" val="1090100035"/>
       </p:ext>
     </p:extLst>
   </p:cSld>
@@ -12126,10 +14247,10 @@
       </p:grpSpPr>
       <p:sp>
         <p:nvSpPr>
-          <p:cNvPr id="11" name="">
-            <a:extLst xmlns:a="http://schemas.openxmlformats.org/drawingml/2006/main">
-              <a:ext uri="{FF2B5EF4-FFF2-40B4-BE49-F238E27FC236}">
-                <a16:creationId xmlns:a16="http://schemas.microsoft.com/office/drawing/2014/main" id="{9199D3F1-CB8E-48B8-B459-E59805E674EB}"/>
+          <p:cNvPr id="7" name="">
+            <a:extLst xmlns:a="http://schemas.openxmlformats.org/drawingml/2006/main">
+              <a:ext uri="{FF2B5EF4-FFF2-40B4-BE49-F238E27FC236}">
+                <a16:creationId xmlns:a16="http://schemas.microsoft.com/office/drawing/2014/main" id="{3A410F4A-AA90-404F-B5FF-918A01693B24}"/>
               </a:ext>
             </a:extLst>
           </p:cNvPr>
@@ -12170,6 +14291,7 @@
           </a:lstStyle>
           <a:p xmlns:a="http://schemas.openxmlformats.org/drawingml/2006/main">
             <a:pPr>
+              <a:buNone/>
               <a:defRPr sz="3675" b="1">
                 <a:solidFill>
                   <a:srgbClr val="FFFFFF"/>
@@ -12188,7 +14310,7 @@
                 <a:ea typeface="Georgia"/>
                 <a:cs typeface="Georgia"/>
               </a:rPr>
-              <a:t>Submit your evidence</a:t>
+              <a:t>Lab: test and extend</a:t>
             </a:r>
           </a:p>
         </p:txBody>
@@ -12198,7 +14320,7 @@
           <p:cNvPr id="2" name="">
             <a:extLst xmlns:a="http://schemas.openxmlformats.org/drawingml/2006/main">
               <a:ext uri="{FF2B5EF4-FFF2-40B4-BE49-F238E27FC236}">
-                <a16:creationId xmlns:a16="http://schemas.microsoft.com/office/drawing/2014/main" id="{68449FD6-7C34-4E40-B97A-8F7143ACD89B}"/>
+                <a16:creationId xmlns:a16="http://schemas.microsoft.com/office/drawing/2014/main" id="{2DDFE051-FC18-4DBC-941A-195DE34244A7}"/>
               </a:ext>
             </a:extLst>
           </p:cNvPr>
@@ -12239,6 +14361,7 @@
           </a:lstStyle>
           <a:p xmlns:a="http://schemas.openxmlformats.org/drawingml/2006/main">
             <a:pPr>
+              <a:buNone/>
               <a:defRPr sz="1500" b="1">
                 <a:solidFill>
                   <a:srgbClr val="F55A47"/>
@@ -12267,7 +14390,7 @@
           <p:cNvPr id="3" name="">
             <a:extLst xmlns:a="http://schemas.openxmlformats.org/drawingml/2006/main">
               <a:ext uri="{FF2B5EF4-FFF2-40B4-BE49-F238E27FC236}">
-                <a16:creationId xmlns:a16="http://schemas.microsoft.com/office/drawing/2014/main" id="{E4AA9432-D453-4127-B052-CFF3BE6E9C6B}"/>
+                <a16:creationId xmlns:a16="http://schemas.microsoft.com/office/drawing/2014/main" id="{572390DB-3219-4461-BD43-F9A8B1593DAC}"/>
               </a:ext>
             </a:extLst>
           </p:cNvPr>
@@ -12308,6 +14431,7 @@
           </a:lstStyle>
           <a:p xmlns:a="http://schemas.openxmlformats.org/drawingml/2006/main">
             <a:pPr>
+              <a:buNone/>
               <a:defRPr sz="1200" b="0">
                 <a:solidFill>
                   <a:srgbClr val="C8C8CC"/>
@@ -12327,6 +14451,455 @@
                 <a:cs typeface="Menlo"/>
               </a:rPr>
               <a:t>C FUNDAMENTALS  •  26</a:t>
+            </a:r>
+          </a:p>
+        </p:txBody>
+      </p:sp>
+      <p:sp>
+        <p:nvSpPr>
+          <p:cNvPr id="4" name="">
+            <a:extLst xmlns:a="http://schemas.openxmlformats.org/drawingml/2006/main">
+              <a:ext uri="{FF2B5EF4-FFF2-40B4-BE49-F238E27FC236}">
+                <a16:creationId xmlns:a16="http://schemas.microsoft.com/office/drawing/2014/main" id="{E38F6828-748F-4254-A75C-887BDEDFF750}"/>
+              </a:ext>
+            </a:extLst>
+          </p:cNvPr>
+          <p:cNvSpPr>
+            <a:spLocks xmlns:a="http://schemas.openxmlformats.org/drawingml/2006/main" noGrp="1"/>
+          </p:cNvSpPr>
+          <p:nvPr/>
+        </p:nvSpPr>
+        <p:spPr>
+          <a:xfrm xmlns:a="http://schemas.openxmlformats.org/drawingml/2006/main">
+            <a:off x="590550" y="2000250"/>
+            <a:ext cx="10572750" cy="742950"/>
+          </a:xfrm>
+          <a:prstGeom xmlns:a="http://schemas.openxmlformats.org/drawingml/2006/main" prst="rect">
+            <a:avLst/>
+          </a:prstGeom>
+          <a:noFill xmlns:a="http://schemas.openxmlformats.org/drawingml/2006/main"/>
+          <a:ln xmlns:a="http://schemas.openxmlformats.org/drawingml/2006/main" w="0">
+            <a:noFill/>
+            <a:prstDash val="solid"/>
+          </a:ln>
+        </p:spPr>
+        <p:txBody>
+          <a:bodyPr xmlns:a="http://schemas.openxmlformats.org/drawingml/2006/main" wrap="square" lIns="0" tIns="0" rIns="0" bIns="0" anchor="ctr">
+            <a:noAutofit/>
+          </a:bodyPr>
+          <a:lstStyle xmlns:a="http://schemas.openxmlformats.org/drawingml/2006/main">
+            <a:defPPr>
+              <a:defRPr sz="2400" b="0">
+                <a:solidFill>
+                  <a:srgbClr val="FFFFFF"/>
+                </a:solidFill>
+                <a:latin typeface="Georgia"/>
+                <a:ea typeface="Georgia"/>
+                <a:cs typeface="Georgia"/>
+              </a:defRPr>
+            </a:defPPr>
+          </a:lstStyle>
+          <a:p xmlns:a="http://schemas.openxmlformats.org/drawingml/2006/main">
+            <a:pPr>
+              <a:buNone/>
+              <a:defRPr sz="2400" b="0">
+                <a:solidFill>
+                  <a:srgbClr val="FFFFFF"/>
+                </a:solidFill>
+                <a:latin typeface="Georgia"/>
+                <a:ea typeface="Georgia"/>
+                <a:cs typeface="Georgia"/>
+              </a:defRPr>
+            </a:pPr>
+            <a:r>
+              <a:rPr sz="2400" b="0">
+                <a:solidFill>
+                  <a:srgbClr val="FFFFFF"/>
+                </a:solidFill>
+                <a:latin typeface="Georgia"/>
+                <a:ea typeface="Georgia"/>
+                <a:cs typeface="Georgia"/>
+              </a:rPr>
+              <a:t>Test a const assignment; record the diagnostic.</a:t>
+            </a:r>
+          </a:p>
+        </p:txBody>
+      </p:sp>
+      <p:sp>
+        <p:nvSpPr>
+          <p:cNvPr id="5" name="">
+            <a:extLst xmlns:a="http://schemas.openxmlformats.org/drawingml/2006/main">
+              <a:ext uri="{FF2B5EF4-FFF2-40B4-BE49-F238E27FC236}">
+                <a16:creationId xmlns:a16="http://schemas.microsoft.com/office/drawing/2014/main" id="{C253F4F9-181E-4C6A-ACCD-A22A3939E619}"/>
+              </a:ext>
+            </a:extLst>
+          </p:cNvPr>
+          <p:cNvSpPr>
+            <a:spLocks xmlns:a="http://schemas.openxmlformats.org/drawingml/2006/main" noGrp="1"/>
+          </p:cNvSpPr>
+          <p:nvPr/>
+        </p:nvSpPr>
+        <p:spPr>
+          <a:xfrm xmlns:a="http://schemas.openxmlformats.org/drawingml/2006/main">
+            <a:off x="590550" y="3028950"/>
+            <a:ext cx="10572750" cy="742950"/>
+          </a:xfrm>
+          <a:prstGeom xmlns:a="http://schemas.openxmlformats.org/drawingml/2006/main" prst="rect">
+            <a:avLst/>
+          </a:prstGeom>
+          <a:noFill xmlns:a="http://schemas.openxmlformats.org/drawingml/2006/main"/>
+          <a:ln xmlns:a="http://schemas.openxmlformats.org/drawingml/2006/main" w="0">
+            <a:noFill/>
+            <a:prstDash val="solid"/>
+          </a:ln>
+        </p:spPr>
+        <p:txBody>
+          <a:bodyPr xmlns:a="http://schemas.openxmlformats.org/drawingml/2006/main" wrap="square" lIns="0" tIns="0" rIns="0" bIns="0" anchor="ctr">
+            <a:noAutofit/>
+          </a:bodyPr>
+          <a:lstStyle xmlns:a="http://schemas.openxmlformats.org/drawingml/2006/main">
+            <a:defPPr>
+              <a:defRPr sz="2400" b="0">
+                <a:solidFill>
+                  <a:srgbClr val="FFFFFF"/>
+                </a:solidFill>
+                <a:latin typeface="Georgia"/>
+                <a:ea typeface="Georgia"/>
+                <a:cs typeface="Georgia"/>
+              </a:defRPr>
+            </a:defPPr>
+          </a:lstStyle>
+          <a:p xmlns:a="http://schemas.openxmlformats.org/drawingml/2006/main">
+            <a:pPr>
+              <a:buNone/>
+              <a:defRPr sz="2400" b="0">
+                <a:solidFill>
+                  <a:srgbClr val="FFFFFF"/>
+                </a:solidFill>
+                <a:latin typeface="Georgia"/>
+                <a:ea typeface="Georgia"/>
+                <a:cs typeface="Georgia"/>
+              </a:defRPr>
+            </a:pPr>
+            <a:r>
+              <a:rPr sz="2400" b="0">
+                <a:solidFill>
+                  <a:srgbClr val="FFFFFF"/>
+                </a:solidFill>
+                <a:latin typeface="Georgia"/>
+                <a:ea typeface="Georgia"/>
+                <a:cs typeface="Georgia"/>
+              </a:rPr>
+              <a:t>Find an example of each C type in your program.</a:t>
+            </a:r>
+          </a:p>
+        </p:txBody>
+      </p:sp>
+      <p:sp>
+        <p:nvSpPr>
+          <p:cNvPr id="6" name="">
+            <a:extLst xmlns:a="http://schemas.openxmlformats.org/drawingml/2006/main">
+              <a:ext uri="{FF2B5EF4-FFF2-40B4-BE49-F238E27FC236}">
+                <a16:creationId xmlns:a16="http://schemas.microsoft.com/office/drawing/2014/main" id="{E2F66A7A-BD79-45BF-AA47-67A39C746AC1}"/>
+              </a:ext>
+            </a:extLst>
+          </p:cNvPr>
+          <p:cNvSpPr>
+            <a:spLocks xmlns:a="http://schemas.openxmlformats.org/drawingml/2006/main" noGrp="1"/>
+          </p:cNvSpPr>
+          <p:nvPr/>
+        </p:nvSpPr>
+        <p:spPr>
+          <a:xfrm xmlns:a="http://schemas.openxmlformats.org/drawingml/2006/main">
+            <a:off x="590550" y="4095750"/>
+            <a:ext cx="10572750" cy="809625"/>
+          </a:xfrm>
+          <a:prstGeom xmlns:a="http://schemas.openxmlformats.org/drawingml/2006/main" prst="rect">
+            <a:avLst/>
+          </a:prstGeom>
+          <a:noFill xmlns:a="http://schemas.openxmlformats.org/drawingml/2006/main"/>
+          <a:ln xmlns:a="http://schemas.openxmlformats.org/drawingml/2006/main" w="0">
+            <a:noFill/>
+            <a:prstDash val="solid"/>
+          </a:ln>
+        </p:spPr>
+        <p:txBody>
+          <a:bodyPr xmlns:a="http://schemas.openxmlformats.org/drawingml/2006/main" wrap="square" lIns="0" tIns="0" rIns="0" bIns="0" anchor="ctr">
+            <a:noAutofit/>
+          </a:bodyPr>
+          <a:lstStyle xmlns:a="http://schemas.openxmlformats.org/drawingml/2006/main">
+            <a:defPPr>
+              <a:defRPr sz="2625" b="1">
+                <a:solidFill>
+                  <a:srgbClr val="F55A47"/>
+                </a:solidFill>
+                <a:latin typeface="Georgia"/>
+                <a:ea typeface="Georgia"/>
+                <a:cs typeface="Georgia"/>
+              </a:defRPr>
+            </a:defPPr>
+          </a:lstStyle>
+          <a:p xmlns:a="http://schemas.openxmlformats.org/drawingml/2006/main">
+            <a:pPr>
+              <a:buNone/>
+              <a:defRPr sz="2625" b="1">
+                <a:solidFill>
+                  <a:srgbClr val="F55A47"/>
+                </a:solidFill>
+                <a:latin typeface="Georgia"/>
+                <a:ea typeface="Georgia"/>
+                <a:cs typeface="Georgia"/>
+              </a:defRPr>
+            </a:pPr>
+            <a:r>
+              <a:rPr sz="2625" b="1">
+                <a:solidFill>
+                  <a:srgbClr val="F55A47"/>
+                </a:solidFill>
+                <a:latin typeface="Georgia"/>
+                <a:ea typeface="Georgia"/>
+                <a:cs typeface="Georgia"/>
+              </a:rPr>
+              <a:t>Extend: 3,467 of 10,000 steps = 34.67%.</a:t>
+            </a:r>
+          </a:p>
+        </p:txBody>
+      </p:sp>
+    </p:spTree>
+    <p:extLst>
+      <p:ext uri="{BB962C8B-B14F-4D97-AF65-F5344CB8AC3E}">
+        <p14:creationId xmlns:p14="http://schemas.microsoft.com/office/powerpoint/2010/main" val="74779420"/>
+      </p:ext>
+    </p:extLst>
+  </p:cSld>
+</p:sld>
+</file>
+
+<file path=ppt/slides/slide27.xml><?xml version="1.0" encoding="utf-8"?>
+<p:sld xmlns:p="http://schemas.openxmlformats.org/presentationml/2006/main">
+  <p:cSld>
+    <p:bg>
+      <p:bgPr>
+        <a:solidFill xmlns:a="http://schemas.openxmlformats.org/drawingml/2006/main">
+          <a:srgbClr val="050505"/>
+        </a:solidFill>
+      </p:bgPr>
+    </p:bg>
+    <p:spTree>
+      <p:nvGrpSpPr>
+        <p:cNvPr id="1" name=""/>
+        <p:cNvGrpSpPr/>
+        <p:nvPr/>
+      </p:nvGrpSpPr>
+      <p:grpSpPr>
+        <a:xfrm xmlns:a="http://schemas.openxmlformats.org/drawingml/2006/main"/>
+      </p:grpSpPr>
+      <p:sp>
+        <p:nvSpPr>
+          <p:cNvPr id="11" name="">
+            <a:extLst xmlns:a="http://schemas.openxmlformats.org/drawingml/2006/main">
+              <a:ext uri="{FF2B5EF4-FFF2-40B4-BE49-F238E27FC236}">
+                <a16:creationId xmlns:a16="http://schemas.microsoft.com/office/drawing/2014/main" id="{9199D3F1-CB8E-48B8-B459-E59805E674EB}"/>
+              </a:ext>
+            </a:extLst>
+          </p:cNvPr>
+          <p:cNvSpPr>
+            <a:spLocks xmlns:a="http://schemas.openxmlformats.org/drawingml/2006/main" noGrp="1"/>
+          </p:cNvSpPr>
+          <p:nvPr/>
+        </p:nvSpPr>
+        <p:spPr>
+          <a:xfrm xmlns:a="http://schemas.openxmlformats.org/drawingml/2006/main">
+            <a:off x="590550" y="447675"/>
+            <a:ext cx="10953750" cy="781050"/>
+          </a:xfrm>
+          <a:prstGeom xmlns:a="http://schemas.openxmlformats.org/drawingml/2006/main" prst="rect">
+            <a:avLst/>
+          </a:prstGeom>
+          <a:noFill xmlns:a="http://schemas.openxmlformats.org/drawingml/2006/main"/>
+          <a:ln xmlns:a="http://schemas.openxmlformats.org/drawingml/2006/main" w="0">
+            <a:noFill/>
+            <a:prstDash val="solid"/>
+          </a:ln>
+        </p:spPr>
+        <p:txBody>
+          <a:bodyPr xmlns:a="http://schemas.openxmlformats.org/drawingml/2006/main" wrap="square" lIns="0" tIns="0" rIns="0" bIns="0" anchor="ctr">
+            <a:noAutofit/>
+          </a:bodyPr>
+          <a:lstStyle xmlns:a="http://schemas.openxmlformats.org/drawingml/2006/main">
+            <a:defPPr>
+              <a:defRPr sz="3675" b="1">
+                <a:solidFill>
+                  <a:srgbClr val="FFFFFF"/>
+                </a:solidFill>
+                <a:latin typeface="Georgia"/>
+                <a:ea typeface="Georgia"/>
+                <a:cs typeface="Georgia"/>
+              </a:defRPr>
+            </a:defPPr>
+          </a:lstStyle>
+          <a:p xmlns:a="http://schemas.openxmlformats.org/drawingml/2006/main">
+            <a:pPr>
+              <a:buNone/>
+              <a:defRPr sz="3675" b="1">
+                <a:solidFill>
+                  <a:srgbClr val="FFFFFF"/>
+                </a:solidFill>
+                <a:latin typeface="Georgia"/>
+                <a:ea typeface="Georgia"/>
+                <a:cs typeface="Georgia"/>
+              </a:defRPr>
+            </a:pPr>
+            <a:r>
+              <a:rPr sz="3675" b="1">
+                <a:solidFill>
+                  <a:srgbClr val="FFFFFF"/>
+                </a:solidFill>
+                <a:latin typeface="Georgia"/>
+                <a:ea typeface="Georgia"/>
+                <a:cs typeface="Georgia"/>
+              </a:rPr>
+              <a:t>Submit your evidence</a:t>
+            </a:r>
+          </a:p>
+        </p:txBody>
+      </p:sp>
+      <p:sp>
+        <p:nvSpPr>
+          <p:cNvPr id="2" name="">
+            <a:extLst xmlns:a="http://schemas.openxmlformats.org/drawingml/2006/main">
+              <a:ext uri="{FF2B5EF4-FFF2-40B4-BE49-F238E27FC236}">
+                <a16:creationId xmlns:a16="http://schemas.microsoft.com/office/drawing/2014/main" id="{68449FD6-7C34-4E40-B97A-8F7143ACD89B}"/>
+              </a:ext>
+            </a:extLst>
+          </p:cNvPr>
+          <p:cNvSpPr>
+            <a:spLocks xmlns:a="http://schemas.openxmlformats.org/drawingml/2006/main" noGrp="1"/>
+          </p:cNvSpPr>
+          <p:nvPr/>
+        </p:nvSpPr>
+        <p:spPr>
+          <a:xfrm xmlns:a="http://schemas.openxmlformats.org/drawingml/2006/main">
+            <a:off x="590550" y="1343025"/>
+            <a:ext cx="6667500" cy="333375"/>
+          </a:xfrm>
+          <a:prstGeom xmlns:a="http://schemas.openxmlformats.org/drawingml/2006/main" prst="rect">
+            <a:avLst/>
+          </a:prstGeom>
+          <a:noFill xmlns:a="http://schemas.openxmlformats.org/drawingml/2006/main"/>
+          <a:ln xmlns:a="http://schemas.openxmlformats.org/drawingml/2006/main" w="0">
+            <a:noFill/>
+            <a:prstDash val="solid"/>
+          </a:ln>
+        </p:spPr>
+        <p:txBody>
+          <a:bodyPr xmlns:a="http://schemas.openxmlformats.org/drawingml/2006/main" wrap="square" lIns="0" tIns="0" rIns="0" bIns="0" anchor="ctr">
+            <a:noAutofit/>
+          </a:bodyPr>
+          <a:lstStyle xmlns:a="http://schemas.openxmlformats.org/drawingml/2006/main">
+            <a:defPPr>
+              <a:defRPr sz="1500" b="1">
+                <a:solidFill>
+                  <a:srgbClr val="F55A47"/>
+                </a:solidFill>
+                <a:latin typeface="Menlo"/>
+                <a:ea typeface="Menlo"/>
+                <a:cs typeface="Menlo"/>
+              </a:defRPr>
+            </a:defPPr>
+          </a:lstStyle>
+          <a:p xmlns:a="http://schemas.openxmlformats.org/drawingml/2006/main">
+            <a:pPr>
+              <a:buNone/>
+              <a:defRPr sz="1500" b="1">
+                <a:solidFill>
+                  <a:srgbClr val="F55A47"/>
+                </a:solidFill>
+                <a:latin typeface="Menlo"/>
+                <a:ea typeface="Menlo"/>
+                <a:cs typeface="Menlo"/>
+              </a:defRPr>
+            </a:pPr>
+            <a:r>
+              <a:rPr sz="1500" b="1">
+                <a:solidFill>
+                  <a:srgbClr val="F55A47"/>
+                </a:solidFill>
+                <a:latin typeface="Menlo"/>
+                <a:ea typeface="Menlo"/>
+                <a:cs typeface="Menlo"/>
+              </a:rPr>
+              <a:t>LAB SESSION</a:t>
+            </a:r>
+          </a:p>
+        </p:txBody>
+      </p:sp>
+      <p:sp>
+        <p:nvSpPr>
+          <p:cNvPr id="3" name="">
+            <a:extLst xmlns:a="http://schemas.openxmlformats.org/drawingml/2006/main">
+              <a:ext uri="{FF2B5EF4-FFF2-40B4-BE49-F238E27FC236}">
+                <a16:creationId xmlns:a16="http://schemas.microsoft.com/office/drawing/2014/main" id="{E4AA9432-D453-4127-B052-CFF3BE6E9C6B}"/>
+              </a:ext>
+            </a:extLst>
+          </p:cNvPr>
+          <p:cNvSpPr>
+            <a:spLocks xmlns:a="http://schemas.openxmlformats.org/drawingml/2006/main" noGrp="1"/>
+          </p:cNvSpPr>
+          <p:nvPr/>
+        </p:nvSpPr>
+        <p:spPr>
+          <a:xfrm xmlns:a="http://schemas.openxmlformats.org/drawingml/2006/main">
+            <a:off x="590550" y="6410325"/>
+            <a:ext cx="6381750" cy="209550"/>
+          </a:xfrm>
+          <a:prstGeom xmlns:a="http://schemas.openxmlformats.org/drawingml/2006/main" prst="rect">
+            <a:avLst/>
+          </a:prstGeom>
+          <a:noFill xmlns:a="http://schemas.openxmlformats.org/drawingml/2006/main"/>
+          <a:ln xmlns:a="http://schemas.openxmlformats.org/drawingml/2006/main" w="0">
+            <a:noFill/>
+            <a:prstDash val="solid"/>
+          </a:ln>
+        </p:spPr>
+        <p:txBody>
+          <a:bodyPr xmlns:a="http://schemas.openxmlformats.org/drawingml/2006/main" wrap="square" lIns="0" tIns="0" rIns="0" bIns="0" anchor="ctr">
+            <a:noAutofit/>
+          </a:bodyPr>
+          <a:lstStyle xmlns:a="http://schemas.openxmlformats.org/drawingml/2006/main">
+            <a:defPPr>
+              <a:defRPr sz="1200" b="0">
+                <a:solidFill>
+                  <a:srgbClr val="C8C8CC"/>
+                </a:solidFill>
+                <a:latin typeface="Menlo"/>
+                <a:ea typeface="Menlo"/>
+                <a:cs typeface="Menlo"/>
+              </a:defRPr>
+            </a:defPPr>
+          </a:lstStyle>
+          <a:p xmlns:a="http://schemas.openxmlformats.org/drawingml/2006/main">
+            <a:pPr>
+              <a:buNone/>
+              <a:defRPr sz="1200" b="0">
+                <a:solidFill>
+                  <a:srgbClr val="C8C8CC"/>
+                </a:solidFill>
+                <a:latin typeface="Menlo"/>
+                <a:ea typeface="Menlo"/>
+                <a:cs typeface="Menlo"/>
+              </a:defRPr>
+            </a:pPr>
+            <a:r>
+              <a:rPr sz="1200" b="0">
+                <a:solidFill>
+                  <a:srgbClr val="C8C8CC"/>
+                </a:solidFill>
+                <a:latin typeface="Menlo"/>
+                <a:ea typeface="Menlo"/>
+                <a:cs typeface="Menlo"/>
+              </a:rPr>
+              <a:t>C FUNDAMENTALS  •  27</a:t>
             </a:r>
           </a:p>
         </p:txBody>
@@ -12377,6 +14950,7 @@
           </a:lstStyle>
           <a:p xmlns:a="http://schemas.openxmlformats.org/drawingml/2006/main">
             <a:pPr>
+              <a:buNone/>
               <a:defRPr sz="2475" b="0">
                 <a:solidFill>
                   <a:srgbClr val="FFFFFF"/>
@@ -12446,6 +15020,7 @@
           </a:lstStyle>
           <a:p xmlns:a="http://schemas.openxmlformats.org/drawingml/2006/main">
             <a:pPr>
+              <a:buNone/>
               <a:defRPr sz="2475" b="0">
                 <a:solidFill>
                   <a:srgbClr val="FFFFFF"/>
@@ -12515,6 +15090,7 @@
           </a:lstStyle>
           <a:p xmlns:a="http://schemas.openxmlformats.org/drawingml/2006/main">
             <a:pPr>
+              <a:buNone/>
               <a:defRPr sz="2475" b="0">
                 <a:solidFill>
                   <a:srgbClr val="FFFFFF"/>
@@ -12584,6 +15160,7 @@
           </a:lstStyle>
           <a:p xmlns:a="http://schemas.openxmlformats.org/drawingml/2006/main">
             <a:pPr>
+              <a:buNone/>
               <a:defRPr sz="2025" b="0">
                 <a:solidFill>
                   <a:srgbClr val="C8C8CC"/>
@@ -12643,7 +15220,7 @@
           <p:cNvPr id="9" name="">
             <a:extLst xmlns:a="http://schemas.openxmlformats.org/drawingml/2006/main">
               <a:ext uri="{FF2B5EF4-FFF2-40B4-BE49-F238E27FC236}">
-                <a16:creationId xmlns:a16="http://schemas.microsoft.com/office/drawing/2014/main" id="{D8EBFF53-6615-477A-87F3-5A5B34FEF554}"/>
+                <a16:creationId xmlns:a16="http://schemas.microsoft.com/office/drawing/2014/main" id="{81F5CAE8-2FC9-44A9-80E6-8893E4FD19B3}"/>
               </a:ext>
             </a:extLst>
           </p:cNvPr>
@@ -12653,7 +15230,7 @@
           <p:nvPr/>
         </p:nvPicPr>
         <p:blipFill>
-          <a:blip xmlns:r="http://schemas.openxmlformats.org/officeDocument/2006/relationships" xmlns:a="http://schemas.openxmlformats.org/drawingml/2006/main" r:embed="R684c710258ce40d9"/>
+          <a:blip xmlns:r="http://schemas.openxmlformats.org/officeDocument/2006/relationships" xmlns:a="http://schemas.openxmlformats.org/drawingml/2006/main" r:embed="R1de20fd238b74daf"/>
           <a:stretch xmlns:a="http://schemas.openxmlformats.org/drawingml/2006/main"/>
         </p:blipFill>
         <p:spPr>
@@ -12712,6 +15289,7 @@
           </a:lstStyle>
           <a:p xmlns:a="http://schemas.openxmlformats.org/drawingml/2006/main">
             <a:pPr>
+              <a:buNone/>
               <a:defRPr sz="1275" b="0">
                 <a:solidFill>
                   <a:srgbClr val="C8C8CC"/>
@@ -12810,6 +15388,7 @@
           </a:lstStyle>
           <a:p xmlns:a="http://schemas.openxmlformats.org/drawingml/2006/main">
             <a:pPr>
+              <a:buNone/>
               <a:defRPr sz="3675" b="1">
                 <a:solidFill>
                   <a:srgbClr val="FFFFFF"/>
@@ -12879,6 +15458,7 @@
           </a:lstStyle>
           <a:p xmlns:a="http://schemas.openxmlformats.org/drawingml/2006/main">
             <a:pPr>
+              <a:buNone/>
               <a:defRPr sz="1200" b="0">
                 <a:solidFill>
                   <a:srgbClr val="C8C8CC"/>
@@ -12948,6 +15528,7 @@
           </a:lstStyle>
           <a:p xmlns:a="http://schemas.openxmlformats.org/drawingml/2006/main">
             <a:pPr>
+              <a:buNone/>
               <a:defRPr sz="1950" b="1">
                 <a:solidFill>
                   <a:srgbClr val="FFFFFF"/>
@@ -13017,6 +15598,7 @@
           </a:lstStyle>
           <a:p xmlns:a="http://schemas.openxmlformats.org/drawingml/2006/main">
             <a:pPr>
+              <a:buNone/>
               <a:defRPr sz="1950" b="1">
                 <a:solidFill>
                   <a:srgbClr val="7DDC93"/>
@@ -13086,6 +15668,7 @@
           </a:lstStyle>
           <a:p xmlns:a="http://schemas.openxmlformats.org/drawingml/2006/main">
             <a:pPr>
+              <a:buNone/>
               <a:defRPr sz="1950" b="1">
                 <a:solidFill>
                   <a:srgbClr val="FFFFFF"/>
@@ -13217,6 +15800,7 @@
           </a:lstStyle>
           <a:p xmlns:a="http://schemas.openxmlformats.org/drawingml/2006/main">
             <a:pPr>
+              <a:buNone/>
               <a:defRPr sz="2025" b="0">
                 <a:solidFill>
                   <a:srgbClr val="FFFFFF"/>
@@ -13286,6 +15870,7 @@
           </a:lstStyle>
           <a:p xmlns:a="http://schemas.openxmlformats.org/drawingml/2006/main">
             <a:pPr>
+              <a:buNone/>
               <a:defRPr sz="2025" b="0">
                 <a:solidFill>
                   <a:srgbClr val="7DDC93"/>
@@ -13355,6 +15940,7 @@
           </a:lstStyle>
           <a:p xmlns:a="http://schemas.openxmlformats.org/drawingml/2006/main">
             <a:pPr>
+              <a:buNone/>
               <a:defRPr sz="2025" b="0">
                 <a:solidFill>
                   <a:srgbClr val="FFFFFF"/>
@@ -13424,6 +16010,7 @@
           </a:lstStyle>
           <a:p xmlns:a="http://schemas.openxmlformats.org/drawingml/2006/main">
             <a:pPr>
+              <a:buNone/>
               <a:defRPr sz="2550" b="1">
                 <a:solidFill>
                   <a:srgbClr val="F55A47"/>
@@ -13522,6 +16109,7 @@
           </a:lstStyle>
           <a:p xmlns:a="http://schemas.openxmlformats.org/drawingml/2006/main">
             <a:pPr>
+              <a:buNone/>
               <a:defRPr sz="3675" b="1">
                 <a:solidFill>
                   <a:srgbClr val="FFFFFF"/>
@@ -13591,6 +16179,7 @@
           </a:lstStyle>
           <a:p xmlns:a="http://schemas.openxmlformats.org/drawingml/2006/main">
             <a:pPr>
+              <a:buNone/>
               <a:defRPr sz="1200" b="0">
                 <a:solidFill>
                   <a:srgbClr val="C8C8CC"/>
@@ -13660,6 +16249,7 @@
           </a:lstStyle>
           <a:p xmlns:a="http://schemas.openxmlformats.org/drawingml/2006/main">
             <a:pPr>
+              <a:buNone/>
               <a:defRPr sz="2325" b="1">
                 <a:solidFill>
                   <a:srgbClr val="7DDC93"/>
@@ -13729,6 +16319,7 @@
           </a:lstStyle>
           <a:p xmlns:a="http://schemas.openxmlformats.org/drawingml/2006/main">
             <a:pPr>
+              <a:buNone/>
               <a:defRPr sz="2175" b="0">
                 <a:solidFill>
                   <a:srgbClr val="FFFFFF"/>
@@ -13798,6 +16389,7 @@
           </a:lstStyle>
           <a:p xmlns:a="http://schemas.openxmlformats.org/drawingml/2006/main">
             <a:pPr>
+              <a:buNone/>
               <a:defRPr sz="2325" b="1">
                 <a:solidFill>
                   <a:srgbClr val="F55A47"/>
@@ -13867,6 +16459,7 @@
           </a:lstStyle>
           <a:p xmlns:a="http://schemas.openxmlformats.org/drawingml/2006/main">
             <a:pPr>
+              <a:buNone/>
               <a:defRPr sz="2175" b="0">
                 <a:solidFill>
                   <a:srgbClr val="FFFFFF"/>
@@ -13936,6 +16529,7 @@
           </a:lstStyle>
           <a:p xmlns:a="http://schemas.openxmlformats.org/drawingml/2006/main">
             <a:pPr>
+              <a:buNone/>
               <a:defRPr sz="2475" b="0">
                 <a:solidFill>
                   <a:srgbClr val="C8C8CC"/>
@@ -14034,6 +16628,7 @@
           </a:lstStyle>
           <a:p xmlns:a="http://schemas.openxmlformats.org/drawingml/2006/main">
             <a:pPr>
+              <a:buNone/>
               <a:defRPr sz="3675" b="1">
                 <a:solidFill>
                   <a:srgbClr val="FFFFFF"/>
@@ -14103,6 +16698,7 @@
           </a:lstStyle>
           <a:p xmlns:a="http://schemas.openxmlformats.org/drawingml/2006/main">
             <a:pPr>
+              <a:buNone/>
               <a:defRPr sz="1200" b="0">
                 <a:solidFill>
                   <a:srgbClr val="C8C8CC"/>
@@ -14203,6 +16799,7 @@
           </a:lstStyle>
           <a:p xmlns:a="http://schemas.openxmlformats.org/drawingml/2006/main">
             <a:pPr>
+              <a:buNone/>
               <a:defRPr sz="2325" b="0">
                 <a:solidFill>
                   <a:srgbClr val="FFFFFF"/>
@@ -14226,6 +16823,7 @@
           </a:p>
           <a:p xmlns:a="http://schemas.openxmlformats.org/drawingml/2006/main">
             <a:pPr>
+              <a:buNone/>
               <a:defRPr sz="2325" b="0">
                 <a:solidFill>
                   <a:srgbClr val="FFFFFF"/>
@@ -14295,6 +16893,7 @@
           </a:lstStyle>
           <a:p xmlns:a="http://schemas.openxmlformats.org/drawingml/2006/main">
             <a:pPr>
+              <a:buNone/>
               <a:defRPr sz="2175" b="0">
                 <a:solidFill>
                   <a:srgbClr val="7DDC93"/>
@@ -14393,6 +16992,7 @@
           </a:lstStyle>
           <a:p xmlns:a="http://schemas.openxmlformats.org/drawingml/2006/main">
             <a:pPr>
+              <a:buNone/>
               <a:defRPr sz="3675" b="1">
                 <a:solidFill>
                   <a:srgbClr val="FFFFFF"/>
@@ -14462,6 +17062,7 @@
           </a:lstStyle>
           <a:p xmlns:a="http://schemas.openxmlformats.org/drawingml/2006/main">
             <a:pPr>
+              <a:buNone/>
               <a:defRPr sz="1200" b="0">
                 <a:solidFill>
                   <a:srgbClr val="C8C8CC"/>
@@ -14562,6 +17163,7 @@
           </a:lstStyle>
           <a:p xmlns:a="http://schemas.openxmlformats.org/drawingml/2006/main">
             <a:pPr>
+              <a:buNone/>
               <a:defRPr sz="2325" b="0">
                 <a:solidFill>
                   <a:srgbClr val="FFFFFF"/>
@@ -14585,6 +17187,7 @@
           </a:p>
           <a:p xmlns:a="http://schemas.openxmlformats.org/drawingml/2006/main">
             <a:pPr>
+              <a:buNone/>
               <a:defRPr sz="2325" b="0">
                 <a:solidFill>
                   <a:srgbClr val="FFFFFF"/>
@@ -14654,6 +17257,7 @@
           </a:lstStyle>
           <a:p xmlns:a="http://schemas.openxmlformats.org/drawingml/2006/main">
             <a:pPr>
+              <a:buNone/>
               <a:defRPr sz="2625" b="1">
                 <a:solidFill>
                   <a:srgbClr val="F55A47"/>
@@ -14752,6 +17356,7 @@
           </a:lstStyle>
           <a:p xmlns:a="http://schemas.openxmlformats.org/drawingml/2006/main">
             <a:pPr>
+              <a:buNone/>
               <a:defRPr sz="3675" b="1">
                 <a:solidFill>
                   <a:srgbClr val="FFFFFF"/>
@@ -14821,6 +17426,7 @@
           </a:lstStyle>
           <a:p xmlns:a="http://schemas.openxmlformats.org/drawingml/2006/main">
             <a:pPr>
+              <a:buNone/>
               <a:defRPr sz="1200" b="0">
                 <a:solidFill>
                   <a:srgbClr val="C8C8CC"/>
@@ -14921,6 +17527,7 @@
           </a:lstStyle>
           <a:p xmlns:a="http://schemas.openxmlformats.org/drawingml/2006/main">
             <a:pPr>
+              <a:buNone/>
               <a:defRPr sz="2100" b="0">
                 <a:solidFill>
                   <a:srgbClr val="FFFFFF"/>
@@ -14944,6 +17551,7 @@
           </a:p>
           <a:p xmlns:a="http://schemas.openxmlformats.org/drawingml/2006/main">
             <a:pPr>
+              <a:buNone/>
               <a:defRPr sz="2100" b="0">
                 <a:solidFill>
                   <a:srgbClr val="FFFFFF"/>
@@ -14967,6 +17575,7 @@
           </a:p>
           <a:p xmlns:a="http://schemas.openxmlformats.org/drawingml/2006/main">
             <a:pPr>
+              <a:buNone/>
               <a:defRPr sz="2100" b="0">
                 <a:solidFill>
                   <a:srgbClr val="FFFFFF"/>
@@ -14990,6 +17599,7 @@
           </a:p>
           <a:p xmlns:a="http://schemas.openxmlformats.org/drawingml/2006/main">
             <a:pPr>
+              <a:buNone/>
               <a:defRPr sz="2100" b="0">
                 <a:solidFill>
                   <a:srgbClr val="FFFFFF"/>
@@ -15059,6 +17669,7 @@
           </a:lstStyle>
           <a:p xmlns:a="http://schemas.openxmlformats.org/drawingml/2006/main">
             <a:pPr>
+              <a:buNone/>
               <a:defRPr sz="2325" b="1">
                 <a:solidFill>
                   <a:srgbClr val="7DDC93"/>
@@ -15157,6 +17768,7 @@
           </a:lstStyle>
           <a:p xmlns:a="http://schemas.openxmlformats.org/drawingml/2006/main">
             <a:pPr>
+              <a:buNone/>
               <a:defRPr sz="3675" b="1">
                 <a:solidFill>
                   <a:srgbClr val="FFFFFF"/>
@@ -15226,6 +17838,7 @@
           </a:lstStyle>
           <a:p xmlns:a="http://schemas.openxmlformats.org/drawingml/2006/main">
             <a:pPr>
+              <a:buNone/>
               <a:defRPr sz="1200" b="0">
                 <a:solidFill>
                   <a:srgbClr val="C8C8CC"/>
@@ -15326,6 +17939,7 @@
           </a:lstStyle>
           <a:p xmlns:a="http://schemas.openxmlformats.org/drawingml/2006/main">
             <a:pPr>
+              <a:buNone/>
               <a:defRPr sz="2025" b="0">
                 <a:solidFill>
                   <a:srgbClr val="FFFFFF"/>
@@ -15349,6 +17963,7 @@
           </a:p>
           <a:p xmlns:a="http://schemas.openxmlformats.org/drawingml/2006/main">
             <a:pPr>
+              <a:buNone/>
               <a:defRPr sz="2025" b="0">
                 <a:solidFill>
                   <a:srgbClr val="FFFFFF"/>
@@ -15372,6 +17987,7 @@
           </a:p>
           <a:p xmlns:a="http://schemas.openxmlformats.org/drawingml/2006/main">
             <a:pPr>
+              <a:buNone/>
               <a:defRPr sz="2025" b="0">
                 <a:solidFill>
                   <a:srgbClr val="FFFFFF"/>
@@ -15395,6 +18011,7 @@
           </a:p>
           <a:p xmlns:a="http://schemas.openxmlformats.org/drawingml/2006/main">
             <a:pPr>
+              <a:buNone/>
               <a:defRPr sz="2025" b="0">
                 <a:solidFill>
                   <a:srgbClr val="FFFFFF"/>
@@ -15464,6 +18081,7 @@
           </a:lstStyle>
           <a:p xmlns:a="http://schemas.openxmlformats.org/drawingml/2006/main">
             <a:pPr>
+              <a:buNone/>
               <a:defRPr sz="2700" b="1">
                 <a:solidFill>
                   <a:srgbClr val="F55A47"/>
@@ -15562,6 +18180,7 @@
           </a:lstStyle>
           <a:p xmlns:a="http://schemas.openxmlformats.org/drawingml/2006/main">
             <a:pPr>
+              <a:buNone/>
               <a:defRPr sz="3675" b="1">
                 <a:solidFill>
                   <a:srgbClr val="FFFFFF"/>
@@ -15631,6 +18250,7 @@
           </a:lstStyle>
           <a:p xmlns:a="http://schemas.openxmlformats.org/drawingml/2006/main">
             <a:pPr>
+              <a:buNone/>
               <a:defRPr sz="1200" b="0">
                 <a:solidFill>
                   <a:srgbClr val="C8C8CC"/>
@@ -15700,6 +18320,7 @@
           </a:lstStyle>
           <a:p xmlns:a="http://schemas.openxmlformats.org/drawingml/2006/main">
             <a:pPr>
+              <a:buNone/>
               <a:defRPr sz="2475" b="0">
                 <a:solidFill>
                   <a:srgbClr val="FFFFFF"/>
@@ -15769,6 +18390,7 @@
           </a:lstStyle>
           <a:p xmlns:a="http://schemas.openxmlformats.org/drawingml/2006/main">
             <a:pPr>
+              <a:buNone/>
               <a:defRPr sz="2475" b="0">
                 <a:solidFill>
                   <a:srgbClr val="FFFFFF"/>
@@ -15838,6 +18460,7 @@
           </a:lstStyle>
           <a:p xmlns:a="http://schemas.openxmlformats.org/drawingml/2006/main">
             <a:pPr>
+              <a:buNone/>
               <a:defRPr sz="2625" b="1">
                 <a:solidFill>
                   <a:srgbClr val="7DDC93"/>
